--- a/docs/design/engineering-overview/source.pptx
+++ b/docs/design/engineering-overview/source.pptx
@@ -10,7 +10,7 @@
   <p:sldIdLst>
     <p:sldId id="256" r:id="rId2"/>
   </p:sldIdLst>
-  <p:sldSz cx="9296400" cy="12915900"/>
+  <p:sldSz cx="9296400" cy="20345400"/>
   <p:notesSz cx="6858000" cy="9144000"/>
   <p:defaultTextStyle>
     <a:defPPr>
@@ -3170,7 +3170,7 @@
         </p:nvSpPr>
         <p:spPr>
           <a:xfrm>
-            <a:off x="3048000" y="304800"/>
+            <a:off x="3048000" y="3924300"/>
             <a:ext cx="5943600" cy="2190750"/>
           </a:xfrm>
           <a:prstGeom prst="roundRect">
@@ -3211,7 +3211,7 @@
         </p:nvSpPr>
         <p:spPr>
           <a:xfrm>
-            <a:off x="304800" y="2762250"/>
+            <a:off x="304800" y="6381750"/>
             <a:ext cx="4762500" cy="4572000"/>
           </a:xfrm>
           <a:prstGeom prst="roundRect">
@@ -3252,7 +3252,7 @@
         </p:nvSpPr>
         <p:spPr>
           <a:xfrm>
-            <a:off x="304800" y="304800"/>
+            <a:off x="304800" y="3924300"/>
             <a:ext cx="2552700" cy="2190750"/>
           </a:xfrm>
           <a:prstGeom prst="roundRect">
@@ -3293,7 +3293,7 @@
         </p:nvSpPr>
         <p:spPr>
           <a:xfrm>
-            <a:off x="5257800" y="2762250"/>
+            <a:off x="5257800" y="6381750"/>
             <a:ext cx="3733800" cy="4572000"/>
           </a:xfrm>
           <a:prstGeom prst="roundRect">
@@ -3334,7 +3334,7 @@
         </p:nvSpPr>
         <p:spPr>
           <a:xfrm>
-            <a:off x="304800" y="7600950"/>
+            <a:off x="304800" y="11220450"/>
             <a:ext cx="8686800" cy="5010150"/>
           </a:xfrm>
           <a:prstGeom prst="roundRect">
@@ -3375,7 +3375,7 @@
         </p:nvSpPr>
         <p:spPr>
           <a:xfrm>
-            <a:off x="3238500" y="495300"/>
+            <a:off x="3238500" y="4114800"/>
             <a:ext cx="1409700" cy="438150"/>
           </a:xfrm>
           <a:prstGeom prst="roundRect">
@@ -3535,7 +3535,7 @@
         </p:nvCxnSpPr>
         <p:spPr>
           <a:xfrm>
-            <a:off x="3409950" y="1285875"/>
+            <a:off x="3409950" y="4905375"/>
             <a:ext cx="790575" cy="0"/>
           </a:xfrm>
           <a:prstGeom prst="straightConnector1">
@@ -3566,7 +3566,7 @@
         </p:nvSpPr>
         <p:spPr>
           <a:xfrm>
-            <a:off x="3857625" y="1238250"/>
+            <a:off x="3857625" y="4857750"/>
             <a:ext cx="76200" cy="95250"/>
           </a:xfrm>
           <a:prstGeom prst="rect">
@@ -3601,7 +3601,7 @@
         </p:nvCxnSpPr>
         <p:spPr>
           <a:xfrm>
-            <a:off x="3495675" y="1400175"/>
+            <a:off x="3495675" y="5019675"/>
             <a:ext cx="790575" cy="0"/>
           </a:xfrm>
           <a:prstGeom prst="straightConnector1">
@@ -3632,7 +3632,7 @@
         </p:nvSpPr>
         <p:spPr>
           <a:xfrm>
-            <a:off x="3857625" y="1352550"/>
+            <a:off x="3857625" y="4972050"/>
             <a:ext cx="76200" cy="95250"/>
           </a:xfrm>
           <a:prstGeom prst="rect">
@@ -3667,7 +3667,7 @@
         </p:nvCxnSpPr>
         <p:spPr>
           <a:xfrm>
-            <a:off x="3409950" y="1514475"/>
+            <a:off x="3409950" y="5133975"/>
             <a:ext cx="790575" cy="0"/>
           </a:xfrm>
           <a:prstGeom prst="straightConnector1">
@@ -3698,7 +3698,7 @@
         </p:nvSpPr>
         <p:spPr>
           <a:xfrm>
-            <a:off x="3857625" y="1466850"/>
+            <a:off x="3857625" y="5086350"/>
             <a:ext cx="76200" cy="95250"/>
           </a:xfrm>
           <a:prstGeom prst="rect">
@@ -3733,7 +3733,7 @@
         </p:nvCxnSpPr>
         <p:spPr>
           <a:xfrm>
-            <a:off x="3495675" y="1628775"/>
+            <a:off x="3495675" y="5248275"/>
             <a:ext cx="790575" cy="0"/>
           </a:xfrm>
           <a:prstGeom prst="straightConnector1">
@@ -3764,7 +3764,7 @@
         </p:nvSpPr>
         <p:spPr>
           <a:xfrm>
-            <a:off x="3857625" y="1581150"/>
+            <a:off x="3857625" y="5200650"/>
             <a:ext cx="76200" cy="95250"/>
           </a:xfrm>
           <a:prstGeom prst="rect">
@@ -3801,7 +3801,7 @@
         </p:nvSpPr>
         <p:spPr>
           <a:xfrm>
-            <a:off x="3238500" y="1943100"/>
+            <a:off x="3238500" y="5562600"/>
             <a:ext cx="1238250" cy="266700"/>
           </a:xfrm>
           <a:prstGeom prst="rect">
@@ -3959,7 +3959,7 @@
         </p:nvSpPr>
         <p:spPr>
           <a:xfrm>
-            <a:off x="4714875" y="1333500"/>
+            <a:off x="4714875" y="4953000"/>
             <a:ext cx="123825" cy="304800"/>
           </a:xfrm>
           <a:prstGeom prst="roundRect">
@@ -4000,7 +4000,7 @@
         </p:nvSpPr>
         <p:spPr>
           <a:xfrm>
-            <a:off x="4867275" y="1267509"/>
+            <a:off x="4867275" y="4887009"/>
             <a:ext cx="123825" cy="304800"/>
           </a:xfrm>
           <a:prstGeom prst="roundRect">
@@ -4041,7 +4041,7 @@
         </p:nvSpPr>
         <p:spPr>
           <a:xfrm>
-            <a:off x="5019675" y="1267509"/>
+            <a:off x="5019675" y="4887009"/>
             <a:ext cx="123825" cy="304800"/>
           </a:xfrm>
           <a:prstGeom prst="roundRect">
@@ -4082,7 +4082,7 @@
         </p:nvSpPr>
         <p:spPr>
           <a:xfrm>
-            <a:off x="5172075" y="1333500"/>
+            <a:off x="5172075" y="4953000"/>
             <a:ext cx="123825" cy="304800"/>
           </a:xfrm>
           <a:prstGeom prst="roundRect">
@@ -4123,7 +4123,7 @@
         </p:nvSpPr>
         <p:spPr>
           <a:xfrm>
-            <a:off x="5314950" y="1362075"/>
+            <a:off x="5314950" y="4981575"/>
             <a:ext cx="142875" cy="114300"/>
           </a:xfrm>
           <a:custGeom>
@@ -4177,7 +4177,7 @@
         </p:nvSpPr>
         <p:spPr>
           <a:xfrm>
-            <a:off x="5429250" y="1238250"/>
+            <a:off x="5429250" y="4857750"/>
             <a:ext cx="323850" cy="333375"/>
           </a:xfrm>
           <a:prstGeom prst="ellipse">
@@ -4216,7 +4216,7 @@
         </p:nvSpPr>
         <p:spPr>
           <a:xfrm>
-            <a:off x="4448175" y="1943100"/>
+            <a:off x="4448175" y="5562600"/>
             <a:ext cx="1619250" cy="266700"/>
           </a:xfrm>
           <a:prstGeom prst="rect">
@@ -4372,7 +4372,7 @@
         </p:nvCxnSpPr>
         <p:spPr>
           <a:xfrm flipV="1">
-            <a:off x="6172200" y="1238250"/>
+            <a:off x="6172200" y="4857750"/>
             <a:ext cx="247650" cy="85725"/>
           </a:xfrm>
           <a:prstGeom prst="straightConnector1">
@@ -4401,7 +4401,7 @@
         </p:nvCxnSpPr>
         <p:spPr>
           <a:xfrm>
-            <a:off x="6172200" y="1323975"/>
+            <a:off x="6172200" y="4943475"/>
             <a:ext cx="247650" cy="142875"/>
           </a:xfrm>
           <a:prstGeom prst="straightConnector1">
@@ -4430,7 +4430,7 @@
         </p:nvCxnSpPr>
         <p:spPr>
           <a:xfrm>
-            <a:off x="6172200" y="1323975"/>
+            <a:off x="6172200" y="4943475"/>
             <a:ext cx="247650" cy="390525"/>
           </a:xfrm>
           <a:prstGeom prst="straightConnector1">
@@ -4459,7 +4459,7 @@
         </p:nvCxnSpPr>
         <p:spPr>
           <a:xfrm flipV="1">
-            <a:off x="6172200" y="1238250"/>
+            <a:off x="6172200" y="4857750"/>
             <a:ext cx="247650" cy="371475"/>
           </a:xfrm>
           <a:prstGeom prst="straightConnector1">
@@ -4488,7 +4488,7 @@
         </p:nvCxnSpPr>
         <p:spPr>
           <a:xfrm flipV="1">
-            <a:off x="6172200" y="1466850"/>
+            <a:off x="6172200" y="5086350"/>
             <a:ext cx="247650" cy="142875"/>
           </a:xfrm>
           <a:prstGeom prst="straightConnector1">
@@ -4517,7 +4517,7 @@
         </p:nvCxnSpPr>
         <p:spPr>
           <a:xfrm>
-            <a:off x="6172200" y="1609725"/>
+            <a:off x="6172200" y="5229225"/>
             <a:ext cx="247650" cy="104775"/>
           </a:xfrm>
           <a:prstGeom prst="straightConnector1">
@@ -4546,7 +4546,7 @@
         </p:nvCxnSpPr>
         <p:spPr>
           <a:xfrm>
-            <a:off x="6419850" y="1238250"/>
+            <a:off x="6419850" y="4857750"/>
             <a:ext cx="247650" cy="85725"/>
           </a:xfrm>
           <a:prstGeom prst="straightConnector1">
@@ -4575,7 +4575,7 @@
         </p:nvCxnSpPr>
         <p:spPr>
           <a:xfrm>
-            <a:off x="6419850" y="1238250"/>
+            <a:off x="6419850" y="4857750"/>
             <a:ext cx="247650" cy="371475"/>
           </a:xfrm>
           <a:prstGeom prst="straightConnector1">
@@ -4604,7 +4604,7 @@
         </p:nvCxnSpPr>
         <p:spPr>
           <a:xfrm flipV="1">
-            <a:off x="6419850" y="1323975"/>
+            <a:off x="6419850" y="4943475"/>
             <a:ext cx="247650" cy="142875"/>
           </a:xfrm>
           <a:prstGeom prst="straightConnector1">
@@ -4633,7 +4633,7 @@
         </p:nvCxnSpPr>
         <p:spPr>
           <a:xfrm>
-            <a:off x="6419850" y="1466850"/>
+            <a:off x="6419850" y="5086350"/>
             <a:ext cx="247650" cy="142875"/>
           </a:xfrm>
           <a:prstGeom prst="straightConnector1">
@@ -4662,7 +4662,7 @@
         </p:nvCxnSpPr>
         <p:spPr>
           <a:xfrm flipV="1">
-            <a:off x="6419850" y="1323975"/>
+            <a:off x="6419850" y="4943475"/>
             <a:ext cx="247650" cy="390525"/>
           </a:xfrm>
           <a:prstGeom prst="straightConnector1">
@@ -4691,7 +4691,7 @@
         </p:nvCxnSpPr>
         <p:spPr>
           <a:xfrm flipV="1">
-            <a:off x="6419850" y="1609725"/>
+            <a:off x="6419850" y="5229225"/>
             <a:ext cx="247650" cy="104775"/>
           </a:xfrm>
           <a:prstGeom prst="straightConnector1">
@@ -4722,7 +4722,7 @@
         </p:nvSpPr>
         <p:spPr>
           <a:xfrm>
-            <a:off x="6134100" y="1285875"/>
+            <a:off x="6134100" y="4905375"/>
             <a:ext cx="76200" cy="76200"/>
           </a:xfrm>
           <a:prstGeom prst="ellipse">
@@ -4759,7 +4759,7 @@
         </p:nvSpPr>
         <p:spPr>
           <a:xfrm>
-            <a:off x="6134100" y="1571625"/>
+            <a:off x="6134100" y="5191125"/>
             <a:ext cx="76200" cy="76200"/>
           </a:xfrm>
           <a:prstGeom prst="ellipse">
@@ -4796,7 +4796,7 @@
         </p:nvSpPr>
         <p:spPr>
           <a:xfrm>
-            <a:off x="6381750" y="1200150"/>
+            <a:off x="6381750" y="4819650"/>
             <a:ext cx="76200" cy="76200"/>
           </a:xfrm>
           <a:prstGeom prst="ellipse">
@@ -4833,7 +4833,7 @@
         </p:nvSpPr>
         <p:spPr>
           <a:xfrm>
-            <a:off x="6381750" y="1428750"/>
+            <a:off x="6381750" y="5048250"/>
             <a:ext cx="76200" cy="76200"/>
           </a:xfrm>
           <a:prstGeom prst="ellipse">
@@ -4870,7 +4870,7 @@
         </p:nvSpPr>
         <p:spPr>
           <a:xfrm>
-            <a:off x="6381750" y="1676400"/>
+            <a:off x="6381750" y="5295900"/>
             <a:ext cx="76200" cy="76200"/>
           </a:xfrm>
           <a:prstGeom prst="ellipse">
@@ -4907,7 +4907,7 @@
         </p:nvSpPr>
         <p:spPr>
           <a:xfrm>
-            <a:off x="6629400" y="1285875"/>
+            <a:off x="6629400" y="4905375"/>
             <a:ext cx="76200" cy="76200"/>
           </a:xfrm>
           <a:prstGeom prst="ellipse">
@@ -4944,7 +4944,7 @@
         </p:nvSpPr>
         <p:spPr>
           <a:xfrm>
-            <a:off x="6629400" y="1571625"/>
+            <a:off x="6629400" y="5191125"/>
             <a:ext cx="76200" cy="76200"/>
           </a:xfrm>
           <a:prstGeom prst="ellipse">
@@ -4979,7 +4979,7 @@
         </p:nvCxnSpPr>
         <p:spPr>
           <a:xfrm>
-            <a:off x="6762750" y="1466850"/>
+            <a:off x="6762750" y="5086350"/>
             <a:ext cx="142875" cy="0"/>
           </a:xfrm>
           <a:prstGeom prst="straightConnector1">
@@ -5010,7 +5010,7 @@
         </p:nvSpPr>
         <p:spPr>
           <a:xfrm>
-            <a:off x="6953250" y="1323975"/>
+            <a:off x="6953250" y="4943475"/>
             <a:ext cx="228600" cy="276225"/>
           </a:xfrm>
           <a:prstGeom prst="rect">
@@ -5168,7 +5168,7 @@
         </p:nvSpPr>
         <p:spPr>
           <a:xfrm>
-            <a:off x="5981700" y="1943100"/>
+            <a:off x="5981700" y="5562600"/>
             <a:ext cx="1238250" cy="266700"/>
           </a:xfrm>
           <a:prstGeom prst="rect">
@@ -5324,7 +5324,7 @@
         </p:nvCxnSpPr>
         <p:spPr>
           <a:xfrm>
-            <a:off x="7896225" y="1352550"/>
+            <a:off x="7896225" y="4972050"/>
             <a:ext cx="314325" cy="0"/>
           </a:xfrm>
           <a:prstGeom prst="straightConnector1">
@@ -5353,7 +5353,7 @@
         </p:nvCxnSpPr>
         <p:spPr>
           <a:xfrm>
-            <a:off x="7724775" y="1476375"/>
+            <a:off x="7724775" y="5095875"/>
             <a:ext cx="238125" cy="95250"/>
           </a:xfrm>
           <a:prstGeom prst="straightConnector1">
@@ -5382,7 +5382,7 @@
         </p:nvCxnSpPr>
         <p:spPr>
           <a:xfrm flipH="1">
-            <a:off x="8162925" y="1476375"/>
+            <a:off x="8162925" y="5095875"/>
             <a:ext cx="200025" cy="95250"/>
           </a:xfrm>
           <a:prstGeom prst="straightConnector1">
@@ -5413,7 +5413,7 @@
         </p:nvSpPr>
         <p:spPr>
           <a:xfrm>
-            <a:off x="7562850" y="1238250"/>
+            <a:off x="7562850" y="4857750"/>
             <a:ext cx="333375" cy="228600"/>
           </a:xfrm>
           <a:prstGeom prst="roundRect">
@@ -5454,7 +5454,7 @@
         </p:nvSpPr>
         <p:spPr>
           <a:xfrm>
-            <a:off x="8210550" y="1238250"/>
+            <a:off x="8210550" y="4857750"/>
             <a:ext cx="333375" cy="228600"/>
           </a:xfrm>
           <a:prstGeom prst="roundRect">
@@ -5495,7 +5495,7 @@
         </p:nvSpPr>
         <p:spPr>
           <a:xfrm>
-            <a:off x="7886700" y="1552575"/>
+            <a:off x="7886700" y="5172075"/>
             <a:ext cx="333375" cy="228600"/>
           </a:xfrm>
           <a:prstGeom prst="roundRect">
@@ -5536,7 +5536,7 @@
         </p:nvSpPr>
         <p:spPr>
           <a:xfrm>
-            <a:off x="7410450" y="1943100"/>
+            <a:off x="7410450" y="5562600"/>
             <a:ext cx="1295400" cy="266700"/>
           </a:xfrm>
           <a:prstGeom prst="rect">
@@ -5694,7 +5694,7 @@
         </p:nvSpPr>
         <p:spPr>
           <a:xfrm>
-            <a:off x="495300" y="495300"/>
+            <a:off x="495300" y="4114800"/>
             <a:ext cx="1409700" cy="438150"/>
           </a:xfrm>
           <a:prstGeom prst="roundRect">
@@ -5856,7 +5856,7 @@
         </p:nvSpPr>
         <p:spPr>
           <a:xfrm>
-            <a:off x="495300" y="1104900"/>
+            <a:off x="495300" y="4724400"/>
             <a:ext cx="1200150" cy="438150"/>
           </a:xfrm>
           <a:prstGeom prst="roundRect">
@@ -6022,7 +6022,7 @@
         </p:blipFill>
         <p:spPr>
           <a:xfrm>
-            <a:off x="1771650" y="1266825"/>
+            <a:off x="1771650" y="4886325"/>
             <a:ext cx="857250" cy="857250"/>
           </a:xfrm>
           <a:prstGeom prst="rect">
@@ -6046,7 +6046,7 @@
         </p:nvSpPr>
         <p:spPr>
           <a:xfrm>
-            <a:off x="495300" y="2952750"/>
+            <a:off x="495300" y="6572250"/>
             <a:ext cx="1409700" cy="438150"/>
           </a:xfrm>
           <a:prstGeom prst="roundRect">
@@ -6208,7 +6208,7 @@
         </p:nvSpPr>
         <p:spPr>
           <a:xfrm>
-            <a:off x="1175385" y="4162425"/>
+            <a:off x="1175385" y="7781925"/>
             <a:ext cx="952500" cy="285750"/>
           </a:xfrm>
           <a:prstGeom prst="rect">
@@ -6366,7 +6366,7 @@
         </p:nvSpPr>
         <p:spPr>
           <a:xfrm rot="-990000">
-            <a:off x="1108710" y="4620578"/>
+            <a:off x="1108710" y="8240078"/>
             <a:ext cx="153352" cy="333375"/>
           </a:xfrm>
           <a:prstGeom prst="roundRect">
@@ -6407,7 +6407,7 @@
         </p:nvSpPr>
         <p:spPr>
           <a:xfrm rot="-810000">
-            <a:off x="1275397" y="4567981"/>
+            <a:off x="1275397" y="8187481"/>
             <a:ext cx="153352" cy="333375"/>
           </a:xfrm>
           <a:prstGeom prst="roundRect">
@@ -6448,7 +6448,7 @@
         </p:nvSpPr>
         <p:spPr>
           <a:xfrm rot="-630000">
-            <a:off x="1442085" y="4519645"/>
+            <a:off x="1442085" y="8139145"/>
             <a:ext cx="153352" cy="333375"/>
           </a:xfrm>
           <a:prstGeom prst="roundRect">
@@ -6489,7 +6489,7 @@
         </p:nvSpPr>
         <p:spPr>
           <a:xfrm rot="-450000">
-            <a:off x="1608772" y="4479487"/>
+            <a:off x="1608772" y="8098987"/>
             <a:ext cx="153352" cy="333375"/>
           </a:xfrm>
           <a:prstGeom prst="roundRect">
@@ -6530,7 +6530,7 @@
         </p:nvSpPr>
         <p:spPr>
           <a:xfrm rot="-270000">
-            <a:off x="1775460" y="4450758"/>
+            <a:off x="1775460" y="8070258"/>
             <a:ext cx="153352" cy="333375"/>
           </a:xfrm>
           <a:prstGeom prst="roundRect">
@@ -6571,7 +6571,7 @@
         </p:nvSpPr>
         <p:spPr>
           <a:xfrm rot="-90000">
-            <a:off x="1942147" y="4435788"/>
+            <a:off x="1942147" y="8055288"/>
             <a:ext cx="153352" cy="333375"/>
           </a:xfrm>
           <a:prstGeom prst="roundRect">
@@ -6612,7 +6612,7 @@
         </p:nvSpPr>
         <p:spPr>
           <a:xfrm rot="90000">
-            <a:off x="2108835" y="4435788"/>
+            <a:off x="2108835" y="8055288"/>
             <a:ext cx="153352" cy="333375"/>
           </a:xfrm>
           <a:prstGeom prst="roundRect">
@@ -6653,7 +6653,7 @@
         </p:nvSpPr>
         <p:spPr>
           <a:xfrm rot="270000">
-            <a:off x="2275522" y="4450758"/>
+            <a:off x="2275522" y="8070258"/>
             <a:ext cx="153352" cy="333375"/>
           </a:xfrm>
           <a:prstGeom prst="roundRect">
@@ -6694,7 +6694,7 @@
         </p:nvSpPr>
         <p:spPr>
           <a:xfrm rot="450000">
-            <a:off x="2442210" y="4479487"/>
+            <a:off x="2442210" y="8098987"/>
             <a:ext cx="153352" cy="333375"/>
           </a:xfrm>
           <a:prstGeom prst="roundRect">
@@ -6735,7 +6735,7 @@
         </p:nvSpPr>
         <p:spPr>
           <a:xfrm rot="630000">
-            <a:off x="2608898" y="4519645"/>
+            <a:off x="2608898" y="8139145"/>
             <a:ext cx="153352" cy="333375"/>
           </a:xfrm>
           <a:prstGeom prst="roundRect">
@@ -6776,7 +6776,7 @@
         </p:nvSpPr>
         <p:spPr>
           <a:xfrm rot="810000">
-            <a:off x="2775585" y="4567981"/>
+            <a:off x="2775585" y="8187481"/>
             <a:ext cx="153352" cy="333375"/>
           </a:xfrm>
           <a:prstGeom prst="roundRect">
@@ -6817,7 +6817,7 @@
         </p:nvSpPr>
         <p:spPr>
           <a:xfrm rot="990000">
-            <a:off x="2942272" y="4620578"/>
+            <a:off x="2942272" y="8240078"/>
             <a:ext cx="153352" cy="333375"/>
           </a:xfrm>
           <a:prstGeom prst="roundRect">
@@ -6858,7 +6858,7 @@
         </p:nvSpPr>
         <p:spPr>
           <a:xfrm>
-            <a:off x="3048952" y="4500562"/>
+            <a:off x="3048952" y="8120062"/>
             <a:ext cx="413385" cy="213360"/>
           </a:xfrm>
           <a:custGeom>
@@ -6917,7 +6917,7 @@
         </p:nvSpPr>
         <p:spPr>
           <a:xfrm>
-            <a:off x="3402330" y="4387215"/>
+            <a:off x="3402330" y="8006715"/>
             <a:ext cx="873442" cy="620078"/>
           </a:xfrm>
           <a:prstGeom prst="ellipse">
@@ -6956,7 +6956,7 @@
         </p:nvSpPr>
         <p:spPr>
           <a:xfrm>
-            <a:off x="3406616" y="4580830"/>
+            <a:off x="3406616" y="8200330"/>
             <a:ext cx="866775" cy="285750"/>
           </a:xfrm>
           <a:prstGeom prst="rect">
@@ -7114,7 +7114,7 @@
         </p:nvSpPr>
         <p:spPr>
           <a:xfrm>
-            <a:off x="741997" y="5147310"/>
+            <a:off x="741997" y="8766810"/>
             <a:ext cx="3767138" cy="93345"/>
           </a:xfrm>
           <a:custGeom>
@@ -7178,7 +7178,7 @@
         </p:nvSpPr>
         <p:spPr>
           <a:xfrm>
-            <a:off x="495300" y="5067300"/>
+            <a:off x="495300" y="8686800"/>
             <a:ext cx="266700" cy="226695"/>
           </a:xfrm>
           <a:prstGeom prst="rect">
@@ -7336,7 +7336,7 @@
         </p:nvSpPr>
         <p:spPr>
           <a:xfrm>
-            <a:off x="4575810" y="5067300"/>
+            <a:off x="4575810" y="8686800"/>
             <a:ext cx="266700" cy="226695"/>
           </a:xfrm>
           <a:prstGeom prst="rect">
@@ -7494,7 +7494,7 @@
         </p:nvSpPr>
         <p:spPr>
           <a:xfrm>
-            <a:off x="1128712" y="5120640"/>
+            <a:off x="1128712" y="8740140"/>
             <a:ext cx="106680" cy="166688"/>
           </a:xfrm>
           <a:prstGeom prst="roundRect">
@@ -7533,7 +7533,7 @@
         </p:nvCxnSpPr>
         <p:spPr>
           <a:xfrm>
-            <a:off x="1182053" y="4987290"/>
+            <a:off x="1182053" y="8606790"/>
             <a:ext cx="0" cy="133350"/>
           </a:xfrm>
           <a:prstGeom prst="straightConnector1">
@@ -7564,7 +7564,7 @@
         </p:nvSpPr>
         <p:spPr>
           <a:xfrm>
-            <a:off x="1288732" y="5120640"/>
+            <a:off x="1288732" y="8740140"/>
             <a:ext cx="106680" cy="166688"/>
           </a:xfrm>
           <a:prstGeom prst="roundRect">
@@ -7603,7 +7603,7 @@
         </p:nvCxnSpPr>
         <p:spPr>
           <a:xfrm>
-            <a:off x="1342072" y="4987290"/>
+            <a:off x="1342072" y="8606790"/>
             <a:ext cx="0" cy="133350"/>
           </a:xfrm>
           <a:prstGeom prst="straightConnector1">
@@ -7634,7 +7634,7 @@
         </p:nvSpPr>
         <p:spPr>
           <a:xfrm>
-            <a:off x="1448753" y="5120640"/>
+            <a:off x="1448753" y="8740140"/>
             <a:ext cx="106680" cy="166688"/>
           </a:xfrm>
           <a:prstGeom prst="roundRect">
@@ -7673,7 +7673,7 @@
         </p:nvCxnSpPr>
         <p:spPr>
           <a:xfrm>
-            <a:off x="1502092" y="4987290"/>
+            <a:off x="1502092" y="8606790"/>
             <a:ext cx="0" cy="133350"/>
           </a:xfrm>
           <a:prstGeom prst="straightConnector1">
@@ -7704,7 +7704,7 @@
         </p:nvSpPr>
         <p:spPr>
           <a:xfrm>
-            <a:off x="1608772" y="5120640"/>
+            <a:off x="1608772" y="8740140"/>
             <a:ext cx="106680" cy="166688"/>
           </a:xfrm>
           <a:prstGeom prst="roundRect">
@@ -7743,7 +7743,7 @@
         </p:nvCxnSpPr>
         <p:spPr>
           <a:xfrm>
-            <a:off x="1662112" y="4987290"/>
+            <a:off x="1662112" y="8606790"/>
             <a:ext cx="0" cy="133350"/>
           </a:xfrm>
           <a:prstGeom prst="straightConnector1">
@@ -7774,7 +7774,7 @@
         </p:nvSpPr>
         <p:spPr>
           <a:xfrm>
-            <a:off x="1768792" y="5120640"/>
+            <a:off x="1768792" y="8740140"/>
             <a:ext cx="106680" cy="166688"/>
           </a:xfrm>
           <a:prstGeom prst="roundRect">
@@ -7813,7 +7813,7 @@
         </p:nvCxnSpPr>
         <p:spPr>
           <a:xfrm>
-            <a:off x="1822132" y="4987290"/>
+            <a:off x="1822132" y="8606790"/>
             <a:ext cx="0" cy="133350"/>
           </a:xfrm>
           <a:prstGeom prst="straightConnector1">
@@ -7844,7 +7844,7 @@
         </p:nvSpPr>
         <p:spPr>
           <a:xfrm>
-            <a:off x="1928812" y="5120640"/>
+            <a:off x="1928812" y="8740140"/>
             <a:ext cx="106680" cy="166688"/>
           </a:xfrm>
           <a:prstGeom prst="roundRect">
@@ -7883,7 +7883,7 @@
         </p:nvCxnSpPr>
         <p:spPr>
           <a:xfrm>
-            <a:off x="1982152" y="4987290"/>
+            <a:off x="1982152" y="8606790"/>
             <a:ext cx="0" cy="133350"/>
           </a:xfrm>
           <a:prstGeom prst="straightConnector1">
@@ -7914,7 +7914,7 @@
         </p:nvSpPr>
         <p:spPr>
           <a:xfrm>
-            <a:off x="2088832" y="5120640"/>
+            <a:off x="2088832" y="8740140"/>
             <a:ext cx="106680" cy="166688"/>
           </a:xfrm>
           <a:prstGeom prst="roundRect">
@@ -7953,7 +7953,7 @@
         </p:nvCxnSpPr>
         <p:spPr>
           <a:xfrm>
-            <a:off x="2142172" y="4987290"/>
+            <a:off x="2142172" y="8606790"/>
             <a:ext cx="0" cy="133350"/>
           </a:xfrm>
           <a:prstGeom prst="straightConnector1">
@@ -7984,7 +7984,7 @@
         </p:nvSpPr>
         <p:spPr>
           <a:xfrm>
-            <a:off x="2248852" y="5120640"/>
+            <a:off x="2248852" y="8740140"/>
             <a:ext cx="106680" cy="166688"/>
           </a:xfrm>
           <a:prstGeom prst="roundRect">
@@ -8023,7 +8023,7 @@
         </p:nvCxnSpPr>
         <p:spPr>
           <a:xfrm>
-            <a:off x="2302192" y="4987290"/>
+            <a:off x="2302192" y="8606790"/>
             <a:ext cx="0" cy="133350"/>
           </a:xfrm>
           <a:prstGeom prst="straightConnector1">
@@ -8054,7 +8054,7 @@
         </p:nvSpPr>
         <p:spPr>
           <a:xfrm>
-            <a:off x="2408872" y="5120640"/>
+            <a:off x="2408872" y="8740140"/>
             <a:ext cx="106680" cy="166688"/>
           </a:xfrm>
           <a:prstGeom prst="roundRect">
@@ -8093,7 +8093,7 @@
         </p:nvCxnSpPr>
         <p:spPr>
           <a:xfrm>
-            <a:off x="2462212" y="4987290"/>
+            <a:off x="2462212" y="8606790"/>
             <a:ext cx="0" cy="133350"/>
           </a:xfrm>
           <a:prstGeom prst="straightConnector1">
@@ -8124,7 +8124,7 @@
         </p:nvSpPr>
         <p:spPr>
           <a:xfrm>
-            <a:off x="2568892" y="5120640"/>
+            <a:off x="2568892" y="8740140"/>
             <a:ext cx="106680" cy="166688"/>
           </a:xfrm>
           <a:prstGeom prst="roundRect">
@@ -8163,7 +8163,7 @@
         </p:nvCxnSpPr>
         <p:spPr>
           <a:xfrm>
-            <a:off x="2622232" y="4987290"/>
+            <a:off x="2622232" y="8606790"/>
             <a:ext cx="0" cy="133350"/>
           </a:xfrm>
           <a:prstGeom prst="straightConnector1">
@@ -8194,7 +8194,7 @@
         </p:nvSpPr>
         <p:spPr>
           <a:xfrm>
-            <a:off x="2728912" y="5120640"/>
+            <a:off x="2728912" y="8740140"/>
             <a:ext cx="106680" cy="166688"/>
           </a:xfrm>
           <a:prstGeom prst="roundRect">
@@ -8233,7 +8233,7 @@
         </p:nvCxnSpPr>
         <p:spPr>
           <a:xfrm>
-            <a:off x="2782252" y="4987290"/>
+            <a:off x="2782252" y="8606790"/>
             <a:ext cx="0" cy="133350"/>
           </a:xfrm>
           <a:prstGeom prst="straightConnector1">
@@ -8264,7 +8264,7 @@
         </p:nvSpPr>
         <p:spPr>
           <a:xfrm>
-            <a:off x="2888932" y="5120640"/>
+            <a:off x="2888932" y="8740140"/>
             <a:ext cx="106680" cy="166688"/>
           </a:xfrm>
           <a:prstGeom prst="roundRect">
@@ -8303,7 +8303,7 @@
         </p:nvCxnSpPr>
         <p:spPr>
           <a:xfrm>
-            <a:off x="2942272" y="4987290"/>
+            <a:off x="2942272" y="8606790"/>
             <a:ext cx="0" cy="133350"/>
           </a:xfrm>
           <a:prstGeom prst="straightConnector1">
@@ -8334,7 +8334,7 @@
         </p:nvSpPr>
         <p:spPr>
           <a:xfrm>
-            <a:off x="3709035" y="5053965"/>
+            <a:off x="3709035" y="8673465"/>
             <a:ext cx="280035" cy="280035"/>
           </a:xfrm>
           <a:prstGeom prst="ellipse">
@@ -8373,7 +8373,7 @@
         </p:nvSpPr>
         <p:spPr>
           <a:xfrm>
-            <a:off x="3709035" y="5053965"/>
+            <a:off x="3709035" y="8673465"/>
             <a:ext cx="280035" cy="280035"/>
           </a:xfrm>
           <a:prstGeom prst="rect">
@@ -8529,7 +8529,7 @@
         </p:nvCxnSpPr>
         <p:spPr>
           <a:xfrm>
-            <a:off x="3849052" y="5013960"/>
+            <a:off x="3849052" y="8633460"/>
             <a:ext cx="0" cy="33338"/>
           </a:xfrm>
           <a:prstGeom prst="straightConnector1">
@@ -8560,7 +8560,7 @@
         </p:nvSpPr>
         <p:spPr>
           <a:xfrm>
-            <a:off x="723900" y="6010275"/>
+            <a:off x="723900" y="9629775"/>
             <a:ext cx="2095500" cy="304800"/>
           </a:xfrm>
           <a:prstGeom prst="rect">
@@ -8716,7 +8716,7 @@
         </p:nvCxnSpPr>
         <p:spPr>
           <a:xfrm>
-            <a:off x="3849052" y="5374005"/>
+            <a:off x="3849052" y="8993505"/>
             <a:ext cx="0" cy="293370"/>
           </a:xfrm>
           <a:prstGeom prst="straightConnector1">
@@ -8747,7 +8747,7 @@
         </p:nvSpPr>
         <p:spPr>
           <a:xfrm>
-            <a:off x="3709035" y="5720715"/>
+            <a:off x="3709035" y="9340215"/>
             <a:ext cx="280035" cy="280035"/>
           </a:xfrm>
           <a:prstGeom prst="ellipse">
@@ -8786,7 +8786,7 @@
         </p:nvSpPr>
         <p:spPr>
           <a:xfrm>
-            <a:off x="3709035" y="5720715"/>
+            <a:off x="3709035" y="9340215"/>
             <a:ext cx="280035" cy="280035"/>
           </a:xfrm>
           <a:prstGeom prst="rect">
@@ -8942,7 +8942,7 @@
         </p:nvCxnSpPr>
         <p:spPr>
           <a:xfrm>
-            <a:off x="3542348" y="5860732"/>
+            <a:off x="3542348" y="9480232"/>
             <a:ext cx="160020" cy="0"/>
           </a:xfrm>
           <a:prstGeom prst="straightConnector1">
@@ -8971,7 +8971,7 @@
         </p:nvCxnSpPr>
         <p:spPr>
           <a:xfrm>
-            <a:off x="3995738" y="5860732"/>
+            <a:off x="3995738" y="9480232"/>
             <a:ext cx="166688" cy="0"/>
           </a:xfrm>
           <a:prstGeom prst="straightConnector1">
@@ -9002,7 +9002,7 @@
         </p:nvSpPr>
         <p:spPr>
           <a:xfrm>
-            <a:off x="5448300" y="2952750"/>
+            <a:off x="5448300" y="6572250"/>
             <a:ext cx="1409700" cy="438150"/>
           </a:xfrm>
           <a:prstGeom prst="roundRect">
@@ -9164,7 +9164,7 @@
         </p:nvSpPr>
         <p:spPr>
           <a:xfrm>
-            <a:off x="5448300" y="3790950"/>
+            <a:off x="5448300" y="7410450"/>
             <a:ext cx="285750" cy="238125"/>
           </a:xfrm>
           <a:prstGeom prst="rect">
@@ -9322,7 +9322,7 @@
         </p:nvSpPr>
         <p:spPr>
           <a:xfrm>
-            <a:off x="8315325" y="4733925"/>
+            <a:off x="8315325" y="8353425"/>
             <a:ext cx="285750" cy="238125"/>
           </a:xfrm>
           <a:prstGeom prst="rect">
@@ -9472,7 +9472,7 @@
         </p:nvCxnSpPr>
         <p:spPr>
           <a:xfrm>
-            <a:off x="5543550" y="4276725"/>
+            <a:off x="5543550" y="7896225"/>
             <a:ext cx="2724150" cy="0"/>
           </a:xfrm>
           <a:prstGeom prst="straightConnector1">
@@ -9495,7 +9495,7 @@
         </p:nvCxnSpPr>
         <p:spPr>
           <a:xfrm>
-            <a:off x="8267700" y="4276725"/>
+            <a:off x="8267700" y="7896225"/>
             <a:ext cx="190500" cy="0"/>
           </a:xfrm>
           <a:prstGeom prst="straightConnector1">
@@ -9518,7 +9518,7 @@
         </p:nvCxnSpPr>
         <p:spPr>
           <a:xfrm>
-            <a:off x="8458200" y="4276725"/>
+            <a:off x="8458200" y="7896225"/>
             <a:ext cx="0" cy="295275"/>
           </a:xfrm>
           <a:prstGeom prst="straightConnector1">
@@ -9541,7 +9541,7 @@
         </p:nvCxnSpPr>
         <p:spPr>
           <a:xfrm flipH="1">
-            <a:off x="5543550" y="4572000"/>
+            <a:off x="5543550" y="8191500"/>
             <a:ext cx="2914650" cy="0"/>
           </a:xfrm>
           <a:prstGeom prst="straightConnector1">
@@ -9564,7 +9564,7 @@
         </p:nvCxnSpPr>
         <p:spPr>
           <a:xfrm>
-            <a:off x="5543550" y="4572000"/>
+            <a:off x="5543550" y="8191500"/>
             <a:ext cx="0" cy="295275"/>
           </a:xfrm>
           <a:prstGeom prst="straightConnector1">
@@ -9587,7 +9587,7 @@
         </p:nvCxnSpPr>
         <p:spPr>
           <a:xfrm>
-            <a:off x="5543550" y="4867275"/>
+            <a:off x="5543550" y="8486775"/>
             <a:ext cx="2724150" cy="0"/>
           </a:xfrm>
           <a:prstGeom prst="straightConnector1">
@@ -9618,7 +9618,7 @@
         </p:nvSpPr>
         <p:spPr>
           <a:xfrm>
-            <a:off x="5638800" y="4105275"/>
+            <a:off x="5638800" y="7724775"/>
             <a:ext cx="895350" cy="342900"/>
           </a:xfrm>
           <a:prstGeom prst="roundRect">
@@ -9659,7 +9659,7 @@
         </p:nvSpPr>
         <p:spPr>
           <a:xfrm>
-            <a:off x="5638800" y="4105275"/>
+            <a:off x="5638800" y="7724775"/>
             <a:ext cx="895350" cy="342900"/>
           </a:xfrm>
           <a:prstGeom prst="rect">
@@ -9817,7 +9817,7 @@
         </p:nvSpPr>
         <p:spPr>
           <a:xfrm>
-            <a:off x="6648450" y="4105275"/>
+            <a:off x="6648450" y="7724775"/>
             <a:ext cx="457200" cy="342900"/>
           </a:xfrm>
           <a:prstGeom prst="roundRect">
@@ -9858,7 +9858,7 @@
         </p:nvSpPr>
         <p:spPr>
           <a:xfrm>
-            <a:off x="6648450" y="4105275"/>
+            <a:off x="6648450" y="7724775"/>
             <a:ext cx="457200" cy="342900"/>
           </a:xfrm>
           <a:prstGeom prst="rect">
@@ -10016,7 +10016,7 @@
         </p:nvSpPr>
         <p:spPr>
           <a:xfrm>
-            <a:off x="7219950" y="4105275"/>
+            <a:off x="7219950" y="7724775"/>
             <a:ext cx="809625" cy="342900"/>
           </a:xfrm>
           <a:prstGeom prst="roundRect">
@@ -10057,7 +10057,7 @@
         </p:nvSpPr>
         <p:spPr>
           <a:xfrm>
-            <a:off x="7219950" y="4105275"/>
+            <a:off x="7219950" y="7724775"/>
             <a:ext cx="809625" cy="342900"/>
           </a:xfrm>
           <a:prstGeom prst="rect">
@@ -10215,7 +10215,7 @@
         </p:nvSpPr>
         <p:spPr>
           <a:xfrm>
-            <a:off x="5791200" y="4695825"/>
+            <a:off x="5791200" y="8315325"/>
             <a:ext cx="914400" cy="342900"/>
           </a:xfrm>
           <a:prstGeom prst="roundRect">
@@ -10256,7 +10256,7 @@
         </p:nvSpPr>
         <p:spPr>
           <a:xfrm>
-            <a:off x="5791200" y="4695825"/>
+            <a:off x="5791200" y="8315325"/>
             <a:ext cx="914400" cy="342900"/>
           </a:xfrm>
           <a:prstGeom prst="rect">
@@ -10414,7 +10414,7 @@
         </p:nvSpPr>
         <p:spPr>
           <a:xfrm>
-            <a:off x="6819900" y="4695825"/>
+            <a:off x="6819900" y="8315325"/>
             <a:ext cx="1028700" cy="342900"/>
           </a:xfrm>
           <a:prstGeom prst="roundRect">
@@ -10455,7 +10455,7 @@
         </p:nvSpPr>
         <p:spPr>
           <a:xfrm>
-            <a:off x="6819900" y="4695825"/>
+            <a:off x="6819900" y="8315325"/>
             <a:ext cx="1028700" cy="342900"/>
           </a:xfrm>
           <a:prstGeom prst="rect">
@@ -10611,7 +10611,7 @@
         </p:nvCxnSpPr>
         <p:spPr>
           <a:xfrm>
-            <a:off x="6248400" y="5086350"/>
+            <a:off x="6248400" y="8705850"/>
             <a:ext cx="0" cy="171450"/>
           </a:xfrm>
           <a:prstGeom prst="straightConnector1">
@@ -10642,7 +10642,7 @@
         </p:nvSpPr>
         <p:spPr>
           <a:xfrm>
-            <a:off x="5886450" y="5324475"/>
+            <a:off x="5886450" y="8943975"/>
             <a:ext cx="2476500" cy="495300"/>
           </a:xfrm>
           <a:prstGeom prst="roundRect">
@@ -10683,7 +10683,7 @@
         </p:nvSpPr>
         <p:spPr>
           <a:xfrm>
-            <a:off x="6153150" y="5410200"/>
+            <a:off x="6153150" y="9029700"/>
             <a:ext cx="571500" cy="323850"/>
           </a:xfrm>
           <a:prstGeom prst="rect">
@@ -10839,7 +10839,7 @@
         </p:nvCxnSpPr>
         <p:spPr>
           <a:xfrm>
-            <a:off x="6838950" y="5572125"/>
+            <a:off x="6838950" y="9191625"/>
             <a:ext cx="400050" cy="0"/>
           </a:xfrm>
           <a:prstGeom prst="straightConnector1">
@@ -10870,7 +10870,7 @@
         </p:nvSpPr>
         <p:spPr>
           <a:xfrm>
-            <a:off x="7372350" y="5410200"/>
+            <a:off x="7372350" y="9029700"/>
             <a:ext cx="571500" cy="323850"/>
           </a:xfrm>
           <a:prstGeom prst="rect">
@@ -11026,7 +11026,7 @@
         </p:nvCxnSpPr>
         <p:spPr>
           <a:xfrm>
-            <a:off x="7124700" y="5848350"/>
+            <a:off x="7124700" y="9467850"/>
             <a:ext cx="0" cy="152400"/>
           </a:xfrm>
           <a:prstGeom prst="straightConnector1">
@@ -11057,7 +11057,7 @@
         </p:nvSpPr>
         <p:spPr>
           <a:xfrm>
-            <a:off x="5448300" y="6057900"/>
+            <a:off x="5448300" y="9677400"/>
             <a:ext cx="3352800" cy="1066800"/>
           </a:xfrm>
           <a:prstGeom prst="roundRect">
@@ -11098,7 +11098,7 @@
         </p:nvSpPr>
         <p:spPr>
           <a:xfrm>
-            <a:off x="5467350" y="6076950"/>
+            <a:off x="5467350" y="9696450"/>
             <a:ext cx="3314700" cy="333375"/>
           </a:xfrm>
           <a:prstGeom prst="rect">
@@ -11135,7 +11135,7 @@
         </p:nvSpPr>
         <p:spPr>
           <a:xfrm>
-            <a:off x="5581650" y="6191250"/>
+            <a:off x="5581650" y="9810750"/>
             <a:ext cx="57150" cy="57150"/>
           </a:xfrm>
           <a:prstGeom prst="ellipse">
@@ -11172,7 +11172,7 @@
         </p:nvSpPr>
         <p:spPr>
           <a:xfrm>
-            <a:off x="5715000" y="6191250"/>
+            <a:off x="5715000" y="9810750"/>
             <a:ext cx="57150" cy="57150"/>
           </a:xfrm>
           <a:prstGeom prst="ellipse">
@@ -11209,7 +11209,7 @@
         </p:nvSpPr>
         <p:spPr>
           <a:xfrm>
-            <a:off x="5848350" y="6191250"/>
+            <a:off x="5848350" y="9810750"/>
             <a:ext cx="57150" cy="57150"/>
           </a:xfrm>
           <a:prstGeom prst="ellipse">
@@ -11246,7 +11246,7 @@
         </p:nvSpPr>
         <p:spPr>
           <a:xfrm>
-            <a:off x="5981700" y="6086475"/>
+            <a:off x="5981700" y="9705975"/>
             <a:ext cx="2324100" cy="304800"/>
           </a:xfrm>
           <a:prstGeom prst="rect">
@@ -11402,7 +11402,7 @@
         </p:nvCxnSpPr>
         <p:spPr>
           <a:xfrm>
-            <a:off x="6858000" y="6448425"/>
+            <a:off x="6858000" y="10067925"/>
             <a:ext cx="0" cy="561975"/>
           </a:xfrm>
           <a:prstGeom prst="straightConnector1">
@@ -11431,7 +11431,7 @@
         </p:nvCxnSpPr>
         <p:spPr>
           <a:xfrm>
-            <a:off x="5657850" y="6753225"/>
+            <a:off x="5657850" y="10372725"/>
             <a:ext cx="1066800" cy="0"/>
           </a:xfrm>
           <a:prstGeom prst="straightConnector1">
@@ -11462,7 +11462,7 @@
         </p:nvSpPr>
         <p:spPr>
           <a:xfrm>
-            <a:off x="5676900" y="6638925"/>
+            <a:off x="5676900" y="10258425"/>
             <a:ext cx="114300" cy="228600"/>
           </a:xfrm>
           <a:prstGeom prst="roundRect">
@@ -11501,7 +11501,7 @@
         </p:nvSpPr>
         <p:spPr>
           <a:xfrm>
-            <a:off x="5829300" y="6638925"/>
+            <a:off x="5829300" y="10258425"/>
             <a:ext cx="114300" cy="228600"/>
           </a:xfrm>
           <a:prstGeom prst="roundRect">
@@ -11540,7 +11540,7 @@
         </p:nvSpPr>
         <p:spPr>
           <a:xfrm>
-            <a:off x="5981700" y="6638925"/>
+            <a:off x="5981700" y="10258425"/>
             <a:ext cx="114300" cy="228600"/>
           </a:xfrm>
           <a:prstGeom prst="roundRect">
@@ -11579,7 +11579,7 @@
         </p:nvSpPr>
         <p:spPr>
           <a:xfrm>
-            <a:off x="6134100" y="6638925"/>
+            <a:off x="6134100" y="10258425"/>
             <a:ext cx="114300" cy="228600"/>
           </a:xfrm>
           <a:prstGeom prst="roundRect">
@@ -11618,7 +11618,7 @@
         </p:nvSpPr>
         <p:spPr>
           <a:xfrm>
-            <a:off x="6286500" y="6638925"/>
+            <a:off x="6286500" y="10258425"/>
             <a:ext cx="114300" cy="228600"/>
           </a:xfrm>
           <a:prstGeom prst="roundRect">
@@ -11657,7 +11657,7 @@
         </p:nvSpPr>
         <p:spPr>
           <a:xfrm>
-            <a:off x="6438900" y="6638925"/>
+            <a:off x="6438900" y="10258425"/>
             <a:ext cx="114300" cy="228600"/>
           </a:xfrm>
           <a:prstGeom prst="roundRect">
@@ -11696,7 +11696,7 @@
         </p:nvSpPr>
         <p:spPr>
           <a:xfrm>
-            <a:off x="6591300" y="6638925"/>
+            <a:off x="6591300" y="10258425"/>
             <a:ext cx="114300" cy="228600"/>
           </a:xfrm>
           <a:prstGeom prst="roundRect">
@@ -11735,7 +11735,7 @@
         </p:nvSpPr>
         <p:spPr>
           <a:xfrm>
-            <a:off x="6991350" y="6572250"/>
+            <a:off x="6991350" y="10191750"/>
             <a:ext cx="466725" cy="371475"/>
           </a:xfrm>
           <a:prstGeom prst="roundRect">
@@ -11776,7 +11776,7 @@
         </p:nvSpPr>
         <p:spPr>
           <a:xfrm>
-            <a:off x="6991350" y="6600825"/>
+            <a:off x="6991350" y="10220325"/>
             <a:ext cx="466725" cy="285750"/>
           </a:xfrm>
           <a:prstGeom prst="rect">
@@ -11932,7 +11932,7 @@
         </p:nvCxnSpPr>
         <p:spPr>
           <a:xfrm>
-            <a:off x="7543800" y="6762750"/>
+            <a:off x="7543800" y="10382250"/>
             <a:ext cx="200025" cy="0"/>
           </a:xfrm>
           <a:prstGeom prst="straightConnector1">
@@ -11963,7 +11963,7 @@
         </p:nvSpPr>
         <p:spPr>
           <a:xfrm>
-            <a:off x="7820025" y="6600825"/>
+            <a:off x="7820025" y="10220325"/>
             <a:ext cx="904875" cy="304800"/>
           </a:xfrm>
           <a:prstGeom prst="rect">
@@ -12105,35 +12105,6 @@
           </a:p>
         </p:txBody>
       </p:sp>
-      <p:cxnSp>
-        <p:nvCxnSpPr>
-          <p:cNvPr id="158" name="line-138">
-            <a:extLst>
-              <a:ext uri="{FF2B5EF4-FFF2-40B4-BE49-F238E27FC236}">
-                <a16:creationId xmlns:a16="http://schemas.microsoft.com/office/drawing/2014/main" id="{2CA1DFC7-D2C8-4B10-A16C-DCAE2579E29F}"/>
-              </a:ext>
-            </a:extLst>
-          </p:cNvPr>
-          <p:cNvCxnSpPr/>
-          <p:nvPr/>
-        </p:nvCxnSpPr>
-        <p:spPr>
-          <a:xfrm flipV="1">
-            <a:off x="2686050" y="7334250"/>
-            <a:ext cx="0" cy="266700"/>
-          </a:xfrm>
-          <a:prstGeom prst="straightConnector1">
-            <a:avLst/>
-          </a:prstGeom>
-          <a:ln w="24765">
-            <a:solidFill>
-              <a:srgbClr val="7845A9"/>
-            </a:solidFill>
-            <a:prstDash val="dash"/>
-            <a:tailEnd type="triangle" w="med" len="med"/>
-          </a:ln>
-        </p:spPr>
-      </p:cxnSp>
       <p:sp>
         <p:nvSpPr>
           <p:cNvPr id="159" name="object-139">
@@ -12150,7 +12121,7 @@
         </p:nvSpPr>
         <p:spPr>
           <a:xfrm>
-            <a:off x="495300" y="7791450"/>
+            <a:off x="495300" y="11410950"/>
             <a:ext cx="1409700" cy="438150"/>
           </a:xfrm>
           <a:prstGeom prst="roundRect">
@@ -12312,7 +12283,7 @@
         </p:nvSpPr>
         <p:spPr>
           <a:xfrm>
-            <a:off x="2038350" y="7791450"/>
+            <a:off x="2038350" y="11410950"/>
             <a:ext cx="1200150" cy="438150"/>
           </a:xfrm>
           <a:prstGeom prst="roundRect">
@@ -12472,7 +12443,7 @@
         </p:nvCxnSpPr>
         <p:spPr>
           <a:xfrm>
-            <a:off x="4648200" y="8439150"/>
+            <a:off x="4648200" y="12058650"/>
             <a:ext cx="0" cy="3960876"/>
           </a:xfrm>
           <a:prstGeom prst="straightConnector1">
@@ -12501,7 +12472,7 @@
         </p:nvCxnSpPr>
         <p:spPr>
           <a:xfrm>
-            <a:off x="827532" y="10288143"/>
+            <a:off x="827532" y="13907643"/>
             <a:ext cx="7641336" cy="0"/>
           </a:xfrm>
           <a:prstGeom prst="straightConnector1">
@@ -12532,7 +12503,7 @@
         </p:nvSpPr>
         <p:spPr>
           <a:xfrm>
-            <a:off x="862584" y="8439150"/>
+            <a:off x="862584" y="12058650"/>
             <a:ext cx="3329940" cy="332994"/>
           </a:xfrm>
           <a:prstGeom prst="rect">
@@ -12690,7 +12661,7 @@
         </p:nvSpPr>
         <p:spPr>
           <a:xfrm>
-            <a:off x="4893564" y="8439150"/>
+            <a:off x="4893564" y="12058650"/>
             <a:ext cx="3329940" cy="332994"/>
           </a:xfrm>
           <a:prstGeom prst="rect">
@@ -12848,7 +12819,7 @@
         </p:nvSpPr>
         <p:spPr>
           <a:xfrm>
-            <a:off x="862584" y="10507218"/>
+            <a:off x="862584" y="14126718"/>
             <a:ext cx="3329940" cy="332994"/>
           </a:xfrm>
           <a:prstGeom prst="rect">
@@ -13006,7 +12977,7 @@
         </p:nvSpPr>
         <p:spPr>
           <a:xfrm>
-            <a:off x="4893564" y="10507218"/>
+            <a:off x="4893564" y="14126718"/>
             <a:ext cx="3329940" cy="332994"/>
           </a:xfrm>
           <a:prstGeom prst="rect">
@@ -13162,7 +13133,7 @@
         </p:nvCxnSpPr>
         <p:spPr>
           <a:xfrm>
-            <a:off x="1029081" y="9503854"/>
+            <a:off x="1029081" y="13123354"/>
             <a:ext cx="3014472" cy="0"/>
           </a:xfrm>
           <a:prstGeom prst="straightConnector1">
@@ -13193,7 +13164,7 @@
         </p:nvSpPr>
         <p:spPr>
           <a:xfrm>
-            <a:off x="1151763" y="9346119"/>
+            <a:off x="1151763" y="12965619"/>
             <a:ext cx="1244346" cy="306705"/>
           </a:xfrm>
           <a:prstGeom prst="roundRect">
@@ -13234,7 +13205,7 @@
         </p:nvSpPr>
         <p:spPr>
           <a:xfrm>
-            <a:off x="1151763" y="9346119"/>
+            <a:off x="1151763" y="12965619"/>
             <a:ext cx="1244346" cy="306705"/>
           </a:xfrm>
           <a:prstGeom prst="rect">
@@ -13392,7 +13363,7 @@
         </p:nvSpPr>
         <p:spPr>
           <a:xfrm>
-            <a:off x="2816733" y="9363646"/>
+            <a:off x="2816733" y="12983146"/>
             <a:ext cx="963930" cy="280416"/>
           </a:xfrm>
           <a:prstGeom prst="roundRect">
@@ -13433,7 +13404,7 @@
         </p:nvSpPr>
         <p:spPr>
           <a:xfrm>
-            <a:off x="2816733" y="9363646"/>
+            <a:off x="2816733" y="12983146"/>
             <a:ext cx="963930" cy="280416"/>
           </a:xfrm>
           <a:prstGeom prst="rect">
@@ -13589,7 +13560,7 @@
         </p:nvCxnSpPr>
         <p:spPr>
           <a:xfrm flipV="1">
-            <a:off x="2334768" y="9188385"/>
+            <a:off x="2334768" y="12807885"/>
             <a:ext cx="0" cy="122682"/>
           </a:xfrm>
           <a:prstGeom prst="straightConnector1">
@@ -13618,7 +13589,7 @@
         </p:nvCxnSpPr>
         <p:spPr>
           <a:xfrm>
-            <a:off x="2334768" y="9188385"/>
+            <a:off x="2334768" y="12807885"/>
             <a:ext cx="429387" cy="0"/>
           </a:xfrm>
           <a:prstGeom prst="straightConnector1">
@@ -13649,7 +13620,7 @@
         </p:nvSpPr>
         <p:spPr>
           <a:xfrm>
-            <a:off x="6567297" y="8877300"/>
+            <a:off x="6567297" y="12496800"/>
             <a:ext cx="1253109" cy="236601"/>
           </a:xfrm>
           <a:prstGeom prst="rect">
@@ -13805,7 +13776,7 @@
         </p:nvCxnSpPr>
         <p:spPr>
           <a:xfrm>
-            <a:off x="6838950" y="9227820"/>
+            <a:off x="6838950" y="12847320"/>
             <a:ext cx="771144" cy="0"/>
           </a:xfrm>
           <a:prstGeom prst="straightConnector1">
@@ -13834,7 +13805,7 @@
         </p:nvCxnSpPr>
         <p:spPr>
           <a:xfrm>
-            <a:off x="6874002" y="9245346"/>
+            <a:off x="6874002" y="12864846"/>
             <a:ext cx="0" cy="122682"/>
           </a:xfrm>
           <a:prstGeom prst="straightConnector1">
@@ -13863,7 +13834,7 @@
         </p:nvCxnSpPr>
         <p:spPr>
           <a:xfrm>
-            <a:off x="6970395" y="9245346"/>
+            <a:off x="6970395" y="12864846"/>
             <a:ext cx="0" cy="122682"/>
           </a:xfrm>
           <a:prstGeom prst="straightConnector1">
@@ -13892,7 +13863,7 @@
         </p:nvCxnSpPr>
         <p:spPr>
           <a:xfrm>
-            <a:off x="7066788" y="9245346"/>
+            <a:off x="7066788" y="12864846"/>
             <a:ext cx="0" cy="122682"/>
           </a:xfrm>
           <a:prstGeom prst="straightConnector1">
@@ -13921,7 +13892,7 @@
         </p:nvCxnSpPr>
         <p:spPr>
           <a:xfrm>
-            <a:off x="7163181" y="9245346"/>
+            <a:off x="7163181" y="12864846"/>
             <a:ext cx="0" cy="122682"/>
           </a:xfrm>
           <a:prstGeom prst="straightConnector1">
@@ -13950,7 +13921,7 @@
         </p:nvCxnSpPr>
         <p:spPr>
           <a:xfrm>
-            <a:off x="7259574" y="9245346"/>
+            <a:off x="7259574" y="12864846"/>
             <a:ext cx="0" cy="122682"/>
           </a:xfrm>
           <a:prstGeom prst="straightConnector1">
@@ -13979,7 +13950,7 @@
         </p:nvCxnSpPr>
         <p:spPr>
           <a:xfrm>
-            <a:off x="7355967" y="9245346"/>
+            <a:off x="7355967" y="12864846"/>
             <a:ext cx="0" cy="122682"/>
           </a:xfrm>
           <a:prstGeom prst="straightConnector1">
@@ -14008,7 +13979,7 @@
         </p:nvCxnSpPr>
         <p:spPr>
           <a:xfrm>
-            <a:off x="7452360" y="9245346"/>
+            <a:off x="7452360" y="12864846"/>
             <a:ext cx="0" cy="122682"/>
           </a:xfrm>
           <a:prstGeom prst="straightConnector1">
@@ -14037,7 +14008,7 @@
         </p:nvCxnSpPr>
         <p:spPr>
           <a:xfrm>
-            <a:off x="7548753" y="9245346"/>
+            <a:off x="7548753" y="12864846"/>
             <a:ext cx="0" cy="122682"/>
           </a:xfrm>
           <a:prstGeom prst="straightConnector1">
@@ -14066,7 +14037,7 @@
         </p:nvCxnSpPr>
         <p:spPr>
           <a:xfrm>
-            <a:off x="5025009" y="9552051"/>
+            <a:off x="5025009" y="13171551"/>
             <a:ext cx="3084576" cy="0"/>
           </a:xfrm>
           <a:prstGeom prst="straightConnector1">
@@ -14097,7 +14068,7 @@
         </p:nvSpPr>
         <p:spPr>
           <a:xfrm>
-            <a:off x="5147691" y="9411843"/>
+            <a:off x="5147691" y="13031343"/>
             <a:ext cx="963930" cy="280416"/>
           </a:xfrm>
           <a:prstGeom prst="roundRect">
@@ -14138,7 +14109,7 @@
         </p:nvSpPr>
         <p:spPr>
           <a:xfrm>
-            <a:off x="5147691" y="9411843"/>
+            <a:off x="5147691" y="13031343"/>
             <a:ext cx="963930" cy="280416"/>
           </a:xfrm>
           <a:prstGeom prst="rect">
@@ -14296,7 +14267,7 @@
         </p:nvSpPr>
         <p:spPr>
           <a:xfrm>
-            <a:off x="6313170" y="9455658"/>
+            <a:off x="6313170" y="13075158"/>
             <a:ext cx="420624" cy="192786"/>
           </a:xfrm>
           <a:prstGeom prst="roundRect">
@@ -14335,7 +14306,7 @@
         </p:nvCxnSpPr>
         <p:spPr>
           <a:xfrm>
-            <a:off x="6383274" y="9385554"/>
+            <a:off x="6383274" y="13005054"/>
             <a:ext cx="0" cy="78867"/>
           </a:xfrm>
           <a:prstGeom prst="straightConnector1">
@@ -14364,7 +14335,7 @@
         </p:nvCxnSpPr>
         <p:spPr>
           <a:xfrm>
-            <a:off x="6470904" y="9385554"/>
+            <a:off x="6470904" y="13005054"/>
             <a:ext cx="0" cy="78867"/>
           </a:xfrm>
           <a:prstGeom prst="straightConnector1">
@@ -14393,7 +14364,7 @@
         </p:nvCxnSpPr>
         <p:spPr>
           <a:xfrm>
-            <a:off x="6558534" y="9385554"/>
+            <a:off x="6558534" y="13005054"/>
             <a:ext cx="0" cy="78867"/>
           </a:xfrm>
           <a:prstGeom prst="straightConnector1">
@@ -14422,7 +14393,7 @@
         </p:nvCxnSpPr>
         <p:spPr>
           <a:xfrm>
-            <a:off x="6646164" y="9385554"/>
+            <a:off x="6646164" y="13005054"/>
             <a:ext cx="0" cy="78867"/>
           </a:xfrm>
           <a:prstGeom prst="straightConnector1">
@@ -14453,7 +14424,7 @@
         </p:nvSpPr>
         <p:spPr>
           <a:xfrm>
-            <a:off x="6865239" y="9455658"/>
+            <a:off x="6865239" y="13075158"/>
             <a:ext cx="420624" cy="192786"/>
           </a:xfrm>
           <a:prstGeom prst="roundRect">
@@ -14492,7 +14463,7 @@
         </p:nvCxnSpPr>
         <p:spPr>
           <a:xfrm>
-            <a:off x="6935343" y="9385554"/>
+            <a:off x="6935343" y="13005054"/>
             <a:ext cx="0" cy="78867"/>
           </a:xfrm>
           <a:prstGeom prst="straightConnector1">
@@ -14521,7 +14492,7 @@
         </p:nvCxnSpPr>
         <p:spPr>
           <a:xfrm>
-            <a:off x="7022973" y="9385554"/>
+            <a:off x="7022973" y="13005054"/>
             <a:ext cx="0" cy="78867"/>
           </a:xfrm>
           <a:prstGeom prst="straightConnector1">
@@ -14550,7 +14521,7 @@
         </p:nvCxnSpPr>
         <p:spPr>
           <a:xfrm>
-            <a:off x="7110603" y="9385554"/>
+            <a:off x="7110603" y="13005054"/>
             <a:ext cx="0" cy="78867"/>
           </a:xfrm>
           <a:prstGeom prst="straightConnector1">
@@ -14579,7 +14550,7 @@
         </p:nvCxnSpPr>
         <p:spPr>
           <a:xfrm>
-            <a:off x="7198233" y="9385554"/>
+            <a:off x="7198233" y="13005054"/>
             <a:ext cx="0" cy="78867"/>
           </a:xfrm>
           <a:prstGeom prst="straightConnector1">
@@ -14610,7 +14581,7 @@
         </p:nvSpPr>
         <p:spPr>
           <a:xfrm>
-            <a:off x="7417308" y="9455658"/>
+            <a:off x="7417308" y="13075158"/>
             <a:ext cx="420624" cy="192786"/>
           </a:xfrm>
           <a:prstGeom prst="roundRect">
@@ -14649,7 +14620,7 @@
         </p:nvCxnSpPr>
         <p:spPr>
           <a:xfrm>
-            <a:off x="7487412" y="9385554"/>
+            <a:off x="7487412" y="13005054"/>
             <a:ext cx="0" cy="78867"/>
           </a:xfrm>
           <a:prstGeom prst="straightConnector1">
@@ -14678,7 +14649,7 @@
         </p:nvCxnSpPr>
         <p:spPr>
           <a:xfrm>
-            <a:off x="7575042" y="9385554"/>
+            <a:off x="7575042" y="13005054"/>
             <a:ext cx="0" cy="78867"/>
           </a:xfrm>
           <a:prstGeom prst="straightConnector1">
@@ -14707,7 +14678,7 @@
         </p:nvCxnSpPr>
         <p:spPr>
           <a:xfrm>
-            <a:off x="7662672" y="9385554"/>
+            <a:off x="7662672" y="13005054"/>
             <a:ext cx="0" cy="78867"/>
           </a:xfrm>
           <a:prstGeom prst="straightConnector1">
@@ -14736,7 +14707,7 @@
         </p:nvCxnSpPr>
         <p:spPr>
           <a:xfrm>
-            <a:off x="7750302" y="9385554"/>
+            <a:off x="7750302" y="13005054"/>
             <a:ext cx="0" cy="78867"/>
           </a:xfrm>
           <a:prstGeom prst="straightConnector1">
@@ -14767,7 +14738,7 @@
         </p:nvSpPr>
         <p:spPr>
           <a:xfrm>
-            <a:off x="6313170" y="9771126"/>
+            <a:off x="6313170" y="13390626"/>
             <a:ext cx="1524762" cy="236601"/>
           </a:xfrm>
           <a:prstGeom prst="rect">
@@ -14925,7 +14896,7 @@
         </p:nvSpPr>
         <p:spPr>
           <a:xfrm>
-            <a:off x="1020318" y="10936605"/>
+            <a:off x="1020318" y="14556105"/>
             <a:ext cx="1577340" cy="236601"/>
           </a:xfrm>
           <a:prstGeom prst="rect">
@@ -15083,7 +15054,7 @@
         </p:nvSpPr>
         <p:spPr>
           <a:xfrm>
-            <a:off x="1143000" y="11304651"/>
+            <a:off x="1143000" y="14924151"/>
             <a:ext cx="105156" cy="87630"/>
           </a:xfrm>
           <a:prstGeom prst="rect">
@@ -15120,7 +15091,7 @@
         </p:nvSpPr>
         <p:spPr>
           <a:xfrm>
-            <a:off x="1265682" y="11304651"/>
+            <a:off x="1265682" y="14924151"/>
             <a:ext cx="105156" cy="87630"/>
           </a:xfrm>
           <a:prstGeom prst="rect">
@@ -15157,7 +15128,7 @@
         </p:nvSpPr>
         <p:spPr>
           <a:xfrm>
-            <a:off x="1388364" y="11304651"/>
+            <a:off x="1388364" y="14924151"/>
             <a:ext cx="105156" cy="87630"/>
           </a:xfrm>
           <a:prstGeom prst="rect">
@@ -15194,7 +15165,7 @@
         </p:nvSpPr>
         <p:spPr>
           <a:xfrm>
-            <a:off x="1511046" y="11304651"/>
+            <a:off x="1511046" y="14924151"/>
             <a:ext cx="105156" cy="87630"/>
           </a:xfrm>
           <a:prstGeom prst="rect">
@@ -15231,7 +15202,7 @@
         </p:nvSpPr>
         <p:spPr>
           <a:xfrm>
-            <a:off x="1633728" y="11304651"/>
+            <a:off x="1633728" y="14924151"/>
             <a:ext cx="105156" cy="87630"/>
           </a:xfrm>
           <a:prstGeom prst="rect">
@@ -15268,7 +15239,7 @@
         </p:nvSpPr>
         <p:spPr>
           <a:xfrm>
-            <a:off x="1756410" y="11304651"/>
+            <a:off x="1756410" y="14924151"/>
             <a:ext cx="105156" cy="87630"/>
           </a:xfrm>
           <a:prstGeom prst="rect">
@@ -15305,7 +15276,7 @@
         </p:nvSpPr>
         <p:spPr>
           <a:xfrm>
-            <a:off x="1879092" y="11304651"/>
+            <a:off x="1879092" y="14924151"/>
             <a:ext cx="105156" cy="87630"/>
           </a:xfrm>
           <a:prstGeom prst="rect">
@@ -15342,7 +15313,7 @@
         </p:nvSpPr>
         <p:spPr>
           <a:xfrm>
-            <a:off x="2001774" y="11304651"/>
+            <a:off x="2001774" y="14924151"/>
             <a:ext cx="105156" cy="87630"/>
           </a:xfrm>
           <a:prstGeom prst="rect">
@@ -15379,7 +15350,7 @@
         </p:nvSpPr>
         <p:spPr>
           <a:xfrm>
-            <a:off x="2124456" y="11304651"/>
+            <a:off x="2124456" y="14924151"/>
             <a:ext cx="105156" cy="87630"/>
           </a:xfrm>
           <a:prstGeom prst="rect">
@@ -15416,7 +15387,7 @@
         </p:nvSpPr>
         <p:spPr>
           <a:xfrm>
-            <a:off x="2247138" y="11304651"/>
+            <a:off x="2247138" y="14924151"/>
             <a:ext cx="105156" cy="87630"/>
           </a:xfrm>
           <a:prstGeom prst="rect">
@@ -15451,7 +15422,7 @@
         </p:nvCxnSpPr>
         <p:spPr>
           <a:xfrm>
-            <a:off x="967740" y="11620119"/>
+            <a:off x="967740" y="15239619"/>
             <a:ext cx="3119628" cy="0"/>
           </a:xfrm>
           <a:prstGeom prst="straightConnector1">
@@ -15482,7 +15453,7 @@
         </p:nvSpPr>
         <p:spPr>
           <a:xfrm>
-            <a:off x="1072896" y="11514963"/>
+            <a:off x="1072896" y="15134463"/>
             <a:ext cx="1296924" cy="210312"/>
           </a:xfrm>
           <a:prstGeom prst="roundRect">
@@ -15521,7 +15492,7 @@
         </p:nvCxnSpPr>
         <p:spPr>
           <a:xfrm>
-            <a:off x="1195578" y="11401044"/>
+            <a:off x="1195578" y="15020544"/>
             <a:ext cx="0" cy="192786"/>
           </a:xfrm>
           <a:prstGeom prst="straightConnector1">
@@ -15550,7 +15521,7 @@
         </p:nvCxnSpPr>
         <p:spPr>
           <a:xfrm>
-            <a:off x="1318260" y="11401044"/>
+            <a:off x="1318260" y="15020544"/>
             <a:ext cx="0" cy="192786"/>
           </a:xfrm>
           <a:prstGeom prst="straightConnector1">
@@ -15579,7 +15550,7 @@
         </p:nvCxnSpPr>
         <p:spPr>
           <a:xfrm>
-            <a:off x="1440942" y="11401044"/>
+            <a:off x="1440942" y="15020544"/>
             <a:ext cx="0" cy="192786"/>
           </a:xfrm>
           <a:prstGeom prst="straightConnector1">
@@ -15608,7 +15579,7 @@
         </p:nvCxnSpPr>
         <p:spPr>
           <a:xfrm>
-            <a:off x="1563624" y="11401044"/>
+            <a:off x="1563624" y="15020544"/>
             <a:ext cx="0" cy="192786"/>
           </a:xfrm>
           <a:prstGeom prst="straightConnector1">
@@ -15637,7 +15608,7 @@
         </p:nvCxnSpPr>
         <p:spPr>
           <a:xfrm>
-            <a:off x="1686306" y="11401044"/>
+            <a:off x="1686306" y="15020544"/>
             <a:ext cx="0" cy="192786"/>
           </a:xfrm>
           <a:prstGeom prst="straightConnector1">
@@ -15666,7 +15637,7 @@
         </p:nvCxnSpPr>
         <p:spPr>
           <a:xfrm>
-            <a:off x="1808988" y="11401044"/>
+            <a:off x="1808988" y="15020544"/>
             <a:ext cx="0" cy="192786"/>
           </a:xfrm>
           <a:prstGeom prst="straightConnector1">
@@ -15695,7 +15666,7 @@
         </p:nvCxnSpPr>
         <p:spPr>
           <a:xfrm>
-            <a:off x="1931670" y="11401044"/>
+            <a:off x="1931670" y="15020544"/>
             <a:ext cx="0" cy="192786"/>
           </a:xfrm>
           <a:prstGeom prst="straightConnector1">
@@ -15724,7 +15695,7 @@
         </p:nvCxnSpPr>
         <p:spPr>
           <a:xfrm>
-            <a:off x="2054352" y="11401044"/>
+            <a:off x="2054352" y="15020544"/>
             <a:ext cx="0" cy="192786"/>
           </a:xfrm>
           <a:prstGeom prst="straightConnector1">
@@ -15753,7 +15724,7 @@
         </p:nvCxnSpPr>
         <p:spPr>
           <a:xfrm>
-            <a:off x="2177034" y="11401044"/>
+            <a:off x="2177034" y="15020544"/>
             <a:ext cx="0" cy="192786"/>
           </a:xfrm>
           <a:prstGeom prst="straightConnector1">
@@ -15782,7 +15753,7 @@
         </p:nvCxnSpPr>
         <p:spPr>
           <a:xfrm>
-            <a:off x="2299716" y="11401044"/>
+            <a:off x="2299716" y="15020544"/>
             <a:ext cx="0" cy="192786"/>
           </a:xfrm>
           <a:prstGeom prst="straightConnector1">
@@ -15813,7 +15784,7 @@
         </p:nvSpPr>
         <p:spPr>
           <a:xfrm>
-            <a:off x="1107948" y="11839194"/>
+            <a:off x="1107948" y="15458694"/>
             <a:ext cx="1261872" cy="236601"/>
           </a:xfrm>
           <a:prstGeom prst="rect">
@@ -15971,7 +15942,7 @@
         </p:nvSpPr>
         <p:spPr>
           <a:xfrm>
-            <a:off x="2772918" y="11839194"/>
+            <a:off x="2772918" y="15458694"/>
             <a:ext cx="1174242" cy="236601"/>
           </a:xfrm>
           <a:prstGeom prst="rect">
@@ -16129,7 +16100,7 @@
         </p:nvSpPr>
         <p:spPr>
           <a:xfrm>
-            <a:off x="2729103" y="11120628"/>
+            <a:off x="2729103" y="14740128"/>
             <a:ext cx="1270635" cy="350520"/>
           </a:xfrm>
           <a:prstGeom prst="ellipse">
@@ -16168,7 +16139,7 @@
         </p:nvSpPr>
         <p:spPr>
           <a:xfrm>
-            <a:off x="2729103" y="11146917"/>
+            <a:off x="2729103" y="14766417"/>
             <a:ext cx="1270635" cy="280416"/>
           </a:xfrm>
           <a:prstGeom prst="rect">
@@ -16324,7 +16295,7 @@
         </p:nvCxnSpPr>
         <p:spPr>
           <a:xfrm flipH="1">
-            <a:off x="2597658" y="11427333"/>
+            <a:off x="2597658" y="15046833"/>
             <a:ext cx="201549" cy="70104"/>
           </a:xfrm>
           <a:prstGeom prst="straightConnector1">
@@ -16353,7 +16324,7 @@
         </p:nvCxnSpPr>
         <p:spPr>
           <a:xfrm flipH="1">
-            <a:off x="1756410" y="11497437"/>
+            <a:off x="1756410" y="15116937"/>
             <a:ext cx="841248" cy="122682"/>
           </a:xfrm>
           <a:prstGeom prst="straightConnector1">
@@ -16382,7 +16353,7 @@
         </p:nvCxnSpPr>
         <p:spPr>
           <a:xfrm>
-            <a:off x="1703832" y="11576304"/>
+            <a:off x="1703832" y="15195804"/>
             <a:ext cx="70104" cy="122682"/>
           </a:xfrm>
           <a:prstGeom prst="straightConnector1">
@@ -16411,7 +16382,7 @@
         </p:nvCxnSpPr>
         <p:spPr>
           <a:xfrm>
-            <a:off x="1677543" y="11576304"/>
+            <a:off x="1677543" y="15195804"/>
             <a:ext cx="52578" cy="35052"/>
           </a:xfrm>
           <a:prstGeom prst="straightConnector1">
@@ -16440,7 +16411,7 @@
         </p:nvCxnSpPr>
         <p:spPr>
           <a:xfrm>
-            <a:off x="1765173" y="11655171"/>
+            <a:off x="1765173" y="15274671"/>
             <a:ext cx="52578" cy="43815"/>
           </a:xfrm>
           <a:prstGeom prst="straightConnector1">
@@ -16469,7 +16440,7 @@
         </p:nvCxnSpPr>
         <p:spPr>
           <a:xfrm>
-            <a:off x="5068824" y="11278362"/>
+            <a:off x="5068824" y="14897862"/>
             <a:ext cx="2988183" cy="0"/>
           </a:xfrm>
           <a:prstGeom prst="straightConnector1">
@@ -16500,7 +16471,7 @@
         </p:nvSpPr>
         <p:spPr>
           <a:xfrm>
-            <a:off x="5261610" y="11173206"/>
+            <a:off x="5261610" y="14792706"/>
             <a:ext cx="201549" cy="210312"/>
           </a:xfrm>
           <a:custGeom>
@@ -16558,7 +16529,7 @@
         </p:nvSpPr>
         <p:spPr>
           <a:xfrm>
-            <a:off x="7610094" y="11173206"/>
+            <a:off x="7610094" y="14792706"/>
             <a:ext cx="201549" cy="210312"/>
           </a:xfrm>
           <a:custGeom>
@@ -16616,7 +16587,7 @@
         </p:nvSpPr>
         <p:spPr>
           <a:xfrm>
-            <a:off x="5988939" y="11138154"/>
+            <a:off x="5988939" y="14757654"/>
             <a:ext cx="963930" cy="280416"/>
           </a:xfrm>
           <a:prstGeom prst="roundRect">
@@ -16657,7 +16628,7 @@
         </p:nvSpPr>
         <p:spPr>
           <a:xfrm>
-            <a:off x="5988939" y="11138154"/>
+            <a:off x="5988939" y="14757654"/>
             <a:ext cx="963930" cy="280416"/>
           </a:xfrm>
           <a:prstGeom prst="rect">
@@ -16815,7 +16786,7 @@
         </p:nvSpPr>
         <p:spPr>
           <a:xfrm>
-            <a:off x="5051298" y="10884027"/>
+            <a:off x="5051298" y="14503527"/>
             <a:ext cx="665988" cy="227838"/>
           </a:xfrm>
           <a:prstGeom prst="rect">
@@ -16973,7 +16944,7 @@
         </p:nvSpPr>
         <p:spPr>
           <a:xfrm>
-            <a:off x="7391019" y="10884027"/>
+            <a:off x="7391019" y="14503527"/>
             <a:ext cx="665988" cy="227838"/>
           </a:xfrm>
           <a:prstGeom prst="rect">
@@ -17129,7 +17100,7 @@
         </p:nvCxnSpPr>
         <p:spPr>
           <a:xfrm>
-            <a:off x="6541008" y="11497437"/>
+            <a:off x="6541008" y="15116937"/>
             <a:ext cx="0" cy="271653"/>
           </a:xfrm>
           <a:prstGeom prst="straightConnector1">
@@ -17160,7 +17131,7 @@
         </p:nvSpPr>
         <p:spPr>
           <a:xfrm>
-            <a:off x="6760083" y="11506200"/>
+            <a:off x="6760083" y="15125700"/>
             <a:ext cx="639699" cy="227838"/>
           </a:xfrm>
           <a:prstGeom prst="rect">
@@ -17316,7 +17287,7 @@
         </p:nvCxnSpPr>
         <p:spPr>
           <a:xfrm>
-            <a:off x="5068824" y="12119610"/>
+            <a:off x="5068824" y="15739110"/>
             <a:ext cx="1165479" cy="0"/>
           </a:xfrm>
           <a:prstGeom prst="straightConnector1">
@@ -17347,7 +17318,7 @@
         </p:nvSpPr>
         <p:spPr>
           <a:xfrm>
-            <a:off x="5506974" y="12014454"/>
+            <a:off x="5506974" y="15633954"/>
             <a:ext cx="201549" cy="210312"/>
           </a:xfrm>
           <a:custGeom>
@@ -17405,7 +17376,7 @@
         </p:nvSpPr>
         <p:spPr>
           <a:xfrm>
-            <a:off x="6339459" y="11988165"/>
+            <a:off x="6339459" y="15607665"/>
             <a:ext cx="280416" cy="262890"/>
           </a:xfrm>
           <a:prstGeom prst="rect">
@@ -17563,7 +17534,7 @@
         </p:nvSpPr>
         <p:spPr>
           <a:xfrm>
-            <a:off x="6812661" y="11830431"/>
+            <a:off x="6812661" y="15449931"/>
             <a:ext cx="1104138" cy="665988"/>
           </a:xfrm>
           <a:prstGeom prst="ellipse">
@@ -17600,7 +17571,7 @@
         </p:nvSpPr>
         <p:spPr>
           <a:xfrm>
-            <a:off x="7259574" y="11769090"/>
+            <a:off x="7259574" y="15388590"/>
             <a:ext cx="175260" cy="131445"/>
           </a:xfrm>
           <a:custGeom>
@@ -17658,7 +17629,7 @@
         </p:nvSpPr>
         <p:spPr>
           <a:xfrm>
-            <a:off x="6882765" y="12023217"/>
+            <a:off x="6882765" y="15642717"/>
             <a:ext cx="963930" cy="280416"/>
           </a:xfrm>
           <a:prstGeom prst="roundRect">
@@ -17699,7 +17670,7 @@
         </p:nvSpPr>
         <p:spPr>
           <a:xfrm>
-            <a:off x="6882765" y="12023217"/>
+            <a:off x="6882765" y="15642717"/>
             <a:ext cx="963930" cy="280416"/>
           </a:xfrm>
           <a:prstGeom prst="rect">
@@ -17857,7 +17828,7 @@
         </p:nvSpPr>
         <p:spPr>
           <a:xfrm>
-            <a:off x="6991350" y="2952750"/>
+            <a:off x="6991350" y="6572250"/>
             <a:ext cx="1200150" cy="438150"/>
           </a:xfrm>
           <a:prstGeom prst="roundRect">
@@ -18027,7 +17998,7 @@
         </p:nvSpPr>
         <p:spPr>
           <a:xfrm>
-            <a:off x="4781550" y="495300"/>
+            <a:off x="4781550" y="4114800"/>
             <a:ext cx="1200150" cy="438150"/>
           </a:xfrm>
           <a:prstGeom prst="roundRect">
@@ -18197,7 +18168,7 @@
         </p:nvSpPr>
         <p:spPr>
           <a:xfrm>
-            <a:off x="2038350" y="2952750"/>
+            <a:off x="2038350" y="6572250"/>
             <a:ext cx="2571750" cy="438150"/>
           </a:xfrm>
           <a:prstGeom prst="roundRect">
@@ -18361,7 +18332,7 @@
         </p:nvSpPr>
         <p:spPr>
           <a:xfrm>
-            <a:off x="2878074" y="11479911"/>
+            <a:off x="2878074" y="15099411"/>
             <a:ext cx="963930" cy="280416"/>
           </a:xfrm>
           <a:prstGeom prst="roundRect">
@@ -18396,7 +18367,7 @@
         </p:nvSpPr>
         <p:spPr>
           <a:xfrm>
-            <a:off x="2878074" y="11479911"/>
+            <a:off x="2878074" y="15099411"/>
             <a:ext cx="963930" cy="280416"/>
           </a:xfrm>
           <a:prstGeom prst="rect">
@@ -18548,7 +18519,7 @@
         </p:nvSpPr>
         <p:spPr>
           <a:xfrm>
-            <a:off x="5042535" y="9771126"/>
+            <a:off x="5042535" y="13390626"/>
             <a:ext cx="1174242" cy="236601"/>
           </a:xfrm>
           <a:prstGeom prst="rect">
@@ -18690,125 +18661,4422 @@
           </a:p>
         </p:txBody>
       </p:sp>
-      <p:cxnSp>
-        <p:nvCxnSpPr>
-          <p:cNvPr id="407" name="Portrait connector 407"/>
-          <p:cNvCxnSpPr>
-            <a:cxnSpLocks/>
-          </p:cNvCxnSpPr>
-          <p:nvPr/>
-        </p:nvCxnSpPr>
-        <p:spPr>
-          <a:xfrm>
-            <a:off x="1581150" y="2495550"/>
-            <a:ext cx="0" cy="266700"/>
-          </a:xfrm>
-          <a:prstGeom prst="straightConnector1">
-            <a:avLst/>
-          </a:prstGeom>
+      <p:sp>
+        <p:nvSpPr>
+          <p:cNvPr id="601" name="roundRect 601"/>
+          <p:cNvSpPr/>
+          <p:nvPr/>
+        </p:nvSpPr>
+        <p:spPr>
+          <a:xfrm>
+            <a:off x="304800" y="304800"/>
+            <a:ext cx="8686800" cy="3048000"/>
+          </a:xfrm>
+          <a:prstGeom prst="roundRect">
+            <a:avLst>
+              <a:gd name="adj" fmla="val 8750"/>
+            </a:avLst>
+          </a:prstGeom>
+          <a:solidFill>
+            <a:srgbClr val="F0F4F8"/>
+          </a:solidFill>
+          <a:ln w="23812">
+            <a:solidFill>
+              <a:srgbClr val="3D5D7C"/>
+            </a:solidFill>
+          </a:ln>
+        </p:spPr>
+      </p:sp>
+      <p:sp>
+        <p:nvSpPr>
+          <p:cNvPr id="602" name="FUNDAMENTAL RESEARCH 602"/>
+          <p:cNvSpPr/>
+          <p:nvPr/>
+        </p:nvSpPr>
+        <p:spPr>
+          <a:xfrm>
+            <a:off x="495300" y="495300"/>
+            <a:ext cx="4286250" cy="381000"/>
+          </a:xfrm>
+          <a:prstGeom prst="roundRect">
+            <a:avLst>
+              <a:gd name="adj" fmla="val 30000"/>
+            </a:avLst>
+          </a:prstGeom>
+          <a:solidFill>
+            <a:srgbClr val="3D5D7C"/>
+          </a:solidFill>
+          <a:ln w="17145">
+            <a:noFill/>
+          </a:ln>
+        </p:spPr>
+        <p:txBody>
+          <a:bodyPr wrap="none" lIns="0" rIns="0" tIns="0" bIns="0" anchor="ctr">
+            <a:noAutofit/>
+          </a:bodyPr>
+          <a:lstStyle/>
+          <a:p>
+            <a:pPr algn="ctr"/>
+            <a:r>
+              <a:rPr sz="1950" b="1">
+                <a:solidFill>
+                  <a:srgbClr val="FFFFFF"/>
+                </a:solidFill>
+                <a:latin typeface="Futura"/>
+                <a:ea typeface="Futura"/>
+                <a:cs typeface="Futura"/>
+              </a:rPr>
+              <a:t>FUNDAMENTAL RESEARCH</a:t>
+            </a:r>
+          </a:p>
+        </p:txBody>
+      </p:sp>
+      <p:sp>
+        <p:nvSpPr>
+          <p:cNvPr id="603" name="Cycle 1 603"/>
+          <p:cNvSpPr/>
+          <p:nvPr/>
+        </p:nvSpPr>
+        <p:spPr>
+          <a:xfrm>
+            <a:off x="495300" y="1085850"/>
+            <a:ext cx="1352550" cy="381000"/>
+          </a:xfrm>
+          <a:prstGeom prst="roundRect">
+            <a:avLst>
+              <a:gd name="adj" fmla="val 30000"/>
+            </a:avLst>
+          </a:prstGeom>
+          <a:solidFill>
+            <a:srgbClr val="DCE6EF"/>
+          </a:solidFill>
+          <a:ln w="17145">
+            <a:noFill/>
+          </a:ln>
+        </p:spPr>
+        <p:txBody>
+          <a:bodyPr wrap="none" lIns="0" rIns="0" tIns="0" bIns="0" anchor="ctr">
+            <a:noAutofit/>
+          </a:bodyPr>
+          <a:lstStyle/>
+          <a:p>
+            <a:pPr algn="ctr"/>
+            <a:r>
+              <a:rPr sz="1650" b="1">
+                <a:solidFill>
+                  <a:srgbClr val="3D5D7C"/>
+                </a:solidFill>
+                <a:latin typeface="Georgia"/>
+                <a:ea typeface="Georgia"/>
+                <a:cs typeface="Georgia"/>
+              </a:rPr>
+              <a:t>Cycle 1</a:t>
+            </a:r>
+          </a:p>
+        </p:txBody>
+      </p:sp>
+      <p:sp>
+        <p:nvSpPr>
+          <p:cNvPr id="604" name="Build 10R 604"/>
+          <p:cNvSpPr/>
+          <p:nvPr/>
+        </p:nvSpPr>
+        <p:spPr>
+          <a:xfrm>
+            <a:off x="1924050" y="1114425"/>
+            <a:ext cx="2047875" cy="323850"/>
+          </a:xfrm>
+          <a:prstGeom prst="rect">
+            <a:avLst/>
+          </a:prstGeom>
+          <a:noFill/>
+          <a:ln w="17145">
+            <a:noFill/>
+          </a:ln>
+        </p:spPr>
+        <p:txBody>
+          <a:bodyPr wrap="none" lIns="0" rIns="0" tIns="0" bIns="0" anchor="ctr">
+            <a:noAutofit/>
+          </a:bodyPr>
+          <a:lstStyle/>
+          <a:p>
+            <a:pPr algn="ctr"/>
+            <a:r>
+              <a:rPr sz="1725" b="1">
+                <a:solidFill>
+                  <a:srgbClr val="3D5D7C"/>
+                </a:solidFill>
+                <a:latin typeface="Georgia"/>
+                <a:ea typeface="Georgia"/>
+                <a:cs typeface="Georgia"/>
+              </a:rPr>
+              <a:t>Build 10R</a:t>
+            </a:r>
+          </a:p>
+        </p:txBody>
+      </p:sp>
+      <p:sp>
+        <p:nvSpPr>
+          <p:cNvPr id="605" name="Cycle 2 605"/>
+          <p:cNvSpPr/>
+          <p:nvPr/>
+        </p:nvSpPr>
+        <p:spPr>
+          <a:xfrm>
+            <a:off x="5143500" y="1085850"/>
+            <a:ext cx="1352550" cy="381000"/>
+          </a:xfrm>
+          <a:prstGeom prst="roundRect">
+            <a:avLst>
+              <a:gd name="adj" fmla="val 30000"/>
+            </a:avLst>
+          </a:prstGeom>
+          <a:solidFill>
+            <a:srgbClr val="DCE6EF"/>
+          </a:solidFill>
+          <a:ln w="17145">
+            <a:noFill/>
+          </a:ln>
+        </p:spPr>
+        <p:txBody>
+          <a:bodyPr wrap="none" lIns="0" rIns="0" tIns="0" bIns="0" anchor="ctr">
+            <a:noAutofit/>
+          </a:bodyPr>
+          <a:lstStyle/>
+          <a:p>
+            <a:pPr algn="ctr"/>
+            <a:r>
+              <a:rPr sz="1650" b="1">
+                <a:solidFill>
+                  <a:srgbClr val="3D5D7C"/>
+                </a:solidFill>
+                <a:latin typeface="Georgia"/>
+                <a:ea typeface="Georgia"/>
+                <a:cs typeface="Georgia"/>
+              </a:rPr>
+              <a:t>Cycle 2</a:t>
+            </a:r>
+          </a:p>
+        </p:txBody>
+      </p:sp>
+      <p:sp>
+        <p:nvSpPr>
+          <p:cNvPr id="606" name="PUF10R 606"/>
+          <p:cNvSpPr/>
+          <p:nvPr/>
+        </p:nvSpPr>
+        <p:spPr>
+          <a:xfrm>
+            <a:off x="828675" y="1638300"/>
+            <a:ext cx="1714500" cy="266700"/>
+          </a:xfrm>
+          <a:prstGeom prst="rect">
+            <a:avLst/>
+          </a:prstGeom>
+          <a:noFill/>
+          <a:ln w="17145">
+            <a:noFill/>
+          </a:ln>
+        </p:spPr>
+        <p:txBody>
+          <a:bodyPr wrap="none" lIns="0" rIns="0" tIns="0" bIns="0" anchor="ctr">
+            <a:noAutofit/>
+          </a:bodyPr>
+          <a:lstStyle/>
+          <a:p>
+            <a:pPr algn="ctr"/>
+            <a:r>
+              <a:rPr sz="1500" b="1">
+                <a:solidFill>
+                  <a:srgbClr val="0984AC"/>
+                </a:solidFill>
+                <a:latin typeface="Futura"/>
+                <a:ea typeface="Futura"/>
+                <a:cs typeface="Futura"/>
+              </a:rPr>
+              <a:t>PUF10R</a:t>
+            </a:r>
+          </a:p>
+        </p:txBody>
+      </p:sp>
+      <p:sp>
+        <p:nvSpPr>
+          <p:cNvPr id="607" name="roundRect 607"/>
+          <p:cNvSpPr/>
+          <p:nvPr/>
+        </p:nvSpPr>
+        <p:spPr>
+          <a:xfrm>
+            <a:off x="838200" y="2000250"/>
+            <a:ext cx="133350" cy="333375"/>
+          </a:xfrm>
+          <a:prstGeom prst="roundRect">
+            <a:avLst>
+              <a:gd name="adj" fmla="val 35714"/>
+            </a:avLst>
+          </a:prstGeom>
+          <a:solidFill>
+            <a:srgbClr val="45A5C8"/>
+          </a:solidFill>
+          <a:ln w="12382">
+            <a:solidFill>
+              <a:srgbClr val="0984AC"/>
+            </a:solidFill>
+          </a:ln>
+        </p:spPr>
+      </p:sp>
+      <p:sp>
+        <p:nvSpPr>
+          <p:cNvPr id="608" name="roundRect 608"/>
+          <p:cNvSpPr/>
+          <p:nvPr/>
+        </p:nvSpPr>
+        <p:spPr>
+          <a:xfrm>
+            <a:off x="1009650" y="2000250"/>
+            <a:ext cx="133350" cy="333375"/>
+          </a:xfrm>
+          <a:prstGeom prst="roundRect">
+            <a:avLst>
+              <a:gd name="adj" fmla="val 35714"/>
+            </a:avLst>
+          </a:prstGeom>
+          <a:solidFill>
+            <a:srgbClr val="73BADA"/>
+          </a:solidFill>
+          <a:ln w="12382">
+            <a:solidFill>
+              <a:srgbClr val="0984AC"/>
+            </a:solidFill>
+          </a:ln>
+        </p:spPr>
+      </p:sp>
+      <p:sp>
+        <p:nvSpPr>
+          <p:cNvPr id="609" name="roundRect 609"/>
+          <p:cNvSpPr/>
+          <p:nvPr/>
+        </p:nvSpPr>
+        <p:spPr>
+          <a:xfrm>
+            <a:off x="1181100" y="2000250"/>
+            <a:ext cx="133350" cy="333375"/>
+          </a:xfrm>
+          <a:prstGeom prst="roundRect">
+            <a:avLst>
+              <a:gd name="adj" fmla="val 35714"/>
+            </a:avLst>
+          </a:prstGeom>
+          <a:solidFill>
+            <a:srgbClr val="45A5C8"/>
+          </a:solidFill>
+          <a:ln w="12382">
+            <a:solidFill>
+              <a:srgbClr val="0984AC"/>
+            </a:solidFill>
+          </a:ln>
+        </p:spPr>
+      </p:sp>
+      <p:sp>
+        <p:nvSpPr>
+          <p:cNvPr id="610" name="roundRect 610"/>
+          <p:cNvSpPr/>
+          <p:nvPr/>
+        </p:nvSpPr>
+        <p:spPr>
+          <a:xfrm>
+            <a:off x="1352550" y="2000250"/>
+            <a:ext cx="133350" cy="333375"/>
+          </a:xfrm>
+          <a:prstGeom prst="roundRect">
+            <a:avLst>
+              <a:gd name="adj" fmla="val 35714"/>
+            </a:avLst>
+          </a:prstGeom>
+          <a:solidFill>
+            <a:srgbClr val="73BADA"/>
+          </a:solidFill>
+          <a:ln w="12382">
+            <a:solidFill>
+              <a:srgbClr val="0984AC"/>
+            </a:solidFill>
+          </a:ln>
+        </p:spPr>
+      </p:sp>
+      <p:sp>
+        <p:nvSpPr>
+          <p:cNvPr id="611" name="roundRect 611"/>
+          <p:cNvSpPr/>
+          <p:nvPr/>
+        </p:nvSpPr>
+        <p:spPr>
+          <a:xfrm>
+            <a:off x="1524000" y="2000250"/>
+            <a:ext cx="133350" cy="333375"/>
+          </a:xfrm>
+          <a:prstGeom prst="roundRect">
+            <a:avLst>
+              <a:gd name="adj" fmla="val 35714"/>
+            </a:avLst>
+          </a:prstGeom>
+          <a:solidFill>
+            <a:srgbClr val="45A5C8"/>
+          </a:solidFill>
+          <a:ln w="12382">
+            <a:solidFill>
+              <a:srgbClr val="0984AC"/>
+            </a:solidFill>
+          </a:ln>
+        </p:spPr>
+      </p:sp>
+      <p:sp>
+        <p:nvSpPr>
+          <p:cNvPr id="612" name="roundRect 612"/>
+          <p:cNvSpPr/>
+          <p:nvPr/>
+        </p:nvSpPr>
+        <p:spPr>
+          <a:xfrm>
+            <a:off x="1695450" y="2000250"/>
+            <a:ext cx="133350" cy="333375"/>
+          </a:xfrm>
+          <a:prstGeom prst="roundRect">
+            <a:avLst>
+              <a:gd name="adj" fmla="val 35714"/>
+            </a:avLst>
+          </a:prstGeom>
+          <a:solidFill>
+            <a:srgbClr val="73BADA"/>
+          </a:solidFill>
+          <a:ln w="12382">
+            <a:solidFill>
+              <a:srgbClr val="0984AC"/>
+            </a:solidFill>
+          </a:ln>
+        </p:spPr>
+      </p:sp>
+      <p:sp>
+        <p:nvSpPr>
+          <p:cNvPr id="613" name="roundRect 613"/>
+          <p:cNvSpPr/>
+          <p:nvPr/>
+        </p:nvSpPr>
+        <p:spPr>
+          <a:xfrm>
+            <a:off x="1866900" y="2000250"/>
+            <a:ext cx="133350" cy="333375"/>
+          </a:xfrm>
+          <a:prstGeom prst="roundRect">
+            <a:avLst>
+              <a:gd name="adj" fmla="val 35714"/>
+            </a:avLst>
+          </a:prstGeom>
+          <a:solidFill>
+            <a:srgbClr val="45A5C8"/>
+          </a:solidFill>
+          <a:ln w="12382">
+            <a:solidFill>
+              <a:srgbClr val="0984AC"/>
+            </a:solidFill>
+          </a:ln>
+        </p:spPr>
+      </p:sp>
+      <p:sp>
+        <p:nvSpPr>
+          <p:cNvPr id="614" name="roundRect 614"/>
+          <p:cNvSpPr/>
+          <p:nvPr/>
+        </p:nvSpPr>
+        <p:spPr>
+          <a:xfrm>
+            <a:off x="2038350" y="2000250"/>
+            <a:ext cx="133350" cy="333375"/>
+          </a:xfrm>
+          <a:prstGeom prst="roundRect">
+            <a:avLst>
+              <a:gd name="adj" fmla="val 35714"/>
+            </a:avLst>
+          </a:prstGeom>
+          <a:solidFill>
+            <a:srgbClr val="73BADA"/>
+          </a:solidFill>
+          <a:ln w="12382">
+            <a:solidFill>
+              <a:srgbClr val="0984AC"/>
+            </a:solidFill>
+          </a:ln>
+        </p:spPr>
+      </p:sp>
+      <p:sp>
+        <p:nvSpPr>
+          <p:cNvPr id="615" name="roundRect 615"/>
+          <p:cNvSpPr/>
+          <p:nvPr/>
+        </p:nvSpPr>
+        <p:spPr>
+          <a:xfrm>
+            <a:off x="2209800" y="2000250"/>
+            <a:ext cx="133350" cy="333375"/>
+          </a:xfrm>
+          <a:prstGeom prst="roundRect">
+            <a:avLst>
+              <a:gd name="adj" fmla="val 35714"/>
+            </a:avLst>
+          </a:prstGeom>
+          <a:solidFill>
+            <a:srgbClr val="45A5C8"/>
+          </a:solidFill>
+          <a:ln w="12382">
+            <a:solidFill>
+              <a:srgbClr val="0984AC"/>
+            </a:solidFill>
+          </a:ln>
+        </p:spPr>
+      </p:sp>
+      <p:sp>
+        <p:nvSpPr>
+          <p:cNvPr id="616" name="roundRect 616"/>
+          <p:cNvSpPr/>
+          <p:nvPr/>
+        </p:nvSpPr>
+        <p:spPr>
+          <a:xfrm>
+            <a:off x="2381250" y="2000250"/>
+            <a:ext cx="133350" cy="333375"/>
+          </a:xfrm>
+          <a:prstGeom prst="roundRect">
+            <a:avLst>
+              <a:gd name="adj" fmla="val 35714"/>
+            </a:avLst>
+          </a:prstGeom>
+          <a:solidFill>
+            <a:srgbClr val="73BADA"/>
+          </a:solidFill>
+          <a:ln w="12382">
+            <a:solidFill>
+              <a:srgbClr val="0984AC"/>
+            </a:solidFill>
+          </a:ln>
+        </p:spPr>
+      </p:sp>
+      <p:sp>
+        <p:nvSpPr>
+          <p:cNvPr id="617" name="line 617"/>
+          <p:cNvSpPr/>
+          <p:nvPr/>
+        </p:nvSpPr>
+        <p:spPr>
+          <a:xfrm>
+            <a:off x="2533650" y="2162175"/>
+            <a:ext cx="219075" cy="0"/>
+          </a:xfrm>
+          <a:prstGeom prst="line">
+            <a:avLst/>
+          </a:prstGeom>
+          <a:noFill/>
+          <a:ln w="19050">
+            <a:solidFill>
+              <a:srgbClr val="3D5D7C"/>
+            </a:solidFill>
+          </a:ln>
+        </p:spPr>
+      </p:sp>
+      <p:sp>
+        <p:nvSpPr>
+          <p:cNvPr id="618" name="APOBEC 618"/>
+          <p:cNvSpPr/>
+          <p:nvPr/>
+        </p:nvSpPr>
+        <p:spPr>
+          <a:xfrm>
+            <a:off x="2752725" y="1933575"/>
+            <a:ext cx="895350" cy="457200"/>
+          </a:xfrm>
+          <a:prstGeom prst="ellipse">
+            <a:avLst/>
+          </a:prstGeom>
+          <a:solidFill>
+            <a:srgbClr val="F4BB78"/>
+          </a:solidFill>
+          <a:ln w="17145">
+            <a:solidFill>
+              <a:srgbClr val="DF8A2F"/>
+            </a:solidFill>
+          </a:ln>
+        </p:spPr>
+        <p:txBody>
+          <a:bodyPr wrap="none" lIns="0" rIns="0" tIns="0" bIns="0" anchor="ctr">
+            <a:noAutofit/>
+          </a:bodyPr>
+          <a:lstStyle/>
+          <a:p>
+            <a:pPr algn="ctr"/>
+            <a:r>
+              <a:rPr sz="1350" b="1">
+                <a:solidFill>
+                  <a:srgbClr val="8D4D1B"/>
+                </a:solidFill>
+                <a:latin typeface="Futura"/>
+                <a:ea typeface="Futura"/>
+                <a:cs typeface="Futura"/>
+              </a:rPr>
+              <a:t>APOBEC</a:t>
+            </a:r>
+          </a:p>
+        </p:txBody>
+      </p:sp>
+      <p:sp>
+        <p:nvSpPr>
+          <p:cNvPr id="619" name="line 619"/>
+          <p:cNvSpPr/>
+          <p:nvPr/>
+        </p:nvSpPr>
+        <p:spPr>
+          <a:xfrm>
+            <a:off x="723900" y="2543175"/>
+            <a:ext cx="3048000" cy="0"/>
+          </a:xfrm>
+          <a:prstGeom prst="line">
+            <a:avLst/>
+          </a:prstGeom>
+          <a:noFill/>
+          <a:ln w="19050">
+            <a:solidFill>
+              <a:srgbClr val="3D5D7C"/>
+            </a:solidFill>
+          </a:ln>
+        </p:spPr>
+      </p:sp>
+      <p:sp>
+        <p:nvSpPr>
+          <p:cNvPr id="620" name="line 620"/>
+          <p:cNvSpPr/>
+          <p:nvPr/>
+        </p:nvSpPr>
+        <p:spPr>
+          <a:xfrm>
+            <a:off x="904875" y="2362200"/>
+            <a:ext cx="0" cy="171450"/>
+          </a:xfrm>
+          <a:prstGeom prst="line">
+            <a:avLst/>
+          </a:prstGeom>
+          <a:noFill/>
+          <a:ln w="12382">
+            <a:solidFill>
+              <a:srgbClr val="6BA8BF"/>
+            </a:solidFill>
+          </a:ln>
+        </p:spPr>
+      </p:sp>
+      <p:sp>
+        <p:nvSpPr>
+          <p:cNvPr id="621" name="line 621"/>
+          <p:cNvSpPr/>
+          <p:nvPr/>
+        </p:nvSpPr>
+        <p:spPr>
+          <a:xfrm>
+            <a:off x="1076325" y="2362200"/>
+            <a:ext cx="0" cy="171450"/>
+          </a:xfrm>
+          <a:prstGeom prst="line">
+            <a:avLst/>
+          </a:prstGeom>
+          <a:noFill/>
+          <a:ln w="12382">
+            <a:solidFill>
+              <a:srgbClr val="6BA8BF"/>
+            </a:solidFill>
+          </a:ln>
+        </p:spPr>
+      </p:sp>
+      <p:sp>
+        <p:nvSpPr>
+          <p:cNvPr id="622" name="line 622"/>
+          <p:cNvSpPr/>
+          <p:nvPr/>
+        </p:nvSpPr>
+        <p:spPr>
+          <a:xfrm>
+            <a:off x="1247775" y="2362200"/>
+            <a:ext cx="0" cy="171450"/>
+          </a:xfrm>
+          <a:prstGeom prst="line">
+            <a:avLst/>
+          </a:prstGeom>
+          <a:noFill/>
+          <a:ln w="12382">
+            <a:solidFill>
+              <a:srgbClr val="6BA8BF"/>
+            </a:solidFill>
+          </a:ln>
+        </p:spPr>
+      </p:sp>
+      <p:sp>
+        <p:nvSpPr>
+          <p:cNvPr id="623" name="line 623"/>
+          <p:cNvSpPr/>
+          <p:nvPr/>
+        </p:nvSpPr>
+        <p:spPr>
+          <a:xfrm>
+            <a:off x="1419225" y="2362200"/>
+            <a:ext cx="0" cy="171450"/>
+          </a:xfrm>
+          <a:prstGeom prst="line">
+            <a:avLst/>
+          </a:prstGeom>
+          <a:noFill/>
+          <a:ln w="12382">
+            <a:solidFill>
+              <a:srgbClr val="6BA8BF"/>
+            </a:solidFill>
+          </a:ln>
+        </p:spPr>
+      </p:sp>
+      <p:sp>
+        <p:nvSpPr>
+          <p:cNvPr id="624" name="line 624"/>
+          <p:cNvSpPr/>
+          <p:nvPr/>
+        </p:nvSpPr>
+        <p:spPr>
+          <a:xfrm>
+            <a:off x="1590675" y="2362200"/>
+            <a:ext cx="0" cy="171450"/>
+          </a:xfrm>
+          <a:prstGeom prst="line">
+            <a:avLst/>
+          </a:prstGeom>
+          <a:noFill/>
+          <a:ln w="12382">
+            <a:solidFill>
+              <a:srgbClr val="6BA8BF"/>
+            </a:solidFill>
+          </a:ln>
+        </p:spPr>
+      </p:sp>
+      <p:sp>
+        <p:nvSpPr>
+          <p:cNvPr id="625" name="line 625"/>
+          <p:cNvSpPr/>
+          <p:nvPr/>
+        </p:nvSpPr>
+        <p:spPr>
+          <a:xfrm>
+            <a:off x="1762125" y="2362200"/>
+            <a:ext cx="0" cy="171450"/>
+          </a:xfrm>
+          <a:prstGeom prst="line">
+            <a:avLst/>
+          </a:prstGeom>
+          <a:noFill/>
+          <a:ln w="12382">
+            <a:solidFill>
+              <a:srgbClr val="6BA8BF"/>
+            </a:solidFill>
+          </a:ln>
+        </p:spPr>
+      </p:sp>
+      <p:sp>
+        <p:nvSpPr>
+          <p:cNvPr id="626" name="line 626"/>
+          <p:cNvSpPr/>
+          <p:nvPr/>
+        </p:nvSpPr>
+        <p:spPr>
+          <a:xfrm>
+            <a:off x="1933575" y="2362200"/>
+            <a:ext cx="0" cy="171450"/>
+          </a:xfrm>
+          <a:prstGeom prst="line">
+            <a:avLst/>
+          </a:prstGeom>
+          <a:noFill/>
+          <a:ln w="12382">
+            <a:solidFill>
+              <a:srgbClr val="6BA8BF"/>
+            </a:solidFill>
+          </a:ln>
+        </p:spPr>
+      </p:sp>
+      <p:sp>
+        <p:nvSpPr>
+          <p:cNvPr id="627" name="line 627"/>
+          <p:cNvSpPr/>
+          <p:nvPr/>
+        </p:nvSpPr>
+        <p:spPr>
+          <a:xfrm>
+            <a:off x="2105025" y="2362200"/>
+            <a:ext cx="0" cy="171450"/>
+          </a:xfrm>
+          <a:prstGeom prst="line">
+            <a:avLst/>
+          </a:prstGeom>
+          <a:noFill/>
+          <a:ln w="12382">
+            <a:solidFill>
+              <a:srgbClr val="6BA8BF"/>
+            </a:solidFill>
+          </a:ln>
+        </p:spPr>
+      </p:sp>
+      <p:sp>
+        <p:nvSpPr>
+          <p:cNvPr id="628" name="line 628"/>
+          <p:cNvSpPr/>
+          <p:nvPr/>
+        </p:nvSpPr>
+        <p:spPr>
+          <a:xfrm>
+            <a:off x="2276475" y="2362200"/>
+            <a:ext cx="0" cy="171450"/>
+          </a:xfrm>
+          <a:prstGeom prst="line">
+            <a:avLst/>
+          </a:prstGeom>
+          <a:noFill/>
+          <a:ln w="12382">
+            <a:solidFill>
+              <a:srgbClr val="6BA8BF"/>
+            </a:solidFill>
+          </a:ln>
+        </p:spPr>
+      </p:sp>
+      <p:sp>
+        <p:nvSpPr>
+          <p:cNvPr id="629" name="line 629"/>
+          <p:cNvSpPr/>
+          <p:nvPr/>
+        </p:nvSpPr>
+        <p:spPr>
+          <a:xfrm>
+            <a:off x="2447925" y="2362200"/>
+            <a:ext cx="0" cy="171450"/>
+          </a:xfrm>
+          <a:prstGeom prst="line">
+            <a:avLst/>
+          </a:prstGeom>
+          <a:noFill/>
+          <a:ln w="12382">
+            <a:solidFill>
+              <a:srgbClr val="6BA8BF"/>
+            </a:solidFill>
+          </a:ln>
+        </p:spPr>
+      </p:sp>
+      <p:sp>
+        <p:nvSpPr>
+          <p:cNvPr id="630" name="APOE4 RNA 630"/>
+          <p:cNvSpPr/>
+          <p:nvPr/>
+        </p:nvSpPr>
+        <p:spPr>
+          <a:xfrm>
+            <a:off x="1295400" y="2724150"/>
+            <a:ext cx="1905000" cy="266700"/>
+          </a:xfrm>
+          <a:prstGeom prst="rect">
+            <a:avLst/>
+          </a:prstGeom>
+          <a:noFill/>
+          <a:ln w="17145">
+            <a:noFill/>
+          </a:ln>
+        </p:spPr>
+        <p:txBody>
+          <a:bodyPr wrap="none" lIns="0" rIns="0" tIns="0" bIns="0" anchor="ctr">
+            <a:noAutofit/>
+          </a:bodyPr>
+          <a:lstStyle/>
+          <a:p>
+            <a:pPr algn="ctr"/>
+            <a:r>
+              <a:rPr sz="1425" b="0">
+                <a:solidFill>
+                  <a:srgbClr val="3D5D7C"/>
+                </a:solidFill>
+                <a:latin typeface="Futura"/>
+                <a:ea typeface="Futura"/>
+                <a:cs typeface="Futura"/>
+              </a:rPr>
+              <a:t>APOE4 RNA</a:t>
+            </a:r>
+          </a:p>
+        </p:txBody>
+      </p:sp>
+      <p:sp>
+        <p:nvSpPr>
+          <p:cNvPr id="631" name="line 631"/>
+          <p:cNvSpPr/>
+          <p:nvPr/>
+        </p:nvSpPr>
+        <p:spPr>
+          <a:xfrm>
+            <a:off x="4238625" y="2266950"/>
+            <a:ext cx="571500" cy="0"/>
+          </a:xfrm>
+          <a:prstGeom prst="line">
+            <a:avLst/>
+          </a:prstGeom>
+          <a:noFill/>
           <a:ln w="26670">
             <a:solidFill>
-              <a:srgbClr val="285FA8"/>
-            </a:solidFill>
-            <a:prstDash val="solid"/>
+              <a:srgbClr val="3D5D7C"/>
+            </a:solidFill>
             <a:tailEnd type="triangle" w="med" len="med"/>
           </a:ln>
         </p:spPr>
-      </p:cxnSp>
-      <p:cxnSp>
-        <p:nvCxnSpPr>
-          <p:cNvPr id="408" name="Portrait connector 408"/>
-          <p:cNvCxnSpPr/>
-          <p:nvPr/>
-        </p:nvCxnSpPr>
-        <p:spPr>
-          <a:xfrm>
-            <a:off x="6019800" y="2495550"/>
+      </p:sp>
+      <p:sp>
+        <p:nvSpPr>
+          <p:cNvPr id="632" name="PUF 632"/>
+          <p:cNvSpPr/>
+          <p:nvPr/>
+        </p:nvSpPr>
+        <p:spPr>
+          <a:xfrm>
+            <a:off x="6572250" y="1485900"/>
+            <a:ext cx="1047750" cy="228600"/>
+          </a:xfrm>
+          <a:prstGeom prst="rect">
+            <a:avLst/>
+          </a:prstGeom>
+          <a:noFill/>
+          <a:ln w="17145">
+            <a:noFill/>
+          </a:ln>
+        </p:spPr>
+        <p:txBody>
+          <a:bodyPr wrap="none" lIns="0" rIns="0" tIns="0" bIns="0" anchor="ctr">
+            <a:noAutofit/>
+          </a:bodyPr>
+          <a:lstStyle/>
+          <a:p>
+            <a:pPr algn="ctr"/>
+            <a:r>
+              <a:rPr sz="1200" b="1">
+                <a:solidFill>
+                  <a:srgbClr val="0984AC"/>
+                </a:solidFill>
+                <a:latin typeface="Futura"/>
+                <a:ea typeface="Futura"/>
+                <a:cs typeface="Futura"/>
+              </a:rPr>
+              <a:t>PUF</a:t>
+            </a:r>
+          </a:p>
+        </p:txBody>
+      </p:sp>
+      <p:sp>
+        <p:nvSpPr>
+          <p:cNvPr id="633" name="APOBEC 633"/>
+          <p:cNvSpPr/>
+          <p:nvPr/>
+        </p:nvSpPr>
+        <p:spPr>
+          <a:xfrm>
+            <a:off x="7896225" y="1485900"/>
+            <a:ext cx="914400" cy="228600"/>
+          </a:xfrm>
+          <a:prstGeom prst="rect">
+            <a:avLst/>
+          </a:prstGeom>
+          <a:noFill/>
+          <a:ln w="17145">
+            <a:noFill/>
+          </a:ln>
+        </p:spPr>
+        <p:txBody>
+          <a:bodyPr wrap="none" lIns="0" rIns="0" tIns="0" bIns="0" anchor="ctr">
+            <a:noAutofit/>
+          </a:bodyPr>
+          <a:lstStyle/>
+          <a:p>
+            <a:pPr algn="ctr"/>
+            <a:r>
+              <a:rPr sz="1200" b="1">
+                <a:solidFill>
+                  <a:srgbClr val="8D4D1B"/>
+                </a:solidFill>
+                <a:latin typeface="Futura"/>
+                <a:ea typeface="Futura"/>
+                <a:cs typeface="Futura"/>
+              </a:rPr>
+              <a:t>APOBEC</a:t>
+            </a:r>
+          </a:p>
+        </p:txBody>
+      </p:sp>
+      <p:sp>
+        <p:nvSpPr>
+          <p:cNvPr id="634" name="10R 634"/>
+          <p:cNvSpPr/>
+          <p:nvPr/>
+        </p:nvSpPr>
+        <p:spPr>
+          <a:xfrm>
+            <a:off x="5305425" y="1781175"/>
+            <a:ext cx="628650" cy="276225"/>
+          </a:xfrm>
+          <a:prstGeom prst="rect">
+            <a:avLst/>
+          </a:prstGeom>
+          <a:noFill/>
+          <a:ln w="17145">
+            <a:noFill/>
+          </a:ln>
+        </p:spPr>
+        <p:txBody>
+          <a:bodyPr wrap="none" lIns="0" rIns="0" tIns="0" bIns="0" anchor="ctr">
+            <a:noAutofit/>
+          </a:bodyPr>
+          <a:lstStyle/>
+          <a:p>
+            <a:pPr algn="ctr"/>
+            <a:r>
+              <a:rPr sz="1500" b="1">
+                <a:solidFill>
+                  <a:srgbClr val="3D5D7C"/>
+                </a:solidFill>
+                <a:latin typeface="Futura"/>
+                <a:ea typeface="Futura"/>
+                <a:cs typeface="Futura"/>
+              </a:rPr>
+              <a:t>10R</a:t>
+            </a:r>
+          </a:p>
+        </p:txBody>
+      </p:sp>
+      <p:sp>
+        <p:nvSpPr>
+          <p:cNvPr id="635" name="roundRect 635"/>
+          <p:cNvSpPr/>
+          <p:nvPr/>
+        </p:nvSpPr>
+        <p:spPr>
+          <a:xfrm>
+            <a:off x="6715125" y="1809750"/>
+            <a:ext cx="85725" cy="228600"/>
+          </a:xfrm>
+          <a:prstGeom prst="roundRect">
+            <a:avLst>
+              <a:gd name="adj" fmla="val 33333"/>
+            </a:avLst>
+          </a:prstGeom>
+          <a:solidFill>
+            <a:srgbClr val="45A5C8"/>
+          </a:solidFill>
+          <a:ln w="9525">
+            <a:solidFill>
+              <a:srgbClr val="0984AC"/>
+            </a:solidFill>
+          </a:ln>
+        </p:spPr>
+      </p:sp>
+      <p:sp>
+        <p:nvSpPr>
+          <p:cNvPr id="636" name="roundRect 636"/>
+          <p:cNvSpPr/>
+          <p:nvPr/>
+        </p:nvSpPr>
+        <p:spPr>
+          <a:xfrm>
+            <a:off x="6819900" y="1809750"/>
+            <a:ext cx="85725" cy="228600"/>
+          </a:xfrm>
+          <a:prstGeom prst="roundRect">
+            <a:avLst>
+              <a:gd name="adj" fmla="val 33333"/>
+            </a:avLst>
+          </a:prstGeom>
+          <a:solidFill>
+            <a:srgbClr val="73BADA"/>
+          </a:solidFill>
+          <a:ln w="9525">
+            <a:solidFill>
+              <a:srgbClr val="0984AC"/>
+            </a:solidFill>
+          </a:ln>
+        </p:spPr>
+      </p:sp>
+      <p:sp>
+        <p:nvSpPr>
+          <p:cNvPr id="637" name="roundRect 637"/>
+          <p:cNvSpPr/>
+          <p:nvPr/>
+        </p:nvSpPr>
+        <p:spPr>
+          <a:xfrm>
+            <a:off x="6924675" y="1809750"/>
+            <a:ext cx="85725" cy="228600"/>
+          </a:xfrm>
+          <a:prstGeom prst="roundRect">
+            <a:avLst>
+              <a:gd name="adj" fmla="val 33333"/>
+            </a:avLst>
+          </a:prstGeom>
+          <a:solidFill>
+            <a:srgbClr val="45A5C8"/>
+          </a:solidFill>
+          <a:ln w="9525">
+            <a:solidFill>
+              <a:srgbClr val="0984AC"/>
+            </a:solidFill>
+          </a:ln>
+        </p:spPr>
+      </p:sp>
+      <p:sp>
+        <p:nvSpPr>
+          <p:cNvPr id="638" name="roundRect 638"/>
+          <p:cNvSpPr/>
+          <p:nvPr/>
+        </p:nvSpPr>
+        <p:spPr>
+          <a:xfrm>
+            <a:off x="7029450" y="1809750"/>
+            <a:ext cx="85725" cy="228600"/>
+          </a:xfrm>
+          <a:prstGeom prst="roundRect">
+            <a:avLst>
+              <a:gd name="adj" fmla="val 33333"/>
+            </a:avLst>
+          </a:prstGeom>
+          <a:solidFill>
+            <a:srgbClr val="73BADA"/>
+          </a:solidFill>
+          <a:ln w="9525">
+            <a:solidFill>
+              <a:srgbClr val="0984AC"/>
+            </a:solidFill>
+          </a:ln>
+        </p:spPr>
+      </p:sp>
+      <p:sp>
+        <p:nvSpPr>
+          <p:cNvPr id="639" name="roundRect 639"/>
+          <p:cNvSpPr/>
+          <p:nvPr/>
+        </p:nvSpPr>
+        <p:spPr>
+          <a:xfrm>
+            <a:off x="7134225" y="1809750"/>
+            <a:ext cx="85725" cy="228600"/>
+          </a:xfrm>
+          <a:prstGeom prst="roundRect">
+            <a:avLst>
+              <a:gd name="adj" fmla="val 33333"/>
+            </a:avLst>
+          </a:prstGeom>
+          <a:solidFill>
+            <a:srgbClr val="45A5C8"/>
+          </a:solidFill>
+          <a:ln w="9525">
+            <a:solidFill>
+              <a:srgbClr val="0984AC"/>
+            </a:solidFill>
+          </a:ln>
+        </p:spPr>
+      </p:sp>
+      <p:sp>
+        <p:nvSpPr>
+          <p:cNvPr id="640" name="roundRect 640"/>
+          <p:cNvSpPr/>
+          <p:nvPr/>
+        </p:nvSpPr>
+        <p:spPr>
+          <a:xfrm>
+            <a:off x="7239000" y="1809750"/>
+            <a:ext cx="85725" cy="228600"/>
+          </a:xfrm>
+          <a:prstGeom prst="roundRect">
+            <a:avLst>
+              <a:gd name="adj" fmla="val 33333"/>
+            </a:avLst>
+          </a:prstGeom>
+          <a:solidFill>
+            <a:srgbClr val="73BADA"/>
+          </a:solidFill>
+          <a:ln w="9525">
+            <a:solidFill>
+              <a:srgbClr val="0984AC"/>
+            </a:solidFill>
+          </a:ln>
+        </p:spPr>
+      </p:sp>
+      <p:sp>
+        <p:nvSpPr>
+          <p:cNvPr id="641" name="roundRect 641"/>
+          <p:cNvSpPr/>
+          <p:nvPr/>
+        </p:nvSpPr>
+        <p:spPr>
+          <a:xfrm>
+            <a:off x="7343775" y="1809750"/>
+            <a:ext cx="85725" cy="228600"/>
+          </a:xfrm>
+          <a:prstGeom prst="roundRect">
+            <a:avLst>
+              <a:gd name="adj" fmla="val 33333"/>
+            </a:avLst>
+          </a:prstGeom>
+          <a:solidFill>
+            <a:srgbClr val="45A5C8"/>
+          </a:solidFill>
+          <a:ln w="9525">
+            <a:solidFill>
+              <a:srgbClr val="0984AC"/>
+            </a:solidFill>
+          </a:ln>
+        </p:spPr>
+      </p:sp>
+      <p:sp>
+        <p:nvSpPr>
+          <p:cNvPr id="642" name="roundRect 642"/>
+          <p:cNvSpPr/>
+          <p:nvPr/>
+        </p:nvSpPr>
+        <p:spPr>
+          <a:xfrm>
+            <a:off x="7448550" y="1809750"/>
+            <a:ext cx="85725" cy="228600"/>
+          </a:xfrm>
+          <a:prstGeom prst="roundRect">
+            <a:avLst>
+              <a:gd name="adj" fmla="val 33333"/>
+            </a:avLst>
+          </a:prstGeom>
+          <a:solidFill>
+            <a:srgbClr val="73BADA"/>
+          </a:solidFill>
+          <a:ln w="9525">
+            <a:solidFill>
+              <a:srgbClr val="0984AC"/>
+            </a:solidFill>
+          </a:ln>
+        </p:spPr>
+      </p:sp>
+      <p:sp>
+        <p:nvSpPr>
+          <p:cNvPr id="643" name="roundRect 643"/>
+          <p:cNvSpPr/>
+          <p:nvPr/>
+        </p:nvSpPr>
+        <p:spPr>
+          <a:xfrm>
+            <a:off x="7553325" y="1809750"/>
+            <a:ext cx="85725" cy="228600"/>
+          </a:xfrm>
+          <a:prstGeom prst="roundRect">
+            <a:avLst>
+              <a:gd name="adj" fmla="val 33333"/>
+            </a:avLst>
+          </a:prstGeom>
+          <a:solidFill>
+            <a:srgbClr val="45A5C8"/>
+          </a:solidFill>
+          <a:ln w="9525">
+            <a:solidFill>
+              <a:srgbClr val="0984AC"/>
+            </a:solidFill>
+          </a:ln>
+        </p:spPr>
+      </p:sp>
+      <p:sp>
+        <p:nvSpPr>
+          <p:cNvPr id="644" name="roundRect 644"/>
+          <p:cNvSpPr/>
+          <p:nvPr/>
+        </p:nvSpPr>
+        <p:spPr>
+          <a:xfrm>
+            <a:off x="7658100" y="1809750"/>
+            <a:ext cx="85725" cy="228600"/>
+          </a:xfrm>
+          <a:prstGeom prst="roundRect">
+            <a:avLst>
+              <a:gd name="adj" fmla="val 33333"/>
+            </a:avLst>
+          </a:prstGeom>
+          <a:solidFill>
+            <a:srgbClr val="73BADA"/>
+          </a:solidFill>
+          <a:ln w="9525">
+            <a:solidFill>
+              <a:srgbClr val="0984AC"/>
+            </a:solidFill>
+          </a:ln>
+        </p:spPr>
+      </p:sp>
+      <p:sp>
+        <p:nvSpPr>
+          <p:cNvPr id="645" name="line 645"/>
+          <p:cNvSpPr/>
+          <p:nvPr/>
+        </p:nvSpPr>
+        <p:spPr>
+          <a:xfrm>
+            <a:off x="7743825" y="1924050"/>
+            <a:ext cx="228600" cy="0"/>
+          </a:xfrm>
+          <a:prstGeom prst="line">
+            <a:avLst/>
+          </a:prstGeom>
+          <a:noFill/>
+          <a:ln w="17145">
+            <a:solidFill>
+              <a:srgbClr val="3D5D7C"/>
+            </a:solidFill>
+          </a:ln>
+        </p:spPr>
+      </p:sp>
+      <p:sp>
+        <p:nvSpPr>
+          <p:cNvPr id="646" name="ellipse 646"/>
+          <p:cNvSpPr/>
+          <p:nvPr/>
+        </p:nvSpPr>
+        <p:spPr>
+          <a:xfrm>
+            <a:off x="7981950" y="1800225"/>
+            <a:ext cx="666750" cy="247650"/>
+          </a:xfrm>
+          <a:prstGeom prst="ellipse">
+            <a:avLst/>
+          </a:prstGeom>
+          <a:solidFill>
+            <a:srgbClr val="F4BB78"/>
+          </a:solidFill>
+          <a:ln w="13335">
+            <a:solidFill>
+              <a:srgbClr val="DF8A2F"/>
+            </a:solidFill>
+          </a:ln>
+        </p:spPr>
+      </p:sp>
+      <p:sp>
+        <p:nvSpPr>
+          <p:cNvPr id="647" name="12R 647"/>
+          <p:cNvSpPr/>
+          <p:nvPr/>
+        </p:nvSpPr>
+        <p:spPr>
+          <a:xfrm>
+            <a:off x="5305425" y="2124075"/>
+            <a:ext cx="628650" cy="276225"/>
+          </a:xfrm>
+          <a:prstGeom prst="rect">
+            <a:avLst/>
+          </a:prstGeom>
+          <a:noFill/>
+          <a:ln w="17145">
+            <a:noFill/>
+          </a:ln>
+        </p:spPr>
+        <p:txBody>
+          <a:bodyPr wrap="none" lIns="0" rIns="0" tIns="0" bIns="0" anchor="ctr">
+            <a:noAutofit/>
+          </a:bodyPr>
+          <a:lstStyle/>
+          <a:p>
+            <a:pPr algn="ctr"/>
+            <a:r>
+              <a:rPr sz="1500" b="1">
+                <a:solidFill>
+                  <a:srgbClr val="3D5D7C"/>
+                </a:solidFill>
+                <a:latin typeface="Futura"/>
+                <a:ea typeface="Futura"/>
+                <a:cs typeface="Futura"/>
+              </a:rPr>
+              <a:t>12R</a:t>
+            </a:r>
+          </a:p>
+        </p:txBody>
+      </p:sp>
+      <p:sp>
+        <p:nvSpPr>
+          <p:cNvPr id="648" name="roundRect 648"/>
+          <p:cNvSpPr/>
+          <p:nvPr/>
+        </p:nvSpPr>
+        <p:spPr>
+          <a:xfrm>
+            <a:off x="6505575" y="2152650"/>
+            <a:ext cx="85725" cy="228600"/>
+          </a:xfrm>
+          <a:prstGeom prst="roundRect">
+            <a:avLst>
+              <a:gd name="adj" fmla="val 33333"/>
+            </a:avLst>
+          </a:prstGeom>
+          <a:solidFill>
+            <a:srgbClr val="45A5C8"/>
+          </a:solidFill>
+          <a:ln w="9525">
+            <a:solidFill>
+              <a:srgbClr val="0984AC"/>
+            </a:solidFill>
+          </a:ln>
+        </p:spPr>
+      </p:sp>
+      <p:sp>
+        <p:nvSpPr>
+          <p:cNvPr id="649" name="roundRect 649"/>
+          <p:cNvSpPr/>
+          <p:nvPr/>
+        </p:nvSpPr>
+        <p:spPr>
+          <a:xfrm>
+            <a:off x="6610350" y="2152650"/>
+            <a:ext cx="85725" cy="228600"/>
+          </a:xfrm>
+          <a:prstGeom prst="roundRect">
+            <a:avLst>
+              <a:gd name="adj" fmla="val 33333"/>
+            </a:avLst>
+          </a:prstGeom>
+          <a:solidFill>
+            <a:srgbClr val="73BADA"/>
+          </a:solidFill>
+          <a:ln w="9525">
+            <a:solidFill>
+              <a:srgbClr val="0984AC"/>
+            </a:solidFill>
+          </a:ln>
+        </p:spPr>
+      </p:sp>
+      <p:sp>
+        <p:nvSpPr>
+          <p:cNvPr id="650" name="roundRect 650"/>
+          <p:cNvSpPr/>
+          <p:nvPr/>
+        </p:nvSpPr>
+        <p:spPr>
+          <a:xfrm>
+            <a:off x="6715125" y="2152650"/>
+            <a:ext cx="85725" cy="228600"/>
+          </a:xfrm>
+          <a:prstGeom prst="roundRect">
+            <a:avLst>
+              <a:gd name="adj" fmla="val 33333"/>
+            </a:avLst>
+          </a:prstGeom>
+          <a:solidFill>
+            <a:srgbClr val="45A5C8"/>
+          </a:solidFill>
+          <a:ln w="9525">
+            <a:solidFill>
+              <a:srgbClr val="0984AC"/>
+            </a:solidFill>
+          </a:ln>
+        </p:spPr>
+      </p:sp>
+      <p:sp>
+        <p:nvSpPr>
+          <p:cNvPr id="651" name="roundRect 651"/>
+          <p:cNvSpPr/>
+          <p:nvPr/>
+        </p:nvSpPr>
+        <p:spPr>
+          <a:xfrm>
+            <a:off x="6819900" y="2152650"/>
+            <a:ext cx="85725" cy="228600"/>
+          </a:xfrm>
+          <a:prstGeom prst="roundRect">
+            <a:avLst>
+              <a:gd name="adj" fmla="val 33333"/>
+            </a:avLst>
+          </a:prstGeom>
+          <a:solidFill>
+            <a:srgbClr val="73BADA"/>
+          </a:solidFill>
+          <a:ln w="9525">
+            <a:solidFill>
+              <a:srgbClr val="0984AC"/>
+            </a:solidFill>
+          </a:ln>
+        </p:spPr>
+      </p:sp>
+      <p:sp>
+        <p:nvSpPr>
+          <p:cNvPr id="652" name="roundRect 652"/>
+          <p:cNvSpPr/>
+          <p:nvPr/>
+        </p:nvSpPr>
+        <p:spPr>
+          <a:xfrm>
+            <a:off x="6924675" y="2152650"/>
+            <a:ext cx="85725" cy="228600"/>
+          </a:xfrm>
+          <a:prstGeom prst="roundRect">
+            <a:avLst>
+              <a:gd name="adj" fmla="val 33333"/>
+            </a:avLst>
+          </a:prstGeom>
+          <a:solidFill>
+            <a:srgbClr val="45A5C8"/>
+          </a:solidFill>
+          <a:ln w="9525">
+            <a:solidFill>
+              <a:srgbClr val="0984AC"/>
+            </a:solidFill>
+          </a:ln>
+        </p:spPr>
+      </p:sp>
+      <p:sp>
+        <p:nvSpPr>
+          <p:cNvPr id="653" name="roundRect 653"/>
+          <p:cNvSpPr/>
+          <p:nvPr/>
+        </p:nvSpPr>
+        <p:spPr>
+          <a:xfrm>
+            <a:off x="7029450" y="2152650"/>
+            <a:ext cx="85725" cy="228600"/>
+          </a:xfrm>
+          <a:prstGeom prst="roundRect">
+            <a:avLst>
+              <a:gd name="adj" fmla="val 33333"/>
+            </a:avLst>
+          </a:prstGeom>
+          <a:solidFill>
+            <a:srgbClr val="73BADA"/>
+          </a:solidFill>
+          <a:ln w="9525">
+            <a:solidFill>
+              <a:srgbClr val="0984AC"/>
+            </a:solidFill>
+          </a:ln>
+        </p:spPr>
+      </p:sp>
+      <p:sp>
+        <p:nvSpPr>
+          <p:cNvPr id="654" name="roundRect 654"/>
+          <p:cNvSpPr/>
+          <p:nvPr/>
+        </p:nvSpPr>
+        <p:spPr>
+          <a:xfrm>
+            <a:off x="7134225" y="2152650"/>
+            <a:ext cx="85725" cy="228600"/>
+          </a:xfrm>
+          <a:prstGeom prst="roundRect">
+            <a:avLst>
+              <a:gd name="adj" fmla="val 33333"/>
+            </a:avLst>
+          </a:prstGeom>
+          <a:solidFill>
+            <a:srgbClr val="45A5C8"/>
+          </a:solidFill>
+          <a:ln w="9525">
+            <a:solidFill>
+              <a:srgbClr val="0984AC"/>
+            </a:solidFill>
+          </a:ln>
+        </p:spPr>
+      </p:sp>
+      <p:sp>
+        <p:nvSpPr>
+          <p:cNvPr id="655" name="roundRect 655"/>
+          <p:cNvSpPr/>
+          <p:nvPr/>
+        </p:nvSpPr>
+        <p:spPr>
+          <a:xfrm>
+            <a:off x="7239000" y="2152650"/>
+            <a:ext cx="85725" cy="228600"/>
+          </a:xfrm>
+          <a:prstGeom prst="roundRect">
+            <a:avLst>
+              <a:gd name="adj" fmla="val 33333"/>
+            </a:avLst>
+          </a:prstGeom>
+          <a:solidFill>
+            <a:srgbClr val="73BADA"/>
+          </a:solidFill>
+          <a:ln w="9525">
+            <a:solidFill>
+              <a:srgbClr val="0984AC"/>
+            </a:solidFill>
+          </a:ln>
+        </p:spPr>
+      </p:sp>
+      <p:sp>
+        <p:nvSpPr>
+          <p:cNvPr id="656" name="roundRect 656"/>
+          <p:cNvSpPr/>
+          <p:nvPr/>
+        </p:nvSpPr>
+        <p:spPr>
+          <a:xfrm>
+            <a:off x="7343775" y="2152650"/>
+            <a:ext cx="85725" cy="228600"/>
+          </a:xfrm>
+          <a:prstGeom prst="roundRect">
+            <a:avLst>
+              <a:gd name="adj" fmla="val 33333"/>
+            </a:avLst>
+          </a:prstGeom>
+          <a:solidFill>
+            <a:srgbClr val="45A5C8"/>
+          </a:solidFill>
+          <a:ln w="9525">
+            <a:solidFill>
+              <a:srgbClr val="0984AC"/>
+            </a:solidFill>
+          </a:ln>
+        </p:spPr>
+      </p:sp>
+      <p:sp>
+        <p:nvSpPr>
+          <p:cNvPr id="657" name="roundRect 657"/>
+          <p:cNvSpPr/>
+          <p:nvPr/>
+        </p:nvSpPr>
+        <p:spPr>
+          <a:xfrm>
+            <a:off x="7448550" y="2152650"/>
+            <a:ext cx="85725" cy="228600"/>
+          </a:xfrm>
+          <a:prstGeom prst="roundRect">
+            <a:avLst>
+              <a:gd name="adj" fmla="val 33333"/>
+            </a:avLst>
+          </a:prstGeom>
+          <a:solidFill>
+            <a:srgbClr val="73BADA"/>
+          </a:solidFill>
+          <a:ln w="9525">
+            <a:solidFill>
+              <a:srgbClr val="0984AC"/>
+            </a:solidFill>
+          </a:ln>
+        </p:spPr>
+      </p:sp>
+      <p:sp>
+        <p:nvSpPr>
+          <p:cNvPr id="658" name="roundRect 658"/>
+          <p:cNvSpPr/>
+          <p:nvPr/>
+        </p:nvSpPr>
+        <p:spPr>
+          <a:xfrm>
+            <a:off x="7553325" y="2152650"/>
+            <a:ext cx="85725" cy="228600"/>
+          </a:xfrm>
+          <a:prstGeom prst="roundRect">
+            <a:avLst>
+              <a:gd name="adj" fmla="val 33333"/>
+            </a:avLst>
+          </a:prstGeom>
+          <a:solidFill>
+            <a:srgbClr val="45A5C8"/>
+          </a:solidFill>
+          <a:ln w="9525">
+            <a:solidFill>
+              <a:srgbClr val="0984AC"/>
+            </a:solidFill>
+          </a:ln>
+        </p:spPr>
+      </p:sp>
+      <p:sp>
+        <p:nvSpPr>
+          <p:cNvPr id="659" name="roundRect 659"/>
+          <p:cNvSpPr/>
+          <p:nvPr/>
+        </p:nvSpPr>
+        <p:spPr>
+          <a:xfrm>
+            <a:off x="7658100" y="2152650"/>
+            <a:ext cx="85725" cy="228600"/>
+          </a:xfrm>
+          <a:prstGeom prst="roundRect">
+            <a:avLst>
+              <a:gd name="adj" fmla="val 33333"/>
+            </a:avLst>
+          </a:prstGeom>
+          <a:solidFill>
+            <a:srgbClr val="73BADA"/>
+          </a:solidFill>
+          <a:ln w="9525">
+            <a:solidFill>
+              <a:srgbClr val="0984AC"/>
+            </a:solidFill>
+          </a:ln>
+        </p:spPr>
+      </p:sp>
+      <p:sp>
+        <p:nvSpPr>
+          <p:cNvPr id="660" name="line 660"/>
+          <p:cNvSpPr/>
+          <p:nvPr/>
+        </p:nvSpPr>
+        <p:spPr>
+          <a:xfrm>
+            <a:off x="7743825" y="2266950"/>
+            <a:ext cx="228600" cy="0"/>
+          </a:xfrm>
+          <a:prstGeom prst="line">
+            <a:avLst/>
+          </a:prstGeom>
+          <a:noFill/>
+          <a:ln w="17145">
+            <a:solidFill>
+              <a:srgbClr val="3D5D7C"/>
+            </a:solidFill>
+          </a:ln>
+        </p:spPr>
+      </p:sp>
+      <p:sp>
+        <p:nvSpPr>
+          <p:cNvPr id="661" name="ellipse 661"/>
+          <p:cNvSpPr/>
+          <p:nvPr/>
+        </p:nvSpPr>
+        <p:spPr>
+          <a:xfrm>
+            <a:off x="7981950" y="2143125"/>
+            <a:ext cx="666750" cy="247650"/>
+          </a:xfrm>
+          <a:prstGeom prst="ellipse">
+            <a:avLst/>
+          </a:prstGeom>
+          <a:solidFill>
+            <a:srgbClr val="F4BB78"/>
+          </a:solidFill>
+          <a:ln w="13335">
+            <a:solidFill>
+              <a:srgbClr val="DF8A2F"/>
+            </a:solidFill>
+          </a:ln>
+        </p:spPr>
+      </p:sp>
+      <p:sp>
+        <p:nvSpPr>
+          <p:cNvPr id="662" name="13R 662"/>
+          <p:cNvSpPr/>
+          <p:nvPr/>
+        </p:nvSpPr>
+        <p:spPr>
+          <a:xfrm>
+            <a:off x="5305425" y="2466975"/>
+            <a:ext cx="628650" cy="276225"/>
+          </a:xfrm>
+          <a:prstGeom prst="rect">
+            <a:avLst/>
+          </a:prstGeom>
+          <a:noFill/>
+          <a:ln w="17145">
+            <a:noFill/>
+          </a:ln>
+        </p:spPr>
+        <p:txBody>
+          <a:bodyPr wrap="none" lIns="0" rIns="0" tIns="0" bIns="0" anchor="ctr">
+            <a:noAutofit/>
+          </a:bodyPr>
+          <a:lstStyle/>
+          <a:p>
+            <a:pPr algn="ctr"/>
+            <a:r>
+              <a:rPr sz="1500" b="1">
+                <a:solidFill>
+                  <a:srgbClr val="3D5D7C"/>
+                </a:solidFill>
+                <a:latin typeface="Futura"/>
+                <a:ea typeface="Futura"/>
+                <a:cs typeface="Futura"/>
+              </a:rPr>
+              <a:t>13R</a:t>
+            </a:r>
+          </a:p>
+        </p:txBody>
+      </p:sp>
+      <p:sp>
+        <p:nvSpPr>
+          <p:cNvPr id="663" name="roundRect 663"/>
+          <p:cNvSpPr/>
+          <p:nvPr/>
+        </p:nvSpPr>
+        <p:spPr>
+          <a:xfrm>
+            <a:off x="6400800" y="2495550"/>
+            <a:ext cx="85725" cy="228600"/>
+          </a:xfrm>
+          <a:prstGeom prst="roundRect">
+            <a:avLst>
+              <a:gd name="adj" fmla="val 33333"/>
+            </a:avLst>
+          </a:prstGeom>
+          <a:solidFill>
+            <a:srgbClr val="45A5C8"/>
+          </a:solidFill>
+          <a:ln w="9525">
+            <a:solidFill>
+              <a:srgbClr val="0984AC"/>
+            </a:solidFill>
+          </a:ln>
+        </p:spPr>
+      </p:sp>
+      <p:sp>
+        <p:nvSpPr>
+          <p:cNvPr id="664" name="roundRect 664"/>
+          <p:cNvSpPr/>
+          <p:nvPr/>
+        </p:nvSpPr>
+        <p:spPr>
+          <a:xfrm>
+            <a:off x="6505575" y="2495550"/>
+            <a:ext cx="85725" cy="228600"/>
+          </a:xfrm>
+          <a:prstGeom prst="roundRect">
+            <a:avLst>
+              <a:gd name="adj" fmla="val 33333"/>
+            </a:avLst>
+          </a:prstGeom>
+          <a:solidFill>
+            <a:srgbClr val="73BADA"/>
+          </a:solidFill>
+          <a:ln w="9525">
+            <a:solidFill>
+              <a:srgbClr val="0984AC"/>
+            </a:solidFill>
+          </a:ln>
+        </p:spPr>
+      </p:sp>
+      <p:sp>
+        <p:nvSpPr>
+          <p:cNvPr id="665" name="roundRect 665"/>
+          <p:cNvSpPr/>
+          <p:nvPr/>
+        </p:nvSpPr>
+        <p:spPr>
+          <a:xfrm>
+            <a:off x="6610350" y="2495550"/>
+            <a:ext cx="85725" cy="228600"/>
+          </a:xfrm>
+          <a:prstGeom prst="roundRect">
+            <a:avLst>
+              <a:gd name="adj" fmla="val 33333"/>
+            </a:avLst>
+          </a:prstGeom>
+          <a:solidFill>
+            <a:srgbClr val="45A5C8"/>
+          </a:solidFill>
+          <a:ln w="9525">
+            <a:solidFill>
+              <a:srgbClr val="0984AC"/>
+            </a:solidFill>
+          </a:ln>
+        </p:spPr>
+      </p:sp>
+      <p:sp>
+        <p:nvSpPr>
+          <p:cNvPr id="666" name="roundRect 666"/>
+          <p:cNvSpPr/>
+          <p:nvPr/>
+        </p:nvSpPr>
+        <p:spPr>
+          <a:xfrm>
+            <a:off x="6715125" y="2495550"/>
+            <a:ext cx="85725" cy="228600"/>
+          </a:xfrm>
+          <a:prstGeom prst="roundRect">
+            <a:avLst>
+              <a:gd name="adj" fmla="val 33333"/>
+            </a:avLst>
+          </a:prstGeom>
+          <a:solidFill>
+            <a:srgbClr val="73BADA"/>
+          </a:solidFill>
+          <a:ln w="9525">
+            <a:solidFill>
+              <a:srgbClr val="0984AC"/>
+            </a:solidFill>
+          </a:ln>
+        </p:spPr>
+      </p:sp>
+      <p:sp>
+        <p:nvSpPr>
+          <p:cNvPr id="667" name="roundRect 667"/>
+          <p:cNvSpPr/>
+          <p:nvPr/>
+        </p:nvSpPr>
+        <p:spPr>
+          <a:xfrm>
+            <a:off x="6819900" y="2495550"/>
+            <a:ext cx="85725" cy="228600"/>
+          </a:xfrm>
+          <a:prstGeom prst="roundRect">
+            <a:avLst>
+              <a:gd name="adj" fmla="val 33333"/>
+            </a:avLst>
+          </a:prstGeom>
+          <a:solidFill>
+            <a:srgbClr val="45A5C8"/>
+          </a:solidFill>
+          <a:ln w="9525">
+            <a:solidFill>
+              <a:srgbClr val="0984AC"/>
+            </a:solidFill>
+          </a:ln>
+        </p:spPr>
+      </p:sp>
+      <p:sp>
+        <p:nvSpPr>
+          <p:cNvPr id="668" name="roundRect 668"/>
+          <p:cNvSpPr/>
+          <p:nvPr/>
+        </p:nvSpPr>
+        <p:spPr>
+          <a:xfrm>
+            <a:off x="6924675" y="2495550"/>
+            <a:ext cx="85725" cy="228600"/>
+          </a:xfrm>
+          <a:prstGeom prst="roundRect">
+            <a:avLst>
+              <a:gd name="adj" fmla="val 33333"/>
+            </a:avLst>
+          </a:prstGeom>
+          <a:solidFill>
+            <a:srgbClr val="73BADA"/>
+          </a:solidFill>
+          <a:ln w="9525">
+            <a:solidFill>
+              <a:srgbClr val="0984AC"/>
+            </a:solidFill>
+          </a:ln>
+        </p:spPr>
+      </p:sp>
+      <p:sp>
+        <p:nvSpPr>
+          <p:cNvPr id="669" name="roundRect 669"/>
+          <p:cNvSpPr/>
+          <p:nvPr/>
+        </p:nvSpPr>
+        <p:spPr>
+          <a:xfrm>
+            <a:off x="7029450" y="2495550"/>
+            <a:ext cx="85725" cy="228600"/>
+          </a:xfrm>
+          <a:prstGeom prst="roundRect">
+            <a:avLst>
+              <a:gd name="adj" fmla="val 33333"/>
+            </a:avLst>
+          </a:prstGeom>
+          <a:solidFill>
+            <a:srgbClr val="45A5C8"/>
+          </a:solidFill>
+          <a:ln w="9525">
+            <a:solidFill>
+              <a:srgbClr val="0984AC"/>
+            </a:solidFill>
+          </a:ln>
+        </p:spPr>
+      </p:sp>
+      <p:sp>
+        <p:nvSpPr>
+          <p:cNvPr id="670" name="roundRect 670"/>
+          <p:cNvSpPr/>
+          <p:nvPr/>
+        </p:nvSpPr>
+        <p:spPr>
+          <a:xfrm>
+            <a:off x="7134225" y="2495550"/>
+            <a:ext cx="85725" cy="228600"/>
+          </a:xfrm>
+          <a:prstGeom prst="roundRect">
+            <a:avLst>
+              <a:gd name="adj" fmla="val 33333"/>
+            </a:avLst>
+          </a:prstGeom>
+          <a:solidFill>
+            <a:srgbClr val="73BADA"/>
+          </a:solidFill>
+          <a:ln w="9525">
+            <a:solidFill>
+              <a:srgbClr val="0984AC"/>
+            </a:solidFill>
+          </a:ln>
+        </p:spPr>
+      </p:sp>
+      <p:sp>
+        <p:nvSpPr>
+          <p:cNvPr id="671" name="roundRect 671"/>
+          <p:cNvSpPr/>
+          <p:nvPr/>
+        </p:nvSpPr>
+        <p:spPr>
+          <a:xfrm>
+            <a:off x="7239000" y="2495550"/>
+            <a:ext cx="85725" cy="228600"/>
+          </a:xfrm>
+          <a:prstGeom prst="roundRect">
+            <a:avLst>
+              <a:gd name="adj" fmla="val 33333"/>
+            </a:avLst>
+          </a:prstGeom>
+          <a:solidFill>
+            <a:srgbClr val="45A5C8"/>
+          </a:solidFill>
+          <a:ln w="9525">
+            <a:solidFill>
+              <a:srgbClr val="0984AC"/>
+            </a:solidFill>
+          </a:ln>
+        </p:spPr>
+      </p:sp>
+      <p:sp>
+        <p:nvSpPr>
+          <p:cNvPr id="672" name="roundRect 672"/>
+          <p:cNvSpPr/>
+          <p:nvPr/>
+        </p:nvSpPr>
+        <p:spPr>
+          <a:xfrm>
+            <a:off x="7343775" y="2495550"/>
+            <a:ext cx="85725" cy="228600"/>
+          </a:xfrm>
+          <a:prstGeom prst="roundRect">
+            <a:avLst>
+              <a:gd name="adj" fmla="val 33333"/>
+            </a:avLst>
+          </a:prstGeom>
+          <a:solidFill>
+            <a:srgbClr val="73BADA"/>
+          </a:solidFill>
+          <a:ln w="9525">
+            <a:solidFill>
+              <a:srgbClr val="0984AC"/>
+            </a:solidFill>
+          </a:ln>
+        </p:spPr>
+      </p:sp>
+      <p:sp>
+        <p:nvSpPr>
+          <p:cNvPr id="673" name="roundRect 673"/>
+          <p:cNvSpPr/>
+          <p:nvPr/>
+        </p:nvSpPr>
+        <p:spPr>
+          <a:xfrm>
+            <a:off x="7448550" y="2495550"/>
+            <a:ext cx="85725" cy="228600"/>
+          </a:xfrm>
+          <a:prstGeom prst="roundRect">
+            <a:avLst>
+              <a:gd name="adj" fmla="val 33333"/>
+            </a:avLst>
+          </a:prstGeom>
+          <a:solidFill>
+            <a:srgbClr val="45A5C8"/>
+          </a:solidFill>
+          <a:ln w="9525">
+            <a:solidFill>
+              <a:srgbClr val="0984AC"/>
+            </a:solidFill>
+          </a:ln>
+        </p:spPr>
+      </p:sp>
+      <p:sp>
+        <p:nvSpPr>
+          <p:cNvPr id="674" name="roundRect 674"/>
+          <p:cNvSpPr/>
+          <p:nvPr/>
+        </p:nvSpPr>
+        <p:spPr>
+          <a:xfrm>
+            <a:off x="7553325" y="2495550"/>
+            <a:ext cx="85725" cy="228600"/>
+          </a:xfrm>
+          <a:prstGeom prst="roundRect">
+            <a:avLst>
+              <a:gd name="adj" fmla="val 33333"/>
+            </a:avLst>
+          </a:prstGeom>
+          <a:solidFill>
+            <a:srgbClr val="73BADA"/>
+          </a:solidFill>
+          <a:ln w="9525">
+            <a:solidFill>
+              <a:srgbClr val="0984AC"/>
+            </a:solidFill>
+          </a:ln>
+        </p:spPr>
+      </p:sp>
+      <p:sp>
+        <p:nvSpPr>
+          <p:cNvPr id="675" name="roundRect 675"/>
+          <p:cNvSpPr/>
+          <p:nvPr/>
+        </p:nvSpPr>
+        <p:spPr>
+          <a:xfrm>
+            <a:off x="7658100" y="2495550"/>
+            <a:ext cx="85725" cy="228600"/>
+          </a:xfrm>
+          <a:prstGeom prst="roundRect">
+            <a:avLst>
+              <a:gd name="adj" fmla="val 33333"/>
+            </a:avLst>
+          </a:prstGeom>
+          <a:solidFill>
+            <a:srgbClr val="45A5C8"/>
+          </a:solidFill>
+          <a:ln w="9525">
+            <a:solidFill>
+              <a:srgbClr val="0984AC"/>
+            </a:solidFill>
+          </a:ln>
+        </p:spPr>
+      </p:sp>
+      <p:sp>
+        <p:nvSpPr>
+          <p:cNvPr id="676" name="line 676"/>
+          <p:cNvSpPr/>
+          <p:nvPr/>
+        </p:nvSpPr>
+        <p:spPr>
+          <a:xfrm>
+            <a:off x="7743825" y="2609850"/>
+            <a:ext cx="228600" cy="0"/>
+          </a:xfrm>
+          <a:prstGeom prst="line">
+            <a:avLst/>
+          </a:prstGeom>
+          <a:noFill/>
+          <a:ln w="17145">
+            <a:solidFill>
+              <a:srgbClr val="3D5D7C"/>
+            </a:solidFill>
+          </a:ln>
+        </p:spPr>
+      </p:sp>
+      <p:sp>
+        <p:nvSpPr>
+          <p:cNvPr id="677" name="ellipse 677"/>
+          <p:cNvSpPr/>
+          <p:nvPr/>
+        </p:nvSpPr>
+        <p:spPr>
+          <a:xfrm>
+            <a:off x="7981950" y="2486025"/>
+            <a:ext cx="666750" cy="247650"/>
+          </a:xfrm>
+          <a:prstGeom prst="ellipse">
+            <a:avLst/>
+          </a:prstGeom>
+          <a:solidFill>
+            <a:srgbClr val="F4BB78"/>
+          </a:solidFill>
+          <a:ln w="13335">
+            <a:solidFill>
+              <a:srgbClr val="DF8A2F"/>
+            </a:solidFill>
+          </a:ln>
+        </p:spPr>
+      </p:sp>
+      <p:sp>
+        <p:nvSpPr>
+          <p:cNvPr id="678" name="15R 678"/>
+          <p:cNvSpPr/>
+          <p:nvPr/>
+        </p:nvSpPr>
+        <p:spPr>
+          <a:xfrm>
+            <a:off x="5305425" y="2809875"/>
+            <a:ext cx="628650" cy="276225"/>
+          </a:xfrm>
+          <a:prstGeom prst="rect">
+            <a:avLst/>
+          </a:prstGeom>
+          <a:noFill/>
+          <a:ln w="17145">
+            <a:noFill/>
+          </a:ln>
+        </p:spPr>
+        <p:txBody>
+          <a:bodyPr wrap="none" lIns="0" rIns="0" tIns="0" bIns="0" anchor="ctr">
+            <a:noAutofit/>
+          </a:bodyPr>
+          <a:lstStyle/>
+          <a:p>
+            <a:pPr algn="ctr"/>
+            <a:r>
+              <a:rPr sz="1500" b="1">
+                <a:solidFill>
+                  <a:srgbClr val="3D5D7C"/>
+                </a:solidFill>
+                <a:latin typeface="Futura"/>
+                <a:ea typeface="Futura"/>
+                <a:cs typeface="Futura"/>
+              </a:rPr>
+              <a:t>15R</a:t>
+            </a:r>
+          </a:p>
+        </p:txBody>
+      </p:sp>
+      <p:sp>
+        <p:nvSpPr>
+          <p:cNvPr id="679" name="roundRect 679"/>
+          <p:cNvSpPr/>
+          <p:nvPr/>
+        </p:nvSpPr>
+        <p:spPr>
+          <a:xfrm>
+            <a:off x="6191250" y="2838450"/>
+            <a:ext cx="85725" cy="228600"/>
+          </a:xfrm>
+          <a:prstGeom prst="roundRect">
+            <a:avLst>
+              <a:gd name="adj" fmla="val 33333"/>
+            </a:avLst>
+          </a:prstGeom>
+          <a:solidFill>
+            <a:srgbClr val="45A5C8"/>
+          </a:solidFill>
+          <a:ln w="9525">
+            <a:solidFill>
+              <a:srgbClr val="0984AC"/>
+            </a:solidFill>
+          </a:ln>
+        </p:spPr>
+      </p:sp>
+      <p:sp>
+        <p:nvSpPr>
+          <p:cNvPr id="680" name="roundRect 680"/>
+          <p:cNvSpPr/>
+          <p:nvPr/>
+        </p:nvSpPr>
+        <p:spPr>
+          <a:xfrm>
+            <a:off x="6296025" y="2838450"/>
+            <a:ext cx="85725" cy="228600"/>
+          </a:xfrm>
+          <a:prstGeom prst="roundRect">
+            <a:avLst>
+              <a:gd name="adj" fmla="val 33333"/>
+            </a:avLst>
+          </a:prstGeom>
+          <a:solidFill>
+            <a:srgbClr val="73BADA"/>
+          </a:solidFill>
+          <a:ln w="9525">
+            <a:solidFill>
+              <a:srgbClr val="0984AC"/>
+            </a:solidFill>
+          </a:ln>
+        </p:spPr>
+      </p:sp>
+      <p:sp>
+        <p:nvSpPr>
+          <p:cNvPr id="681" name="roundRect 681"/>
+          <p:cNvSpPr/>
+          <p:nvPr/>
+        </p:nvSpPr>
+        <p:spPr>
+          <a:xfrm>
+            <a:off x="6400800" y="2838450"/>
+            <a:ext cx="85725" cy="228600"/>
+          </a:xfrm>
+          <a:prstGeom prst="roundRect">
+            <a:avLst>
+              <a:gd name="adj" fmla="val 33333"/>
+            </a:avLst>
+          </a:prstGeom>
+          <a:solidFill>
+            <a:srgbClr val="45A5C8"/>
+          </a:solidFill>
+          <a:ln w="9525">
+            <a:solidFill>
+              <a:srgbClr val="0984AC"/>
+            </a:solidFill>
+          </a:ln>
+        </p:spPr>
+      </p:sp>
+      <p:sp>
+        <p:nvSpPr>
+          <p:cNvPr id="682" name="roundRect 682"/>
+          <p:cNvSpPr/>
+          <p:nvPr/>
+        </p:nvSpPr>
+        <p:spPr>
+          <a:xfrm>
+            <a:off x="6505575" y="2838450"/>
+            <a:ext cx="85725" cy="228600"/>
+          </a:xfrm>
+          <a:prstGeom prst="roundRect">
+            <a:avLst>
+              <a:gd name="adj" fmla="val 33333"/>
+            </a:avLst>
+          </a:prstGeom>
+          <a:solidFill>
+            <a:srgbClr val="73BADA"/>
+          </a:solidFill>
+          <a:ln w="9525">
+            <a:solidFill>
+              <a:srgbClr val="0984AC"/>
+            </a:solidFill>
+          </a:ln>
+        </p:spPr>
+      </p:sp>
+      <p:sp>
+        <p:nvSpPr>
+          <p:cNvPr id="683" name="roundRect 683"/>
+          <p:cNvSpPr/>
+          <p:nvPr/>
+        </p:nvSpPr>
+        <p:spPr>
+          <a:xfrm>
+            <a:off x="6610350" y="2838450"/>
+            <a:ext cx="85725" cy="228600"/>
+          </a:xfrm>
+          <a:prstGeom prst="roundRect">
+            <a:avLst>
+              <a:gd name="adj" fmla="val 33333"/>
+            </a:avLst>
+          </a:prstGeom>
+          <a:solidFill>
+            <a:srgbClr val="45A5C8"/>
+          </a:solidFill>
+          <a:ln w="9525">
+            <a:solidFill>
+              <a:srgbClr val="0984AC"/>
+            </a:solidFill>
+          </a:ln>
+        </p:spPr>
+      </p:sp>
+      <p:sp>
+        <p:nvSpPr>
+          <p:cNvPr id="684" name="roundRect 684"/>
+          <p:cNvSpPr/>
+          <p:nvPr/>
+        </p:nvSpPr>
+        <p:spPr>
+          <a:xfrm>
+            <a:off x="6715125" y="2838450"/>
+            <a:ext cx="85725" cy="228600"/>
+          </a:xfrm>
+          <a:prstGeom prst="roundRect">
+            <a:avLst>
+              <a:gd name="adj" fmla="val 33333"/>
+            </a:avLst>
+          </a:prstGeom>
+          <a:solidFill>
+            <a:srgbClr val="73BADA"/>
+          </a:solidFill>
+          <a:ln w="9525">
+            <a:solidFill>
+              <a:srgbClr val="0984AC"/>
+            </a:solidFill>
+          </a:ln>
+        </p:spPr>
+      </p:sp>
+      <p:sp>
+        <p:nvSpPr>
+          <p:cNvPr id="685" name="roundRect 685"/>
+          <p:cNvSpPr/>
+          <p:nvPr/>
+        </p:nvSpPr>
+        <p:spPr>
+          <a:xfrm>
+            <a:off x="6819900" y="2838450"/>
+            <a:ext cx="85725" cy="228600"/>
+          </a:xfrm>
+          <a:prstGeom prst="roundRect">
+            <a:avLst>
+              <a:gd name="adj" fmla="val 33333"/>
+            </a:avLst>
+          </a:prstGeom>
+          <a:solidFill>
+            <a:srgbClr val="45A5C8"/>
+          </a:solidFill>
+          <a:ln w="9525">
+            <a:solidFill>
+              <a:srgbClr val="0984AC"/>
+            </a:solidFill>
+          </a:ln>
+        </p:spPr>
+      </p:sp>
+      <p:sp>
+        <p:nvSpPr>
+          <p:cNvPr id="686" name="roundRect 686"/>
+          <p:cNvSpPr/>
+          <p:nvPr/>
+        </p:nvSpPr>
+        <p:spPr>
+          <a:xfrm>
+            <a:off x="6924675" y="2838450"/>
+            <a:ext cx="85725" cy="228600"/>
+          </a:xfrm>
+          <a:prstGeom prst="roundRect">
+            <a:avLst>
+              <a:gd name="adj" fmla="val 33333"/>
+            </a:avLst>
+          </a:prstGeom>
+          <a:solidFill>
+            <a:srgbClr val="73BADA"/>
+          </a:solidFill>
+          <a:ln w="9525">
+            <a:solidFill>
+              <a:srgbClr val="0984AC"/>
+            </a:solidFill>
+          </a:ln>
+        </p:spPr>
+      </p:sp>
+      <p:sp>
+        <p:nvSpPr>
+          <p:cNvPr id="687" name="roundRect 687"/>
+          <p:cNvSpPr/>
+          <p:nvPr/>
+        </p:nvSpPr>
+        <p:spPr>
+          <a:xfrm>
+            <a:off x="7029450" y="2838450"/>
+            <a:ext cx="85725" cy="228600"/>
+          </a:xfrm>
+          <a:prstGeom prst="roundRect">
+            <a:avLst>
+              <a:gd name="adj" fmla="val 33333"/>
+            </a:avLst>
+          </a:prstGeom>
+          <a:solidFill>
+            <a:srgbClr val="45A5C8"/>
+          </a:solidFill>
+          <a:ln w="9525">
+            <a:solidFill>
+              <a:srgbClr val="0984AC"/>
+            </a:solidFill>
+          </a:ln>
+        </p:spPr>
+      </p:sp>
+      <p:sp>
+        <p:nvSpPr>
+          <p:cNvPr id="688" name="roundRect 688"/>
+          <p:cNvSpPr/>
+          <p:nvPr/>
+        </p:nvSpPr>
+        <p:spPr>
+          <a:xfrm>
+            <a:off x="7134225" y="2838450"/>
+            <a:ext cx="85725" cy="228600"/>
+          </a:xfrm>
+          <a:prstGeom prst="roundRect">
+            <a:avLst>
+              <a:gd name="adj" fmla="val 33333"/>
+            </a:avLst>
+          </a:prstGeom>
+          <a:solidFill>
+            <a:srgbClr val="73BADA"/>
+          </a:solidFill>
+          <a:ln w="9525">
+            <a:solidFill>
+              <a:srgbClr val="0984AC"/>
+            </a:solidFill>
+          </a:ln>
+        </p:spPr>
+      </p:sp>
+      <p:sp>
+        <p:nvSpPr>
+          <p:cNvPr id="689" name="roundRect 689"/>
+          <p:cNvSpPr/>
+          <p:nvPr/>
+        </p:nvSpPr>
+        <p:spPr>
+          <a:xfrm>
+            <a:off x="7239000" y="2838450"/>
+            <a:ext cx="85725" cy="228600"/>
+          </a:xfrm>
+          <a:prstGeom prst="roundRect">
+            <a:avLst>
+              <a:gd name="adj" fmla="val 33333"/>
+            </a:avLst>
+          </a:prstGeom>
+          <a:solidFill>
+            <a:srgbClr val="45A5C8"/>
+          </a:solidFill>
+          <a:ln w="9525">
+            <a:solidFill>
+              <a:srgbClr val="0984AC"/>
+            </a:solidFill>
+          </a:ln>
+        </p:spPr>
+      </p:sp>
+      <p:sp>
+        <p:nvSpPr>
+          <p:cNvPr id="690" name="roundRect 690"/>
+          <p:cNvSpPr/>
+          <p:nvPr/>
+        </p:nvSpPr>
+        <p:spPr>
+          <a:xfrm>
+            <a:off x="7343775" y="2838450"/>
+            <a:ext cx="85725" cy="228600"/>
+          </a:xfrm>
+          <a:prstGeom prst="roundRect">
+            <a:avLst>
+              <a:gd name="adj" fmla="val 33333"/>
+            </a:avLst>
+          </a:prstGeom>
+          <a:solidFill>
+            <a:srgbClr val="73BADA"/>
+          </a:solidFill>
+          <a:ln w="9525">
+            <a:solidFill>
+              <a:srgbClr val="0984AC"/>
+            </a:solidFill>
+          </a:ln>
+        </p:spPr>
+      </p:sp>
+      <p:sp>
+        <p:nvSpPr>
+          <p:cNvPr id="691" name="roundRect 691"/>
+          <p:cNvSpPr/>
+          <p:nvPr/>
+        </p:nvSpPr>
+        <p:spPr>
+          <a:xfrm>
+            <a:off x="7448550" y="2838450"/>
+            <a:ext cx="85725" cy="228600"/>
+          </a:xfrm>
+          <a:prstGeom prst="roundRect">
+            <a:avLst>
+              <a:gd name="adj" fmla="val 33333"/>
+            </a:avLst>
+          </a:prstGeom>
+          <a:solidFill>
+            <a:srgbClr val="45A5C8"/>
+          </a:solidFill>
+          <a:ln w="9525">
+            <a:solidFill>
+              <a:srgbClr val="0984AC"/>
+            </a:solidFill>
+          </a:ln>
+        </p:spPr>
+      </p:sp>
+      <p:sp>
+        <p:nvSpPr>
+          <p:cNvPr id="692" name="roundRect 692"/>
+          <p:cNvSpPr/>
+          <p:nvPr/>
+        </p:nvSpPr>
+        <p:spPr>
+          <a:xfrm>
+            <a:off x="7553325" y="2838450"/>
+            <a:ext cx="85725" cy="228600"/>
+          </a:xfrm>
+          <a:prstGeom prst="roundRect">
+            <a:avLst>
+              <a:gd name="adj" fmla="val 33333"/>
+            </a:avLst>
+          </a:prstGeom>
+          <a:solidFill>
+            <a:srgbClr val="73BADA"/>
+          </a:solidFill>
+          <a:ln w="9525">
+            <a:solidFill>
+              <a:srgbClr val="0984AC"/>
+            </a:solidFill>
+          </a:ln>
+        </p:spPr>
+      </p:sp>
+      <p:sp>
+        <p:nvSpPr>
+          <p:cNvPr id="693" name="roundRect 693"/>
+          <p:cNvSpPr/>
+          <p:nvPr/>
+        </p:nvSpPr>
+        <p:spPr>
+          <a:xfrm>
+            <a:off x="7658100" y="2838450"/>
+            <a:ext cx="85725" cy="228600"/>
+          </a:xfrm>
+          <a:prstGeom prst="roundRect">
+            <a:avLst>
+              <a:gd name="adj" fmla="val 33333"/>
+            </a:avLst>
+          </a:prstGeom>
+          <a:solidFill>
+            <a:srgbClr val="45A5C8"/>
+          </a:solidFill>
+          <a:ln w="9525">
+            <a:solidFill>
+              <a:srgbClr val="0984AC"/>
+            </a:solidFill>
+          </a:ln>
+        </p:spPr>
+      </p:sp>
+      <p:sp>
+        <p:nvSpPr>
+          <p:cNvPr id="694" name="line 694"/>
+          <p:cNvSpPr/>
+          <p:nvPr/>
+        </p:nvSpPr>
+        <p:spPr>
+          <a:xfrm>
+            <a:off x="7743825" y="2952750"/>
+            <a:ext cx="228600" cy="0"/>
+          </a:xfrm>
+          <a:prstGeom prst="line">
+            <a:avLst/>
+          </a:prstGeom>
+          <a:noFill/>
+          <a:ln w="17145">
+            <a:solidFill>
+              <a:srgbClr val="3D5D7C"/>
+            </a:solidFill>
+          </a:ln>
+        </p:spPr>
+      </p:sp>
+      <p:sp>
+        <p:nvSpPr>
+          <p:cNvPr id="695" name="ellipse 695"/>
+          <p:cNvSpPr/>
+          <p:nvPr/>
+        </p:nvSpPr>
+        <p:spPr>
+          <a:xfrm>
+            <a:off x="7981950" y="2828925"/>
+            <a:ext cx="666750" cy="247650"/>
+          </a:xfrm>
+          <a:prstGeom prst="ellipse">
+            <a:avLst/>
+          </a:prstGeom>
+          <a:solidFill>
+            <a:srgbClr val="F4BB78"/>
+          </a:solidFill>
+          <a:ln w="13335">
+            <a:solidFill>
+              <a:srgbClr val="DF8A2F"/>
+            </a:solidFill>
+          </a:ln>
+        </p:spPr>
+      </p:sp>
+      <p:sp>
+        <p:nvSpPr>
+          <p:cNvPr id="696" name="roundRect 696"/>
+          <p:cNvSpPr/>
+          <p:nvPr/>
+        </p:nvSpPr>
+        <p:spPr>
+          <a:xfrm>
+            <a:off x="304800" y="16802100"/>
+            <a:ext cx="8686800" cy="3238500"/>
+          </a:xfrm>
+          <a:prstGeom prst="roundRect">
+            <a:avLst>
+              <a:gd name="adj" fmla="val 8235"/>
+            </a:avLst>
+          </a:prstGeom>
+          <a:solidFill>
+            <a:srgbClr val="FBF0F4"/>
+          </a:solidFill>
+          <a:ln w="23812">
+            <a:solidFill>
+              <a:srgbClr val="A44869"/>
+            </a:solidFill>
+          </a:ln>
+        </p:spPr>
+      </p:sp>
+      <p:sp>
+        <p:nvSpPr>
+          <p:cNvPr id="697" name="FUNCTIONAL VALIDATION 697"/>
+          <p:cNvSpPr/>
+          <p:nvPr/>
+        </p:nvSpPr>
+        <p:spPr>
+          <a:xfrm>
+            <a:off x="495300" y="16992600"/>
+            <a:ext cx="4286250" cy="381000"/>
+          </a:xfrm>
+          <a:prstGeom prst="roundRect">
+            <a:avLst>
+              <a:gd name="adj" fmla="val 30000"/>
+            </a:avLst>
+          </a:prstGeom>
+          <a:solidFill>
+            <a:srgbClr val="A44869"/>
+          </a:solidFill>
+          <a:ln w="17145">
+            <a:noFill/>
+          </a:ln>
+        </p:spPr>
+        <p:txBody>
+          <a:bodyPr wrap="none" lIns="0" rIns="0" tIns="0" bIns="0" anchor="ctr">
+            <a:noAutofit/>
+          </a:bodyPr>
+          <a:lstStyle/>
+          <a:p>
+            <a:pPr algn="ctr"/>
+            <a:r>
+              <a:rPr sz="1950" b="1">
+                <a:solidFill>
+                  <a:srgbClr val="FFFFFF"/>
+                </a:solidFill>
+                <a:latin typeface="Futura"/>
+                <a:ea typeface="Futura"/>
+                <a:cs typeface="Futura"/>
+              </a:rPr>
+              <a:t>FUNCTIONAL VALIDATION</a:t>
+            </a:r>
+          </a:p>
+        </p:txBody>
+      </p:sp>
+      <p:sp>
+        <p:nvSpPr>
+          <p:cNvPr id="698" name="Experiment I 698"/>
+          <p:cNvSpPr/>
+          <p:nvPr/>
+        </p:nvSpPr>
+        <p:spPr>
+          <a:xfrm>
+            <a:off x="533400" y="17564100"/>
+            <a:ext cx="2476500" cy="381000"/>
+          </a:xfrm>
+          <a:prstGeom prst="roundRect">
+            <a:avLst>
+              <a:gd name="adj" fmla="val 30000"/>
+            </a:avLst>
+          </a:prstGeom>
+          <a:solidFill>
+            <a:srgbClr val="F1DAE4"/>
+          </a:solidFill>
+          <a:ln w="17145">
+            <a:noFill/>
+          </a:ln>
+        </p:spPr>
+        <p:txBody>
+          <a:bodyPr wrap="none" lIns="0" rIns="0" tIns="0" bIns="0" anchor="ctr">
+            <a:noAutofit/>
+          </a:bodyPr>
+          <a:lstStyle/>
+          <a:p>
+            <a:pPr algn="ctr"/>
+            <a:r>
+              <a:rPr sz="1575" b="1">
+                <a:solidFill>
+                  <a:srgbClr val="A44869"/>
+                </a:solidFill>
+                <a:latin typeface="Georgia"/>
+                <a:ea typeface="Georgia"/>
+                <a:cs typeface="Georgia"/>
+              </a:rPr>
+              <a:t>Experiment I</a:t>
+            </a:r>
+          </a:p>
+        </p:txBody>
+      </p:sp>
+      <p:sp>
+        <p:nvSpPr>
+          <p:cNvPr id="699" name="Experiment II 699"/>
+          <p:cNvSpPr/>
+          <p:nvPr/>
+        </p:nvSpPr>
+        <p:spPr>
+          <a:xfrm>
+            <a:off x="3371850" y="17564100"/>
+            <a:ext cx="2476500" cy="381000"/>
+          </a:xfrm>
+          <a:prstGeom prst="roundRect">
+            <a:avLst>
+              <a:gd name="adj" fmla="val 30000"/>
+            </a:avLst>
+          </a:prstGeom>
+          <a:solidFill>
+            <a:srgbClr val="F1DAE4"/>
+          </a:solidFill>
+          <a:ln w="17145">
+            <a:noFill/>
+          </a:ln>
+        </p:spPr>
+        <p:txBody>
+          <a:bodyPr wrap="none" lIns="0" rIns="0" tIns="0" bIns="0" anchor="ctr">
+            <a:noAutofit/>
+          </a:bodyPr>
+          <a:lstStyle/>
+          <a:p>
+            <a:pPr algn="ctr"/>
+            <a:r>
+              <a:rPr sz="1575" b="1">
+                <a:solidFill>
+                  <a:srgbClr val="A44869"/>
+                </a:solidFill>
+                <a:latin typeface="Georgia"/>
+                <a:ea typeface="Georgia"/>
+                <a:cs typeface="Georgia"/>
+              </a:rPr>
+              <a:t>Experiment II</a:t>
+            </a:r>
+          </a:p>
+        </p:txBody>
+      </p:sp>
+      <p:sp>
+        <p:nvSpPr>
+          <p:cNvPr id="700" name="Experiment III 700"/>
+          <p:cNvSpPr/>
+          <p:nvPr/>
+        </p:nvSpPr>
+        <p:spPr>
+          <a:xfrm>
+            <a:off x="6210300" y="17564100"/>
+            <a:ext cx="2476500" cy="381000"/>
+          </a:xfrm>
+          <a:prstGeom prst="roundRect">
+            <a:avLst>
+              <a:gd name="adj" fmla="val 30000"/>
+            </a:avLst>
+          </a:prstGeom>
+          <a:solidFill>
+            <a:srgbClr val="F1DAE4"/>
+          </a:solidFill>
+          <a:ln w="17145">
+            <a:noFill/>
+          </a:ln>
+        </p:spPr>
+        <p:txBody>
+          <a:bodyPr wrap="none" lIns="0" rIns="0" tIns="0" bIns="0" anchor="ctr">
+            <a:noAutofit/>
+          </a:bodyPr>
+          <a:lstStyle/>
+          <a:p>
+            <a:pPr algn="ctr"/>
+            <a:r>
+              <a:rPr sz="1575" b="1">
+                <a:solidFill>
+                  <a:srgbClr val="A44869"/>
+                </a:solidFill>
+                <a:latin typeface="Georgia"/>
+                <a:ea typeface="Georgia"/>
+                <a:cs typeface="Georgia"/>
+              </a:rPr>
+              <a:t>Experiment III</a:t>
+            </a:r>
+          </a:p>
+        </p:txBody>
+      </p:sp>
+      <p:sp>
+        <p:nvSpPr>
+          <p:cNvPr id="701" name="Electroporation 701"/>
+          <p:cNvSpPr/>
+          <p:nvPr/>
+        </p:nvSpPr>
+        <p:spPr>
+          <a:xfrm>
+            <a:off x="533400" y="18030825"/>
+            <a:ext cx="2476500" cy="266700"/>
+          </a:xfrm>
+          <a:prstGeom prst="rect">
+            <a:avLst/>
+          </a:prstGeom>
+          <a:noFill/>
+          <a:ln w="17145">
+            <a:noFill/>
+          </a:ln>
+        </p:spPr>
+        <p:txBody>
+          <a:bodyPr wrap="none" lIns="0" rIns="0" tIns="0" bIns="0" anchor="ctr">
+            <a:noAutofit/>
+          </a:bodyPr>
+          <a:lstStyle/>
+          <a:p>
+            <a:pPr algn="ctr"/>
+            <a:r>
+              <a:rPr sz="1650" b="1">
+                <a:solidFill>
+                  <a:srgbClr val="A44869"/>
+                </a:solidFill>
+                <a:latin typeface="Futura"/>
+                <a:ea typeface="Futura"/>
+                <a:cs typeface="Futura"/>
+              </a:rPr>
+              <a:t>Electroporation</a:t>
+            </a:r>
+          </a:p>
+        </p:txBody>
+      </p:sp>
+      <p:sp>
+        <p:nvSpPr>
+          <p:cNvPr id="702" name="BODIPY 493/503 702"/>
+          <p:cNvSpPr/>
+          <p:nvPr/>
+        </p:nvSpPr>
+        <p:spPr>
+          <a:xfrm>
+            <a:off x="3371850" y="18030825"/>
+            <a:ext cx="2476500" cy="266700"/>
+          </a:xfrm>
+          <a:prstGeom prst="rect">
+            <a:avLst/>
+          </a:prstGeom>
+          <a:noFill/>
+          <a:ln w="17145">
+            <a:noFill/>
+          </a:ln>
+        </p:spPr>
+        <p:txBody>
+          <a:bodyPr wrap="none" lIns="0" rIns="0" tIns="0" bIns="0" anchor="ctr">
+            <a:noAutofit/>
+          </a:bodyPr>
+          <a:lstStyle/>
+          <a:p>
+            <a:pPr algn="ctr"/>
+            <a:r>
+              <a:rPr sz="1650" b="1">
+                <a:solidFill>
+                  <a:srgbClr val="A44869"/>
+                </a:solidFill>
+                <a:latin typeface="Futura"/>
+                <a:ea typeface="Futura"/>
+                <a:cs typeface="Futura"/>
+              </a:rPr>
+              <a:t>BODIPY 493/503</a:t>
+            </a:r>
+          </a:p>
+        </p:txBody>
+      </p:sp>
+      <p:sp>
+        <p:nvSpPr>
+          <p:cNvPr id="703" name="Aβ42 ELISA 703"/>
+          <p:cNvSpPr/>
+          <p:nvPr/>
+        </p:nvSpPr>
+        <p:spPr>
+          <a:xfrm>
+            <a:off x="6210300" y="18030825"/>
+            <a:ext cx="2476500" cy="266700"/>
+          </a:xfrm>
+          <a:prstGeom prst="rect">
+            <a:avLst/>
+          </a:prstGeom>
+          <a:noFill/>
+          <a:ln w="17145">
+            <a:noFill/>
+          </a:ln>
+        </p:spPr>
+        <p:txBody>
+          <a:bodyPr wrap="none" lIns="0" rIns="0" tIns="0" bIns="0" anchor="ctr">
+            <a:noAutofit/>
+          </a:bodyPr>
+          <a:lstStyle/>
+          <a:p>
+            <a:pPr algn="ctr"/>
+            <a:r>
+              <a:rPr sz="1650" b="1">
+                <a:solidFill>
+                  <a:srgbClr val="A44869"/>
+                </a:solidFill>
+                <a:latin typeface="Futura"/>
+                <a:ea typeface="Futura"/>
+                <a:cs typeface="Futura"/>
+              </a:rPr>
+              <a:t>Aβ Internalization</a:t>
+            </a:r>
+          </a:p>
+        </p:txBody>
+      </p:sp>
+      <p:sp>
+        <p:nvSpPr>
+          <p:cNvPr id="718" name="ellipse 718"/>
+          <p:cNvSpPr/>
+          <p:nvPr/>
+        </p:nvSpPr>
+        <p:spPr>
+          <a:xfrm>
+            <a:off x="3857625" y="18478500"/>
+            <a:ext cx="1466850" cy="1047750"/>
+          </a:xfrm>
+          <a:prstGeom prst="ellipse">
+            <a:avLst/>
+          </a:prstGeom>
+          <a:solidFill>
+            <a:srgbClr val="F4E8F2"/>
+          </a:solidFill>
+          <a:ln w="19050">
+            <a:solidFill>
+              <a:srgbClr val="A44869"/>
+            </a:solidFill>
+          </a:ln>
+        </p:spPr>
+      </p:sp>
+      <p:sp>
+        <p:nvSpPr>
+          <p:cNvPr id="719" name="ellipse 719"/>
+          <p:cNvSpPr/>
+          <p:nvPr/>
+        </p:nvSpPr>
+        <p:spPr>
+          <a:xfrm>
+            <a:off x="4343400" y="18802350"/>
+            <a:ext cx="447675" cy="371475"/>
+          </a:xfrm>
+          <a:prstGeom prst="ellipse">
+            <a:avLst/>
+          </a:prstGeom>
+          <a:solidFill>
+            <a:srgbClr val="7098DB"/>
+          </a:solidFill>
+          <a:ln w="15240">
+            <a:solidFill>
+              <a:srgbClr val="446DB1"/>
+            </a:solidFill>
+          </a:ln>
+        </p:spPr>
+      </p:sp>
+      <p:sp>
+        <p:nvSpPr>
+          <p:cNvPr id="720" name="ellipse 720"/>
+          <p:cNvSpPr/>
+          <p:nvPr/>
+        </p:nvSpPr>
+        <p:spPr>
+          <a:xfrm>
+            <a:off x="4095750" y="18707100"/>
+            <a:ext cx="95250" cy="95250"/>
+          </a:xfrm>
+          <a:prstGeom prst="ellipse">
+            <a:avLst/>
+          </a:prstGeom>
+          <a:solidFill>
+            <a:srgbClr val="65BD79"/>
+          </a:solidFill>
+          <a:ln w="9525">
+            <a:solidFill>
+              <a:srgbClr val="388F55"/>
+            </a:solidFill>
+          </a:ln>
+        </p:spPr>
+      </p:sp>
+      <p:sp>
+        <p:nvSpPr>
+          <p:cNvPr id="721" name="ellipse 721"/>
+          <p:cNvSpPr/>
+          <p:nvPr/>
+        </p:nvSpPr>
+        <p:spPr>
+          <a:xfrm>
+            <a:off x="4286250" y="18602325"/>
+            <a:ext cx="76200" cy="76200"/>
+          </a:xfrm>
+          <a:prstGeom prst="ellipse">
+            <a:avLst/>
+          </a:prstGeom>
+          <a:solidFill>
+            <a:srgbClr val="65BD79"/>
+          </a:solidFill>
+          <a:ln w="9525">
+            <a:solidFill>
+              <a:srgbClr val="388F55"/>
+            </a:solidFill>
+          </a:ln>
+        </p:spPr>
+      </p:sp>
+      <p:sp>
+        <p:nvSpPr>
+          <p:cNvPr id="722" name="ellipse 722"/>
+          <p:cNvSpPr/>
+          <p:nvPr/>
+        </p:nvSpPr>
+        <p:spPr>
+          <a:xfrm>
+            <a:off x="4876800" y="18726150"/>
+            <a:ext cx="114300" cy="114300"/>
+          </a:xfrm>
+          <a:prstGeom prst="ellipse">
+            <a:avLst/>
+          </a:prstGeom>
+          <a:solidFill>
+            <a:srgbClr val="65BD79"/>
+          </a:solidFill>
+          <a:ln w="9525">
+            <a:solidFill>
+              <a:srgbClr val="388F55"/>
+            </a:solidFill>
+          </a:ln>
+        </p:spPr>
+      </p:sp>
+      <p:sp>
+        <p:nvSpPr>
+          <p:cNvPr id="723" name="ellipse 723"/>
+          <p:cNvSpPr/>
+          <p:nvPr/>
+        </p:nvSpPr>
+        <p:spPr>
+          <a:xfrm>
+            <a:off x="5057775" y="18983325"/>
+            <a:ext cx="85725" cy="85725"/>
+          </a:xfrm>
+          <a:prstGeom prst="ellipse">
+            <a:avLst/>
+          </a:prstGeom>
+          <a:solidFill>
+            <a:srgbClr val="65BD79"/>
+          </a:solidFill>
+          <a:ln w="9525">
+            <a:solidFill>
+              <a:srgbClr val="388F55"/>
+            </a:solidFill>
+          </a:ln>
+        </p:spPr>
+      </p:sp>
+      <p:sp>
+        <p:nvSpPr>
+          <p:cNvPr id="724" name="ellipse 724"/>
+          <p:cNvSpPr/>
+          <p:nvPr/>
+        </p:nvSpPr>
+        <p:spPr>
+          <a:xfrm>
+            <a:off x="4010025" y="19030950"/>
+            <a:ext cx="104775" cy="104775"/>
+          </a:xfrm>
+          <a:prstGeom prst="ellipse">
+            <a:avLst/>
+          </a:prstGeom>
+          <a:solidFill>
+            <a:srgbClr val="65BD79"/>
+          </a:solidFill>
+          <a:ln w="9525">
+            <a:solidFill>
+              <a:srgbClr val="388F55"/>
+            </a:solidFill>
+          </a:ln>
+        </p:spPr>
+      </p:sp>
+      <p:sp>
+        <p:nvSpPr>
+          <p:cNvPr id="725" name="ellipse 725"/>
+          <p:cNvSpPr/>
+          <p:nvPr/>
+        </p:nvSpPr>
+        <p:spPr>
+          <a:xfrm>
+            <a:off x="4219575" y="19259550"/>
+            <a:ext cx="76200" cy="76200"/>
+          </a:xfrm>
+          <a:prstGeom prst="ellipse">
+            <a:avLst/>
+          </a:prstGeom>
+          <a:solidFill>
+            <a:srgbClr val="65BD79"/>
+          </a:solidFill>
+          <a:ln w="9525">
+            <a:solidFill>
+              <a:srgbClr val="388F55"/>
+            </a:solidFill>
+          </a:ln>
+        </p:spPr>
+      </p:sp>
+      <p:sp>
+        <p:nvSpPr>
+          <p:cNvPr id="726" name="ellipse 726"/>
+          <p:cNvSpPr/>
+          <p:nvPr/>
+        </p:nvSpPr>
+        <p:spPr>
+          <a:xfrm>
+            <a:off x="4791075" y="19269075"/>
+            <a:ext cx="95250" cy="95250"/>
+          </a:xfrm>
+          <a:prstGeom prst="ellipse">
+            <a:avLst/>
+          </a:prstGeom>
+          <a:solidFill>
+            <a:srgbClr val="65BD79"/>
+          </a:solidFill>
+          <a:ln w="9525">
+            <a:solidFill>
+              <a:srgbClr val="388F55"/>
+            </a:solidFill>
+          </a:ln>
+        </p:spPr>
+      </p:sp>
+      <p:sp>
+        <p:nvSpPr>
+          <p:cNvPr id="727" name="DAPI 727"/>
+          <p:cNvSpPr/>
+          <p:nvPr/>
+        </p:nvSpPr>
+        <p:spPr>
+          <a:xfrm>
+            <a:off x="3371850" y="19621500"/>
+            <a:ext cx="2476500" cy="266700"/>
+          </a:xfrm>
+          <a:prstGeom prst="rect">
+            <a:avLst/>
+          </a:prstGeom>
+          <a:noFill/>
+          <a:ln w="17145">
+            <a:noFill/>
+          </a:ln>
+        </p:spPr>
+        <p:txBody>
+          <a:bodyPr wrap="none" lIns="0" rIns="0" tIns="0" bIns="0" anchor="ctr">
+            <a:noAutofit/>
+          </a:bodyPr>
+          <a:lstStyle/>
+          <a:p>
+            <a:pPr algn="ctr"/>
+            <a:r>
+              <a:rPr sz="1425" b="0">
+                <a:solidFill>
+                  <a:srgbClr val="446DB1"/>
+                </a:solidFill>
+                <a:latin typeface="Futura"/>
+                <a:ea typeface="Futura"/>
+                <a:cs typeface="Futura"/>
+              </a:rPr>
+              <a:t>DAPI</a:t>
+            </a:r>
+          </a:p>
+        </p:txBody>
+      </p:sp>
+      <p:sp>
+        <p:nvSpPr>
+          <p:cNvPr id="728" name="roundRect 728"/>
+          <p:cNvSpPr/>
+          <p:nvPr/>
+        </p:nvSpPr>
+        <p:spPr>
+          <a:xfrm>
+            <a:off x="6496050" y="18611850"/>
+            <a:ext cx="723900" cy="733425"/>
+          </a:xfrm>
+          <a:prstGeom prst="roundRect">
+            <a:avLst>
+              <a:gd name="adj" fmla="val 11842"/>
+            </a:avLst>
+          </a:prstGeom>
+          <a:solidFill>
+            <a:srgbClr val="FFFFFF"/>
+          </a:solidFill>
+          <a:ln w="17145">
+            <a:solidFill>
+              <a:srgbClr val="8E6B80"/>
+            </a:solidFill>
+          </a:ln>
+        </p:spPr>
+      </p:sp>
+      <p:sp>
+        <p:nvSpPr>
+          <p:cNvPr id="729" name="roundRect 729"/>
+          <p:cNvSpPr/>
+          <p:nvPr/>
+        </p:nvSpPr>
+        <p:spPr>
+          <a:xfrm>
+            <a:off x="6562725" y="18945225"/>
+            <a:ext cx="590550" cy="323850"/>
+          </a:xfrm>
+          <a:prstGeom prst="roundRect">
+            <a:avLst>
+              <a:gd name="adj" fmla="val 11765"/>
+            </a:avLst>
+          </a:prstGeom>
+          <a:solidFill>
+            <a:srgbClr val="F2CADB"/>
+          </a:solidFill>
+          <a:ln w="17145">
+            <a:noFill/>
+          </a:ln>
+        </p:spPr>
+      </p:sp>
+      <p:sp>
+        <p:nvSpPr>
+          <p:cNvPr id="730" name="ellipse 730"/>
+          <p:cNvSpPr/>
+          <p:nvPr/>
+        </p:nvSpPr>
+        <p:spPr>
+          <a:xfrm>
+            <a:off x="6657975" y="19050000"/>
+            <a:ext cx="57150" cy="57150"/>
+          </a:xfrm>
+          <a:prstGeom prst="ellipse">
+            <a:avLst/>
+          </a:prstGeom>
+          <a:solidFill>
+            <a:srgbClr val="A44869"/>
+          </a:solidFill>
+          <a:ln w="17145">
+            <a:noFill/>
+          </a:ln>
+        </p:spPr>
+      </p:sp>
+      <p:sp>
+        <p:nvSpPr>
+          <p:cNvPr id="731" name="ellipse 731"/>
+          <p:cNvSpPr/>
+          <p:nvPr/>
+        </p:nvSpPr>
+        <p:spPr>
+          <a:xfrm>
+            <a:off x="6886575" y="19135725"/>
+            <a:ext cx="57150" cy="57150"/>
+          </a:xfrm>
+          <a:prstGeom prst="ellipse">
+            <a:avLst/>
+          </a:prstGeom>
+          <a:solidFill>
+            <a:srgbClr val="A44869"/>
+          </a:solidFill>
+          <a:ln w="17145">
+            <a:noFill/>
+          </a:ln>
+        </p:spPr>
+      </p:sp>
+      <p:sp>
+        <p:nvSpPr>
+          <p:cNvPr id="732" name="ellipse 732"/>
+          <p:cNvSpPr/>
+          <p:nvPr/>
+        </p:nvSpPr>
+        <p:spPr>
+          <a:xfrm>
+            <a:off x="6991350" y="19021425"/>
+            <a:ext cx="57150" cy="57150"/>
+          </a:xfrm>
+          <a:prstGeom prst="ellipse">
+            <a:avLst/>
+          </a:prstGeom>
+          <a:solidFill>
+            <a:srgbClr val="A44869"/>
+          </a:solidFill>
+          <a:ln w="17145">
+            <a:noFill/>
+          </a:ln>
+        </p:spPr>
+      </p:sp>
+      <p:sp>
+        <p:nvSpPr>
+          <p:cNvPr id="733" name="ellipse 733"/>
+          <p:cNvSpPr/>
+          <p:nvPr/>
+        </p:nvSpPr>
+        <p:spPr>
+          <a:xfrm>
+            <a:off x="6753225" y="19183350"/>
+            <a:ext cx="57150" cy="57150"/>
+          </a:xfrm>
+          <a:prstGeom prst="ellipse">
+            <a:avLst/>
+          </a:prstGeom>
+          <a:solidFill>
+            <a:srgbClr val="A44869"/>
+          </a:solidFill>
+          <a:ln w="17145">
+            <a:noFill/>
+          </a:ln>
+        </p:spPr>
+      </p:sp>
+      <p:sp>
+        <p:nvSpPr>
+          <p:cNvPr id="734" name="line 734"/>
+          <p:cNvSpPr/>
+          <p:nvPr/>
+        </p:nvSpPr>
+        <p:spPr>
+          <a:xfrm>
+            <a:off x="7343775" y="18954750"/>
+            <a:ext cx="314325" cy="0"/>
+          </a:xfrm>
+          <a:prstGeom prst="line">
+            <a:avLst/>
+          </a:prstGeom>
+          <a:noFill/>
+          <a:ln w="20955">
+            <a:solidFill>
+              <a:srgbClr val="A44869"/>
+            </a:solidFill>
+            <a:tailEnd type="triangle" w="med" len="med"/>
+          </a:ln>
+        </p:spPr>
+      </p:sp>
+      <p:sp>
+        <p:nvSpPr>
+          <p:cNvPr id="735" name="roundRect 735"/>
+          <p:cNvSpPr/>
+          <p:nvPr/>
+        </p:nvSpPr>
+        <p:spPr>
+          <a:xfrm>
+            <a:off x="7772400" y="18602325"/>
+            <a:ext cx="895350" cy="752475"/>
+          </a:xfrm>
+          <a:prstGeom prst="roundRect">
+            <a:avLst>
+              <a:gd name="adj" fmla="val 10127"/>
+            </a:avLst>
+          </a:prstGeom>
+          <a:solidFill>
+            <a:srgbClr val="FFFFFF"/>
+          </a:solidFill>
+          <a:ln w="17145">
+            <a:solidFill>
+              <a:srgbClr val="8E6B80"/>
+            </a:solidFill>
+          </a:ln>
+        </p:spPr>
+      </p:sp>
+      <p:sp>
+        <p:nvSpPr>
+          <p:cNvPr id="736" name="ellipse 736"/>
+          <p:cNvSpPr/>
+          <p:nvPr/>
+        </p:nvSpPr>
+        <p:spPr>
+          <a:xfrm>
+            <a:off x="7858125" y="18688050"/>
+            <a:ext cx="95250" cy="95250"/>
+          </a:xfrm>
+          <a:prstGeom prst="ellipse">
+            <a:avLst/>
+          </a:prstGeom>
+          <a:solidFill>
+            <a:srgbClr val="F3DCE7"/>
+          </a:solidFill>
+          <a:ln w="8572">
+            <a:solidFill>
+              <a:srgbClr val="BA7C95"/>
+            </a:solidFill>
+          </a:ln>
+        </p:spPr>
+      </p:sp>
+      <p:sp>
+        <p:nvSpPr>
+          <p:cNvPr id="737" name="ellipse 737"/>
+          <p:cNvSpPr/>
+          <p:nvPr/>
+        </p:nvSpPr>
+        <p:spPr>
+          <a:xfrm>
+            <a:off x="8010525" y="18688050"/>
+            <a:ext cx="95250" cy="95250"/>
+          </a:xfrm>
+          <a:prstGeom prst="ellipse">
+            <a:avLst/>
+          </a:prstGeom>
+          <a:solidFill>
+            <a:srgbClr val="F3DCE7"/>
+          </a:solidFill>
+          <a:ln w="8572">
+            <a:solidFill>
+              <a:srgbClr val="BA7C95"/>
+            </a:solidFill>
+          </a:ln>
+        </p:spPr>
+      </p:sp>
+      <p:sp>
+        <p:nvSpPr>
+          <p:cNvPr id="738" name="ellipse 738"/>
+          <p:cNvSpPr/>
+          <p:nvPr/>
+        </p:nvSpPr>
+        <p:spPr>
+          <a:xfrm>
+            <a:off x="8162925" y="18688050"/>
+            <a:ext cx="95250" cy="95250"/>
+          </a:xfrm>
+          <a:prstGeom prst="ellipse">
+            <a:avLst/>
+          </a:prstGeom>
+          <a:solidFill>
+            <a:srgbClr val="F3DCE7"/>
+          </a:solidFill>
+          <a:ln w="8572">
+            <a:solidFill>
+              <a:srgbClr val="BA7C95"/>
+            </a:solidFill>
+          </a:ln>
+        </p:spPr>
+      </p:sp>
+      <p:sp>
+        <p:nvSpPr>
+          <p:cNvPr id="739" name="ellipse 739"/>
+          <p:cNvSpPr/>
+          <p:nvPr/>
+        </p:nvSpPr>
+        <p:spPr>
+          <a:xfrm>
+            <a:off x="8315325" y="18688050"/>
+            <a:ext cx="95250" cy="95250"/>
+          </a:xfrm>
+          <a:prstGeom prst="ellipse">
+            <a:avLst/>
+          </a:prstGeom>
+          <a:solidFill>
+            <a:srgbClr val="F3DCE7"/>
+          </a:solidFill>
+          <a:ln w="8572">
+            <a:solidFill>
+              <a:srgbClr val="BA7C95"/>
+            </a:solidFill>
+          </a:ln>
+        </p:spPr>
+      </p:sp>
+      <p:sp>
+        <p:nvSpPr>
+          <p:cNvPr id="740" name="ellipse 740"/>
+          <p:cNvSpPr/>
+          <p:nvPr/>
+        </p:nvSpPr>
+        <p:spPr>
+          <a:xfrm>
+            <a:off x="8467725" y="18688050"/>
+            <a:ext cx="95250" cy="95250"/>
+          </a:xfrm>
+          <a:prstGeom prst="ellipse">
+            <a:avLst/>
+          </a:prstGeom>
+          <a:solidFill>
+            <a:srgbClr val="F3DCE7"/>
+          </a:solidFill>
+          <a:ln w="8572">
+            <a:solidFill>
+              <a:srgbClr val="BA7C95"/>
+            </a:solidFill>
+          </a:ln>
+        </p:spPr>
+      </p:sp>
+      <p:sp>
+        <p:nvSpPr>
+          <p:cNvPr id="741" name="ellipse 741"/>
+          <p:cNvSpPr/>
+          <p:nvPr/>
+        </p:nvSpPr>
+        <p:spPr>
+          <a:xfrm>
+            <a:off x="7858125" y="18849975"/>
+            <a:ext cx="95250" cy="95250"/>
+          </a:xfrm>
+          <a:prstGeom prst="ellipse">
+            <a:avLst/>
+          </a:prstGeom>
+          <a:solidFill>
+            <a:srgbClr val="F3DCE7"/>
+          </a:solidFill>
+          <a:ln w="8572">
+            <a:solidFill>
+              <a:srgbClr val="BA7C95"/>
+            </a:solidFill>
+          </a:ln>
+        </p:spPr>
+      </p:sp>
+      <p:sp>
+        <p:nvSpPr>
+          <p:cNvPr id="742" name="ellipse 742"/>
+          <p:cNvSpPr/>
+          <p:nvPr/>
+        </p:nvSpPr>
+        <p:spPr>
+          <a:xfrm>
+            <a:off x="8010525" y="18849975"/>
+            <a:ext cx="95250" cy="95250"/>
+          </a:xfrm>
+          <a:prstGeom prst="ellipse">
+            <a:avLst/>
+          </a:prstGeom>
+          <a:solidFill>
+            <a:srgbClr val="F3DCE7"/>
+          </a:solidFill>
+          <a:ln w="8572">
+            <a:solidFill>
+              <a:srgbClr val="BA7C95"/>
+            </a:solidFill>
+          </a:ln>
+        </p:spPr>
+      </p:sp>
+      <p:sp>
+        <p:nvSpPr>
+          <p:cNvPr id="743" name="ellipse 743"/>
+          <p:cNvSpPr/>
+          <p:nvPr/>
+        </p:nvSpPr>
+        <p:spPr>
+          <a:xfrm>
+            <a:off x="8162925" y="18849975"/>
+            <a:ext cx="95250" cy="95250"/>
+          </a:xfrm>
+          <a:prstGeom prst="ellipse">
+            <a:avLst/>
+          </a:prstGeom>
+          <a:solidFill>
+            <a:srgbClr val="F3DCE7"/>
+          </a:solidFill>
+          <a:ln w="8572">
+            <a:solidFill>
+              <a:srgbClr val="BA7C95"/>
+            </a:solidFill>
+          </a:ln>
+        </p:spPr>
+      </p:sp>
+      <p:sp>
+        <p:nvSpPr>
+          <p:cNvPr id="744" name="ellipse 744"/>
+          <p:cNvSpPr/>
+          <p:nvPr/>
+        </p:nvSpPr>
+        <p:spPr>
+          <a:xfrm>
+            <a:off x="8315325" y="18849975"/>
+            <a:ext cx="95250" cy="95250"/>
+          </a:xfrm>
+          <a:prstGeom prst="ellipse">
+            <a:avLst/>
+          </a:prstGeom>
+          <a:solidFill>
+            <a:srgbClr val="F3DCE7"/>
+          </a:solidFill>
+          <a:ln w="8572">
+            <a:solidFill>
+              <a:srgbClr val="BA7C95"/>
+            </a:solidFill>
+          </a:ln>
+        </p:spPr>
+      </p:sp>
+      <p:sp>
+        <p:nvSpPr>
+          <p:cNvPr id="745" name="ellipse 745"/>
+          <p:cNvSpPr/>
+          <p:nvPr/>
+        </p:nvSpPr>
+        <p:spPr>
+          <a:xfrm>
+            <a:off x="8467725" y="18849975"/>
+            <a:ext cx="95250" cy="95250"/>
+          </a:xfrm>
+          <a:prstGeom prst="ellipse">
+            <a:avLst/>
+          </a:prstGeom>
+          <a:solidFill>
+            <a:srgbClr val="F3DCE7"/>
+          </a:solidFill>
+          <a:ln w="8572">
+            <a:solidFill>
+              <a:srgbClr val="BA7C95"/>
+            </a:solidFill>
+          </a:ln>
+        </p:spPr>
+      </p:sp>
+      <p:sp>
+        <p:nvSpPr>
+          <p:cNvPr id="746" name="ellipse 746"/>
+          <p:cNvSpPr/>
+          <p:nvPr/>
+        </p:nvSpPr>
+        <p:spPr>
+          <a:xfrm>
+            <a:off x="7858125" y="19011900"/>
+            <a:ext cx="95250" cy="95250"/>
+          </a:xfrm>
+          <a:prstGeom prst="ellipse">
+            <a:avLst/>
+          </a:prstGeom>
+          <a:solidFill>
+            <a:srgbClr val="F3DCE7"/>
+          </a:solidFill>
+          <a:ln w="8572">
+            <a:solidFill>
+              <a:srgbClr val="BA7C95"/>
+            </a:solidFill>
+          </a:ln>
+        </p:spPr>
+      </p:sp>
+      <p:sp>
+        <p:nvSpPr>
+          <p:cNvPr id="747" name="ellipse 747"/>
+          <p:cNvSpPr/>
+          <p:nvPr/>
+        </p:nvSpPr>
+        <p:spPr>
+          <a:xfrm>
+            <a:off x="8010525" y="19011900"/>
+            <a:ext cx="95250" cy="95250"/>
+          </a:xfrm>
+          <a:prstGeom prst="ellipse">
+            <a:avLst/>
+          </a:prstGeom>
+          <a:solidFill>
+            <a:srgbClr val="F3DCE7"/>
+          </a:solidFill>
+          <a:ln w="8572">
+            <a:solidFill>
+              <a:srgbClr val="BA7C95"/>
+            </a:solidFill>
+          </a:ln>
+        </p:spPr>
+      </p:sp>
+      <p:sp>
+        <p:nvSpPr>
+          <p:cNvPr id="748" name="ellipse 748"/>
+          <p:cNvSpPr/>
+          <p:nvPr/>
+        </p:nvSpPr>
+        <p:spPr>
+          <a:xfrm>
+            <a:off x="8162925" y="19011900"/>
+            <a:ext cx="95250" cy="95250"/>
+          </a:xfrm>
+          <a:prstGeom prst="ellipse">
+            <a:avLst/>
+          </a:prstGeom>
+          <a:solidFill>
+            <a:srgbClr val="F3DCE7"/>
+          </a:solidFill>
+          <a:ln w="8572">
+            <a:solidFill>
+              <a:srgbClr val="BA7C95"/>
+            </a:solidFill>
+          </a:ln>
+        </p:spPr>
+      </p:sp>
+      <p:sp>
+        <p:nvSpPr>
+          <p:cNvPr id="749" name="ellipse 749"/>
+          <p:cNvSpPr/>
+          <p:nvPr/>
+        </p:nvSpPr>
+        <p:spPr>
+          <a:xfrm>
+            <a:off x="8315325" y="19011900"/>
+            <a:ext cx="95250" cy="95250"/>
+          </a:xfrm>
+          <a:prstGeom prst="ellipse">
+            <a:avLst/>
+          </a:prstGeom>
+          <a:solidFill>
+            <a:srgbClr val="F3DCE7"/>
+          </a:solidFill>
+          <a:ln w="8572">
+            <a:solidFill>
+              <a:srgbClr val="BA7C95"/>
+            </a:solidFill>
+          </a:ln>
+        </p:spPr>
+      </p:sp>
+      <p:sp>
+        <p:nvSpPr>
+          <p:cNvPr id="750" name="ellipse 750"/>
+          <p:cNvSpPr/>
+          <p:nvPr/>
+        </p:nvSpPr>
+        <p:spPr>
+          <a:xfrm>
+            <a:off x="8467725" y="19011900"/>
+            <a:ext cx="95250" cy="95250"/>
+          </a:xfrm>
+          <a:prstGeom prst="ellipse">
+            <a:avLst/>
+          </a:prstGeom>
+          <a:solidFill>
+            <a:srgbClr val="F3DCE7"/>
+          </a:solidFill>
+          <a:ln w="8572">
+            <a:solidFill>
+              <a:srgbClr val="BA7C95"/>
+            </a:solidFill>
+          </a:ln>
+        </p:spPr>
+      </p:sp>
+      <p:sp>
+        <p:nvSpPr>
+          <p:cNvPr id="751" name="ellipse 751"/>
+          <p:cNvSpPr/>
+          <p:nvPr/>
+        </p:nvSpPr>
+        <p:spPr>
+          <a:xfrm>
+            <a:off x="7858125" y="19173825"/>
+            <a:ext cx="95250" cy="95250"/>
+          </a:xfrm>
+          <a:prstGeom prst="ellipse">
+            <a:avLst/>
+          </a:prstGeom>
+          <a:solidFill>
+            <a:srgbClr val="F3DCE7"/>
+          </a:solidFill>
+          <a:ln w="8572">
+            <a:solidFill>
+              <a:srgbClr val="BA7C95"/>
+            </a:solidFill>
+          </a:ln>
+        </p:spPr>
+      </p:sp>
+      <p:sp>
+        <p:nvSpPr>
+          <p:cNvPr id="752" name="ellipse 752"/>
+          <p:cNvSpPr/>
+          <p:nvPr/>
+        </p:nvSpPr>
+        <p:spPr>
+          <a:xfrm>
+            <a:off x="8010525" y="19173825"/>
+            <a:ext cx="95250" cy="95250"/>
+          </a:xfrm>
+          <a:prstGeom prst="ellipse">
+            <a:avLst/>
+          </a:prstGeom>
+          <a:solidFill>
+            <a:srgbClr val="F3DCE7"/>
+          </a:solidFill>
+          <a:ln w="8572">
+            <a:solidFill>
+              <a:srgbClr val="BA7C95"/>
+            </a:solidFill>
+          </a:ln>
+        </p:spPr>
+      </p:sp>
+      <p:sp>
+        <p:nvSpPr>
+          <p:cNvPr id="753" name="ellipse 753"/>
+          <p:cNvSpPr/>
+          <p:nvPr/>
+        </p:nvSpPr>
+        <p:spPr>
+          <a:xfrm>
+            <a:off x="8162925" y="19173825"/>
+            <a:ext cx="95250" cy="95250"/>
+          </a:xfrm>
+          <a:prstGeom prst="ellipse">
+            <a:avLst/>
+          </a:prstGeom>
+          <a:solidFill>
+            <a:srgbClr val="F3DCE7"/>
+          </a:solidFill>
+          <a:ln w="8572">
+            <a:solidFill>
+              <a:srgbClr val="BA7C95"/>
+            </a:solidFill>
+          </a:ln>
+        </p:spPr>
+      </p:sp>
+      <p:sp>
+        <p:nvSpPr>
+          <p:cNvPr id="754" name="ellipse 754"/>
+          <p:cNvSpPr/>
+          <p:nvPr/>
+        </p:nvSpPr>
+        <p:spPr>
+          <a:xfrm>
+            <a:off x="8315325" y="19173825"/>
+            <a:ext cx="95250" cy="95250"/>
+          </a:xfrm>
+          <a:prstGeom prst="ellipse">
+            <a:avLst/>
+          </a:prstGeom>
+          <a:solidFill>
+            <a:srgbClr val="F3DCE7"/>
+          </a:solidFill>
+          <a:ln w="8572">
+            <a:solidFill>
+              <a:srgbClr val="BA7C95"/>
+            </a:solidFill>
+          </a:ln>
+        </p:spPr>
+      </p:sp>
+      <p:sp>
+        <p:nvSpPr>
+          <p:cNvPr id="755" name="ellipse 755"/>
+          <p:cNvSpPr/>
+          <p:nvPr/>
+        </p:nvSpPr>
+        <p:spPr>
+          <a:xfrm>
+            <a:off x="8467725" y="19173825"/>
+            <a:ext cx="95250" cy="95250"/>
+          </a:xfrm>
+          <a:prstGeom prst="ellipse">
+            <a:avLst/>
+          </a:prstGeom>
+          <a:solidFill>
+            <a:srgbClr val="F3DCE7"/>
+          </a:solidFill>
+          <a:ln w="8572">
+            <a:solidFill>
+              <a:srgbClr val="BA7C95"/>
+            </a:solidFill>
+          </a:ln>
+        </p:spPr>
+      </p:sp>
+      <p:sp>
+        <p:nvSpPr>
+          <p:cNvPr id="756" name="Supernatant 756"/>
+          <p:cNvSpPr/>
+          <p:nvPr/>
+        </p:nvSpPr>
+        <p:spPr>
+          <a:xfrm>
+            <a:off x="6200775" y="19554825"/>
+            <a:ext cx="1352550" cy="276225"/>
+          </a:xfrm>
+          <a:prstGeom prst="rect">
+            <a:avLst/>
+          </a:prstGeom>
+          <a:noFill/>
+          <a:ln w="17145">
+            <a:noFill/>
+          </a:ln>
+        </p:spPr>
+        <p:txBody>
+          <a:bodyPr wrap="none" lIns="0" rIns="0" tIns="0" bIns="0" anchor="ctr">
+            <a:noAutofit/>
+          </a:bodyPr>
+          <a:lstStyle/>
+          <a:p>
+            <a:pPr algn="ctr"/>
+            <a:r>
+              <a:rPr sz="1200" b="0">
+                <a:solidFill>
+                  <a:srgbClr val="A44869"/>
+                </a:solidFill>
+                <a:latin typeface="Futura"/>
+                <a:ea typeface="Futura"/>
+                <a:cs typeface="Futura"/>
+              </a:rPr>
+              <a:t>Supernatant</a:t>
+            </a:r>
+          </a:p>
+        </p:txBody>
+      </p:sp>
+      <p:sp>
+        <p:nvSpPr>
+          <p:cNvPr id="757" name="ELISA 757"/>
+          <p:cNvSpPr/>
+          <p:nvPr/>
+        </p:nvSpPr>
+        <p:spPr>
+          <a:xfrm>
+            <a:off x="7639050" y="19554825"/>
+            <a:ext cx="1162050" cy="276225"/>
+          </a:xfrm>
+          <a:prstGeom prst="rect">
+            <a:avLst/>
+          </a:prstGeom>
+          <a:noFill/>
+          <a:ln w="17145">
+            <a:noFill/>
+          </a:ln>
+        </p:spPr>
+        <p:txBody>
+          <a:bodyPr wrap="none" lIns="0" rIns="0" tIns="0" bIns="0" anchor="ctr">
+            <a:noAutofit/>
+          </a:bodyPr>
+          <a:lstStyle/>
+          <a:p>
+            <a:pPr algn="ctr"/>
+            <a:r>
+              <a:rPr sz="1275" b="0">
+                <a:solidFill>
+                  <a:srgbClr val="A44869"/>
+                </a:solidFill>
+                <a:latin typeface="Futura"/>
+                <a:ea typeface="Futura"/>
+                <a:cs typeface="Futura"/>
+              </a:rPr>
+              <a:t>ELISA</a:t>
+            </a:r>
+          </a:p>
+        </p:txBody>
+      </p:sp>
+      <p:sp>
+        <p:nvSpPr>
+          <p:cNvPr id="901" name="roundRect 901"/>
+          <p:cNvSpPr/>
+          <p:nvPr/>
+        </p:nvSpPr>
+        <p:spPr>
+          <a:xfrm>
+            <a:off x="742950" y="18554700"/>
+            <a:ext cx="1104900" cy="914400"/>
+          </a:xfrm>
+          <a:prstGeom prst="roundRect">
+            <a:avLst>
+              <a:gd name="adj" fmla="val 12500"/>
+            </a:avLst>
+          </a:prstGeom>
+          <a:solidFill>
+            <a:srgbClr val="E7EDF3"/>
+          </a:solidFill>
+          <a:ln w="19050">
+            <a:solidFill>
+              <a:srgbClr val="607A90"/>
+            </a:solidFill>
+          </a:ln>
+        </p:spPr>
+      </p:sp>
+      <p:sp>
+        <p:nvSpPr>
+          <p:cNvPr id="902" name="roundRect 902"/>
+          <p:cNvSpPr/>
+          <p:nvPr/>
+        </p:nvSpPr>
+        <p:spPr>
+          <a:xfrm>
+            <a:off x="866775" y="18678525"/>
+            <a:ext cx="857250" cy="390525"/>
+          </a:xfrm>
+          <a:prstGeom prst="roundRect">
+            <a:avLst>
+              <a:gd name="adj" fmla="val 14634"/>
+            </a:avLst>
+          </a:prstGeom>
+          <a:solidFill>
+            <a:srgbClr val="30495D"/>
+          </a:solidFill>
+          <a:ln w="17145">
+            <a:noFill/>
+          </a:ln>
+        </p:spPr>
+      </p:sp>
+      <p:sp>
+        <p:nvSpPr>
+          <p:cNvPr id="903" name="line 903"/>
+          <p:cNvSpPr/>
+          <p:nvPr/>
+        </p:nvSpPr>
+        <p:spPr>
+          <a:xfrm>
+            <a:off x="981075" y="18935700"/>
+            <a:ext cx="161925" cy="0"/>
+          </a:xfrm>
+          <a:prstGeom prst="line">
+            <a:avLst/>
+          </a:prstGeom>
+          <a:noFill/>
+          <a:ln w="19050">
+            <a:solidFill>
+              <a:srgbClr val="82D5B2"/>
+            </a:solidFill>
+          </a:ln>
+        </p:spPr>
+      </p:sp>
+      <p:sp>
+        <p:nvSpPr>
+          <p:cNvPr id="904" name="line 904"/>
+          <p:cNvSpPr/>
+          <p:nvPr/>
+        </p:nvSpPr>
+        <p:spPr>
+          <a:xfrm>
+            <a:off x="1143000" y="18802350"/>
             <a:ext cx="0" cy="133350"/>
           </a:xfrm>
-          <a:prstGeom prst="straightConnector1">
-            <a:avLst/>
-          </a:prstGeom>
-          <a:ln w="24765">
-            <a:solidFill>
-              <a:srgbClr val="087B61"/>
-            </a:solidFill>
-            <a:prstDash val="dash"/>
-            <a:tailEnd type="none" w="med" len="med"/>
-          </a:ln>
-        </p:spPr>
-      </p:cxnSp>
-      <p:cxnSp>
-        <p:nvCxnSpPr>
-          <p:cNvPr id="409" name="Portrait connector 409"/>
-          <p:cNvCxnSpPr/>
-          <p:nvPr/>
-        </p:nvCxnSpPr>
-        <p:spPr>
-          <a:xfrm flipH="1">
-            <a:off x="4171950" y="2628900"/>
-            <a:ext cx="1847850" cy="0"/>
-          </a:xfrm>
-          <a:prstGeom prst="straightConnector1">
-            <a:avLst/>
-          </a:prstGeom>
-          <a:ln w="24765">
-            <a:solidFill>
-              <a:srgbClr val="087B61"/>
-            </a:solidFill>
-            <a:prstDash val="dash"/>
-            <a:tailEnd type="none" w="med" len="med"/>
-          </a:ln>
-        </p:spPr>
-      </p:cxnSp>
-      <p:cxnSp>
-        <p:nvCxnSpPr>
-          <p:cNvPr id="410" name="Portrait connector 410"/>
-          <p:cNvCxnSpPr/>
-          <p:nvPr/>
-        </p:nvCxnSpPr>
-        <p:spPr>
-          <a:xfrm>
-            <a:off x="4171950" y="2628900"/>
+          <a:prstGeom prst="line">
+            <a:avLst/>
+          </a:prstGeom>
+          <a:noFill/>
+          <a:ln w="19050">
+            <a:solidFill>
+              <a:srgbClr val="82D5B2"/>
+            </a:solidFill>
+          </a:ln>
+        </p:spPr>
+      </p:sp>
+      <p:sp>
+        <p:nvSpPr>
+          <p:cNvPr id="905" name="line 905"/>
+          <p:cNvSpPr/>
+          <p:nvPr/>
+        </p:nvSpPr>
+        <p:spPr>
+          <a:xfrm>
+            <a:off x="1143000" y="18802350"/>
+            <a:ext cx="200025" cy="0"/>
+          </a:xfrm>
+          <a:prstGeom prst="line">
+            <a:avLst/>
+          </a:prstGeom>
+          <a:noFill/>
+          <a:ln w="19050">
+            <a:solidFill>
+              <a:srgbClr val="82D5B2"/>
+            </a:solidFill>
+          </a:ln>
+        </p:spPr>
+      </p:sp>
+      <p:sp>
+        <p:nvSpPr>
+          <p:cNvPr id="906" name="line 906"/>
+          <p:cNvSpPr/>
+          <p:nvPr/>
+        </p:nvSpPr>
+        <p:spPr>
+          <a:xfrm>
+            <a:off x="1343025" y="18802350"/>
             <a:ext cx="0" cy="133350"/>
           </a:xfrm>
-          <a:prstGeom prst="straightConnector1">
-            <a:avLst/>
-          </a:prstGeom>
-          <a:ln w="24765">
-            <a:solidFill>
-              <a:srgbClr val="087B61"/>
-            </a:solidFill>
-            <a:prstDash val="dash"/>
-            <a:tailEnd type="triangle" w="med" len="med"/>
-          </a:ln>
-        </p:spPr>
-      </p:cxnSp>
-      <p:cxnSp>
-        <p:nvCxnSpPr>
-          <p:cNvPr id="411" name="Portrait connector 411"/>
-          <p:cNvCxnSpPr>
-            <a:cxnSpLocks/>
-          </p:cNvCxnSpPr>
-          <p:nvPr/>
-        </p:nvCxnSpPr>
-        <p:spPr>
-          <a:xfrm>
-            <a:off x="5067300" y="4343400"/>
-            <a:ext cx="190500" cy="0"/>
-          </a:xfrm>
-          <a:prstGeom prst="straightConnector1">
-            <a:avLst/>
-          </a:prstGeom>
-          <a:ln w="24765">
-            <a:solidFill>
-              <a:srgbClr val="B95712"/>
-            </a:solidFill>
-            <a:prstDash val="dash"/>
-            <a:tailEnd type="triangle" w="med" len="med"/>
-          </a:ln>
-        </p:spPr>
-      </p:cxnSp>
+          <a:prstGeom prst="line">
+            <a:avLst/>
+          </a:prstGeom>
+          <a:noFill/>
+          <a:ln w="19050">
+            <a:solidFill>
+              <a:srgbClr val="82D5B2"/>
+            </a:solidFill>
+          </a:ln>
+        </p:spPr>
+      </p:sp>
+      <p:sp>
+        <p:nvSpPr>
+          <p:cNvPr id="907" name="line 907"/>
+          <p:cNvSpPr/>
+          <p:nvPr/>
+        </p:nvSpPr>
+        <p:spPr>
+          <a:xfrm>
+            <a:off x="1343025" y="18935700"/>
+            <a:ext cx="266700" cy="0"/>
+          </a:xfrm>
+          <a:prstGeom prst="line">
+            <a:avLst/>
+          </a:prstGeom>
+          <a:noFill/>
+          <a:ln w="19050">
+            <a:solidFill>
+              <a:srgbClr val="82D5B2"/>
+            </a:solidFill>
+          </a:ln>
+        </p:spPr>
+      </p:sp>
+      <p:sp>
+        <p:nvSpPr>
+          <p:cNvPr id="908" name="roundRect 908"/>
+          <p:cNvSpPr/>
+          <p:nvPr/>
+        </p:nvSpPr>
+        <p:spPr>
+          <a:xfrm>
+            <a:off x="914400" y="19183350"/>
+            <a:ext cx="247650" cy="85725"/>
+          </a:xfrm>
+          <a:prstGeom prst="roundRect">
+            <a:avLst>
+              <a:gd name="adj" fmla="val 33333"/>
+            </a:avLst>
+          </a:prstGeom>
+          <a:solidFill>
+            <a:srgbClr val="A5B9CB"/>
+          </a:solidFill>
+          <a:ln w="17145">
+            <a:noFill/>
+          </a:ln>
+        </p:spPr>
+      </p:sp>
+      <p:sp>
+        <p:nvSpPr>
+          <p:cNvPr id="909" name="ellipse 909"/>
+          <p:cNvSpPr/>
+          <p:nvPr/>
+        </p:nvSpPr>
+        <p:spPr>
+          <a:xfrm>
+            <a:off x="1457325" y="19164300"/>
+            <a:ext cx="171450" cy="171450"/>
+          </a:xfrm>
+          <a:prstGeom prst="ellipse">
+            <a:avLst/>
+          </a:prstGeom>
+          <a:solidFill>
+            <a:srgbClr val="FFFFFF"/>
+          </a:solidFill>
+          <a:ln w="15240">
+            <a:solidFill>
+              <a:srgbClr val="607A90"/>
+            </a:solidFill>
+          </a:ln>
+        </p:spPr>
+      </p:sp>
+      <p:sp>
+        <p:nvSpPr>
+          <p:cNvPr id="910" name="line 910"/>
+          <p:cNvSpPr/>
+          <p:nvPr/>
+        </p:nvSpPr>
+        <p:spPr>
+          <a:xfrm>
+            <a:off x="1847850" y="19259550"/>
+            <a:ext cx="142875" cy="0"/>
+          </a:xfrm>
+          <a:prstGeom prst="line">
+            <a:avLst/>
+          </a:prstGeom>
+          <a:noFill/>
+          <a:ln w="20955">
+            <a:solidFill>
+              <a:srgbClr val="607A90"/>
+            </a:solidFill>
+          </a:ln>
+        </p:spPr>
+      </p:sp>
+      <p:sp>
+        <p:nvSpPr>
+          <p:cNvPr id="911" name="line 911"/>
+          <p:cNvSpPr/>
+          <p:nvPr/>
+        </p:nvSpPr>
+        <p:spPr>
+          <a:xfrm>
+            <a:off x="1990725" y="19040475"/>
+            <a:ext cx="0" cy="219075"/>
+          </a:xfrm>
+          <a:prstGeom prst="line">
+            <a:avLst/>
+          </a:prstGeom>
+          <a:noFill/>
+          <a:ln w="20955">
+            <a:solidFill>
+              <a:srgbClr val="607A90"/>
+            </a:solidFill>
+          </a:ln>
+        </p:spPr>
+      </p:sp>
+      <p:sp>
+        <p:nvSpPr>
+          <p:cNvPr id="912" name="line 912"/>
+          <p:cNvSpPr/>
+          <p:nvPr/>
+        </p:nvSpPr>
+        <p:spPr>
+          <a:xfrm>
+            <a:off x="1990725" y="19040475"/>
+            <a:ext cx="142875" cy="0"/>
+          </a:xfrm>
+          <a:prstGeom prst="line">
+            <a:avLst/>
+          </a:prstGeom>
+          <a:noFill/>
+          <a:ln w="20955">
+            <a:solidFill>
+              <a:srgbClr val="607A90"/>
+            </a:solidFill>
+          </a:ln>
+        </p:spPr>
+      </p:sp>
+      <p:sp>
+        <p:nvSpPr>
+          <p:cNvPr id="913" name="roundRect 913"/>
+          <p:cNvSpPr/>
+          <p:nvPr/>
+        </p:nvSpPr>
+        <p:spPr>
+          <a:xfrm>
+            <a:off x="2133600" y="18688050"/>
+            <a:ext cx="76200" cy="704850"/>
+          </a:xfrm>
+          <a:prstGeom prst="roundRect">
+            <a:avLst>
+              <a:gd name="adj" fmla="val 37500"/>
+            </a:avLst>
+          </a:prstGeom>
+          <a:solidFill>
+            <a:srgbClr val="C7D6E2"/>
+          </a:solidFill>
+          <a:ln w="13335">
+            <a:solidFill>
+              <a:srgbClr val="607A90"/>
+            </a:solidFill>
+          </a:ln>
+        </p:spPr>
+      </p:sp>
+      <p:sp>
+        <p:nvSpPr>
+          <p:cNvPr id="914" name="roundRect 914"/>
+          <p:cNvSpPr/>
+          <p:nvPr/>
+        </p:nvSpPr>
+        <p:spPr>
+          <a:xfrm>
+            <a:off x="2914650" y="18688050"/>
+            <a:ext cx="76200" cy="704850"/>
+          </a:xfrm>
+          <a:prstGeom prst="roundRect">
+            <a:avLst>
+              <a:gd name="adj" fmla="val 37500"/>
+            </a:avLst>
+          </a:prstGeom>
+          <a:solidFill>
+            <a:srgbClr val="C7D6E2"/>
+          </a:solidFill>
+          <a:ln w="13335">
+            <a:solidFill>
+              <a:srgbClr val="607A90"/>
+            </a:solidFill>
+          </a:ln>
+        </p:spPr>
+      </p:sp>
+      <p:sp>
+        <p:nvSpPr>
+          <p:cNvPr id="915" name="ellipse 915"/>
+          <p:cNvSpPr/>
+          <p:nvPr/>
+        </p:nvSpPr>
+        <p:spPr>
+          <a:xfrm>
+            <a:off x="2286000" y="18792825"/>
+            <a:ext cx="552450" cy="466725"/>
+          </a:xfrm>
+          <a:prstGeom prst="ellipse">
+            <a:avLst/>
+          </a:prstGeom>
+          <a:solidFill>
+            <a:srgbClr val="F6DCE6"/>
+          </a:solidFill>
+          <a:ln w="17145">
+            <a:solidFill>
+              <a:srgbClr val="A44869"/>
+            </a:solidFill>
+          </a:ln>
+        </p:spPr>
+      </p:sp>
+      <p:sp>
+        <p:nvSpPr>
+          <p:cNvPr id="916" name="ellipse 916"/>
+          <p:cNvSpPr/>
+          <p:nvPr/>
+        </p:nvSpPr>
+        <p:spPr>
+          <a:xfrm>
+            <a:off x="2457450" y="18945225"/>
+            <a:ext cx="209550" cy="171450"/>
+          </a:xfrm>
+          <a:prstGeom prst="ellipse">
+            <a:avLst/>
+          </a:prstGeom>
+          <a:solidFill>
+            <a:srgbClr val="C3B4DA"/>
+          </a:solidFill>
+          <a:ln w="11430">
+            <a:solidFill>
+              <a:srgbClr val="8974A6"/>
+            </a:solidFill>
+          </a:ln>
+        </p:spPr>
+      </p:sp>
+      <p:sp>
+        <p:nvSpPr>
+          <p:cNvPr id="917" name="Electroporator 917"/>
+          <p:cNvSpPr/>
+          <p:nvPr/>
+        </p:nvSpPr>
+        <p:spPr>
+          <a:xfrm>
+            <a:off x="666750" y="19573875"/>
+            <a:ext cx="1266825" cy="228600"/>
+          </a:xfrm>
+          <a:prstGeom prst="rect">
+            <a:avLst/>
+          </a:prstGeom>
+          <a:noFill/>
+          <a:ln w="17145">
+            <a:noFill/>
+          </a:ln>
+        </p:spPr>
+        <p:txBody>
+          <a:bodyPr wrap="none" lIns="0" rIns="0" tIns="0" bIns="0" anchor="ctr">
+            <a:noAutofit/>
+          </a:bodyPr>
+          <a:lstStyle/>
+          <a:p>
+            <a:pPr algn="ctr"/>
+            <a:r>
+              <a:rPr sz="1200" b="0">
+                <a:solidFill>
+                  <a:srgbClr val="A44869"/>
+                </a:solidFill>
+                <a:latin typeface="Futura"/>
+                <a:ea typeface="Futura"/>
+                <a:cs typeface="Futura"/>
+              </a:rPr>
+              <a:t>Electroporator</a:t>
+            </a:r>
+          </a:p>
+        </p:txBody>
+      </p:sp>
+      <p:sp>
+        <p:nvSpPr>
+          <p:cNvPr id="918" name="CCF-STTG1 918"/>
+          <p:cNvSpPr/>
+          <p:nvPr/>
+        </p:nvSpPr>
+        <p:spPr>
+          <a:xfrm>
+            <a:off x="1971675" y="19573875"/>
+            <a:ext cx="1162050" cy="228600"/>
+          </a:xfrm>
+          <a:prstGeom prst="rect">
+            <a:avLst/>
+          </a:prstGeom>
+          <a:noFill/>
+          <a:ln w="17145">
+            <a:noFill/>
+          </a:ln>
+        </p:spPr>
+        <p:txBody>
+          <a:bodyPr wrap="none" lIns="0" rIns="0" tIns="0" bIns="0" anchor="ctr">
+            <a:noAutofit/>
+          </a:bodyPr>
+          <a:lstStyle/>
+          <a:p>
+            <a:pPr algn="ctr"/>
+            <a:r>
+              <a:rPr sz="1200" b="0">
+                <a:solidFill>
+                  <a:srgbClr val="A44869"/>
+                </a:solidFill>
+                <a:latin typeface="Futura"/>
+                <a:ea typeface="Futura"/>
+                <a:cs typeface="Futura"/>
+              </a:rPr>
+              <a:t>CCF-STTG1</a:t>
+            </a:r>
+          </a:p>
+        </p:txBody>
+      </p:sp>
+      <p:sp>
+        <p:nvSpPr>
+          <p:cNvPr id="919" name="downArrow 919"/>
+          <p:cNvSpPr/>
+          <p:nvPr/>
+        </p:nvSpPr>
+        <p:spPr>
+          <a:xfrm>
+            <a:off x="4438650" y="3476625"/>
+            <a:ext cx="419100" cy="323850"/>
+          </a:xfrm>
+          <a:prstGeom prst="downArrow">
+            <a:avLst/>
+          </a:prstGeom>
+          <a:solidFill>
+            <a:srgbClr val="7D91A6"/>
+          </a:solidFill>
+          <a:ln w="17145">
+            <a:noFill/>
+          </a:ln>
+        </p:spPr>
+      </p:sp>
+      <p:sp>
+        <p:nvSpPr>
+          <p:cNvPr id="920" name="downArrow 920"/>
+          <p:cNvSpPr/>
+          <p:nvPr/>
+        </p:nvSpPr>
+        <p:spPr>
+          <a:xfrm>
+            <a:off x="4438650" y="16354425"/>
+            <a:ext cx="419100" cy="323850"/>
+          </a:xfrm>
+          <a:prstGeom prst="downArrow">
+            <a:avLst/>
+          </a:prstGeom>
+          <a:solidFill>
+            <a:srgbClr val="7D91A6"/>
+          </a:solidFill>
+          <a:ln w="17145">
+            <a:noFill/>
+          </a:ln>
+        </p:spPr>
+      </p:sp>
     </p:spTree>
     <p:extLst>
       <p:ext uri="{BB962C8B-B14F-4D97-AF65-F5344CB8AC3E}">
